--- a/slides.pptx
+++ b/slides.pptx
@@ -530,7 +530,8 @@
           <a:p>
             <a:r>
               <a:rPr lang="en-US" dirty="0"/>
-              <a:t/>
+              <a:t>Introduce yourself. CPO at Stellar Development Foundation.
+This talk is about why the crypto ecosystem has been building privacy wrong, and what it looks like to get it right -- especially for institutions.</a:t>
             </a:r>
             <a:endParaRPr lang="en-US" dirty="0"/>
           </a:p>
@@ -618,7 +619,7 @@
           <a:p>
             <a:r>
               <a:rPr lang="en-US" dirty="0"/>
-              <a:t/>
+              <a:t>The right question isn't "private or public?" -- it's "private from whom?" Pre-trade privacy but post-settlement transparency. Counterparty-visible but public-hidden. Regulator-accessible but competitor-blind. These are all valid points on the spectrum.</a:t>
             </a:r>
             <a:endParaRPr lang="en-US" dirty="0"/>
           </a:p>
@@ -706,7 +707,7 @@
           <a:p>
             <a:r>
               <a:rPr lang="en-US" dirty="0"/>
-              <a:t/>
+              <a:t>So what happens when you don't design for the spectrum? You end up at one of two dead ends. Neither works.</a:t>
             </a:r>
             <a:endParaRPr lang="en-US" dirty="0"/>
           </a:p>
@@ -794,7 +795,7 @@
           <a:p>
             <a:r>
               <a:rPr lang="en-US" dirty="0"/>
-              <a:t/>
+              <a:t>The first dead end: total privacy. Fully shielded chains give you opacity but you lose everything that makes blockchain valuable. You can't compose with DeFi. You can't audit. You can't comply with any regulatory framework. The transparent ledger -- the thing that makes blockchain trustworthy -- is gone. You've broken the chain.</a:t>
             </a:r>
             <a:endParaRPr lang="en-US" dirty="0"/>
           </a:p>
@@ -882,7 +883,7 @@
           <a:p>
             <a:r>
               <a:rPr lang="en-US" dirty="0"/>
-              <a:t/>
+              <a:t>The second dead end: give up on public chains entirely. Institutions retreat to permissioned databases or private ledgers. You get privacy and compliance, but you lose neutrality, composability, shared settlement, open access. You're back to the old system with extra steps. You've abandoned the chain.</a:t>
             </a:r>
             <a:endParaRPr lang="en-US" dirty="0"/>
           </a:p>
@@ -970,7 +971,7 @@
           <a:p>
             <a:r>
               <a:rPr lang="en-US" dirty="0"/>
-              <a:t/>
+              <a:t>Pause here. Let this land. Both extremes fail. We need a third path.</a:t>
             </a:r>
             <a:endParaRPr lang="en-US" dirty="0"/>
           </a:p>
@@ -1058,7 +1059,7 @@
           <a:p>
             <a:r>
               <a:rPr lang="en-US" dirty="0"/>
-              <a:t/>
+              <a:t>The third path. Not a compromise -- a clear architectural principle.</a:t>
             </a:r>
             <a:endParaRPr lang="en-US" dirty="0"/>
           </a:p>
@@ -1146,7 +1147,7 @@
           <a:p>
             <a:r>
               <a:rPr lang="en-US" dirty="0"/>
-              <a:t/>
+              <a:t>Two layers. The base layer stays fully transparent -- that's the feature, that's what gives blockchain its integrity. Privacy is built on top, at the application layer. It's opt-in. It's configurable. You choose what to reveal and what to hide, based on your jurisdiction, your use case, and your risk profile. The base layer doesn't need to change.</a:t>
             </a:r>
             <a:endParaRPr lang="en-US" dirty="0"/>
           </a:p>
@@ -1234,7 +1235,7 @@
           <a:p>
             <a:r>
               <a:rPr lang="en-US" dirty="0"/>
-              <a:t/>
+              <a:t>Stellar's X-Ray upgrade (Protocol 25) is an example of this approach. It adds BN254 elliptic curves and Poseidon hashing natively to the protocol -- these are foundational ZK primitives that let application developers build configurable privacy without compromising the transparency of the base chain. The base stays open. The applications choose their privacy posture.</a:t>
             </a:r>
             <a:endParaRPr lang="en-US" dirty="0"/>
           </a:p>
@@ -1322,7 +1323,7 @@
           <a:p>
             <a:r>
               <a:rPr lang="en-US" dirty="0"/>
-              <a:t/>
+              <a:t>Now let's get concrete. When we talk about privacy on payments, there are actually two different families of protocols, and they do fundamentally different things.</a:t>
             </a:r>
             <a:endParaRPr lang="en-US" dirty="0"/>
           </a:p>
@@ -1410,7 +1411,7 @@
           <a:p>
             <a:r>
               <a:rPr lang="en-US" dirty="0"/>
-              <a:t/>
+              <a:t>Confidential tokens hide the what -- amounts and balances are concealed, but the sender and receiver are still visible on-chain. You know who's transacting, you just can't see how much. This is the right tool for institutions making payments where the counterparty relationship is already known or acceptable, but the amounts are sensitive. Think treasury operations, supplier payments, payroll.</a:t>
             </a:r>
             <a:endParaRPr lang="en-US" dirty="0"/>
           </a:p>
@@ -1498,7 +1499,7 @@
           <a:p>
             <a:r>
               <a:rPr lang="en-US" dirty="0"/>
-              <a:t/>
+              <a:t>Blockchain is the only financial system where every transaction is visible to everyone. Start with something relatable -- everyone in the room has a bank account. That privacy is taken for granted. The moment you move any of that on-chain, it's gone.</a:t>
             </a:r>
             <a:endParaRPr lang="en-US" dirty="0"/>
           </a:p>
@@ -1586,7 +1587,7 @@
           <a:p>
             <a:r>
               <a:rPr lang="en-US" dirty="0"/>
-              <a:t/>
+              <a:t>Privacy pools hide the who. Funds are mixed so the sender's identity is obscured. This provides anonymity, not just confidentiality. The use case is consumer payments where the individual shouldn't be identifiable. But the tradeoff is real: mixing means legitimate funds can be commingled with illicit funds. This is the core tension that compliance tooling needs to address.</a:t>
             </a:r>
             <a:endParaRPr lang="en-US" dirty="0"/>
           </a:p>
@@ -1674,7 +1675,7 @@
           <a:p>
             <a:r>
               <a:rPr lang="en-US" dirty="0"/>
-              <a:t/>
+              <a:t>Key takeaway from this section: confidentiality and anonymity are separate properties. They're not competing approaches -- they're different tools for different points on the spectrum. Some use cases need one, some need both, some need neither. This is what "design for the spectrum" means in practice.</a:t>
             </a:r>
             <a:endParaRPr lang="en-US" dirty="0"/>
           </a:p>
@@ -1762,7 +1763,7 @@
           <a:p>
             <a:r>
               <a:rPr lang="en-US" dirty="0"/>
-              <a:t/>
+              <a:t>Now, how do you make any of this work for regulated institutions? The asterisk on "compliance" is deliberate. Regulators haven't told us what compliance looks like for on-chain privacy. There's no playbook. So what we're presenting here is an approximation -- the set of administrative controls we believe are necessary, built proactively, before the rules are written.</a:t>
             </a:r>
             <a:endParaRPr lang="en-US" dirty="0"/>
           </a:p>
@@ -1850,7 +1851,7 @@
           <a:p>
             <a:r>
               <a:rPr lang="en-US" dirty="0"/>
-              <a:t/>
+              <a:t>Selective disclosure via view keys: the user chooses to open the window. They reveal specific transaction details to specific parties -- a regulator, an auditor, a counterparty. The user is in control. Non-selective disclosure via auditor keys: a designated authority -- an issuer, a regulator -- holds a key that can view all transactions within a scope. The user doesn't choose. The visibility is built into the system from the start.</a:t>
             </a:r>
             <a:endParaRPr lang="en-US" dirty="0"/>
           </a:p>
@@ -1938,7 +1939,7 @@
           <a:p>
             <a:r>
               <a:rPr lang="en-US" dirty="0"/>
-              <a:t/>
+              <a:t>Association sets define the privacy perimeter -- who can transact privately together. Think of it as a private booth at a restaurant. Inside the booth, transactions are private. Outside, everything is transparent. This bounds the risk. Forced transparent withdrawals mean that when assets leave the private context, the exit is fully visible. You can operate privately within the set, but re-entering the public chain is transparent. This prevents private pools from becoming black holes.</a:t>
             </a:r>
             <a:endParaRPr lang="en-US" dirty="0"/>
           </a:p>
@@ -2026,7 +2027,7 @@
           <a:p>
             <a:r>
               <a:rPr lang="en-US" dirty="0"/>
-              <a:t/>
+              <a:t>Clawback. Yes, this is controversial in crypto. Deliberately so. In regulated finance, the ability to reverse or freeze transactions isn't optional -- it's a legal requirement. For privacy protocols to serve institutions, they need to support administrative actions like clawback, even if that challenges crypto's core ethos. We can have the philosophical debate, but ignoring this requirement doesn't make it disappear. It just means institutions won't adopt on-chain privacy. We're choosing to tackle it head on.</a:t>
             </a:r>
             <a:endParaRPr lang="en-US" dirty="0"/>
           </a:p>
@@ -2114,7 +2115,7 @@
           <a:p>
             <a:r>
               <a:rPr lang="en-US" dirty="0"/>
-              <a:t/>
+              <a:t>The key framing: these are dials, not switches. You don't pick one -- you compose a combination that fits your jurisdiction, your use case, your risk profile. A stablecoin issuer in the EU will turn different dials than a DeFi protocol in Singapore. That's the point. The menu lets you build the compliance posture you need, not the one someone else decided for you.</a:t>
             </a:r>
             <a:endParaRPr lang="en-US" dirty="0"/>
           </a:p>
@@ -2202,7 +2203,7 @@
           <a:p>
             <a:r>
               <a:rPr lang="en-US" dirty="0"/>
-              <a:t/>
+              <a:t>Quick recap of the full arc. Hit each point briefly -- the audience has heard the detail, this is just anchoring the structure.</a:t>
             </a:r>
             <a:endParaRPr lang="en-US" dirty="0"/>
           </a:p>
@@ -2290,7 +2291,7 @@
           <a:p>
             <a:r>
               <a:rPr lang="en-US" dirty="0"/>
-              <a:t/>
+              <a:t>Close strong. The regulators haven't written the rules. But we don't need to wait. We can build the toolkit -- configurable, compliance-ready, open by default -- so that when the rules come, the infrastructure is already there. Privacy that works with the chain, not against it.</a:t>
             </a:r>
             <a:endParaRPr lang="en-US" dirty="0"/>
           </a:p>
@@ -2466,7 +2467,7 @@
           <a:p>
             <a:r>
               <a:rPr lang="en-US" dirty="0"/>
-              <a:t/>
+              <a:t>For individuals it's bad. For institutions it's existential. A competitor watching deposit flows in real time knows your vendors, your payroll schedule, when you're under pressure. This isn't hypothetical -- this is why institutions say they can't come on-chain.</a:t>
             </a:r>
             <a:endParaRPr lang="en-US" dirty="0"/>
           </a:p>
@@ -2554,7 +2555,7 @@
           <a:p>
             <a:r>
               <a:rPr lang="en-US" dirty="0"/>
-              <a:t/>
+              <a:t>This is a direct quote from a major global bank. They weren't talking about customer data. They were talking about their own competitive intelligence. The gap isn't regulatory -- it's technical. Once data is broadcast on a transparent ledger, it cannot be re-privatized.</a:t>
             </a:r>
             <a:endParaRPr lang="en-US" dirty="0"/>
           </a:p>
@@ -2642,7 +2643,7 @@
           <a:p>
             <a:r>
               <a:rPr lang="en-US" dirty="0"/>
-              <a:t/>
+              <a:t>The crypto ecosystem's approach to privacy was shaped by cypherpunk ideology -- the belief that privacy means hiding everything from everyone. That gave us mixers, shielded chains, fully private L1s. All designed around "reveal nothing to nobody."</a:t>
             </a:r>
             <a:endParaRPr lang="en-US" dirty="0"/>
           </a:p>
@@ -2730,7 +2731,7 @@
           <a:p>
             <a:r>
               <a:rPr lang="en-US" dirty="0"/>
-              <a:t/>
+              <a:t>This is the core mismatch. Cypherpunk privacy is about hiding from authority. Institutional privacy is about hiding from competitors while remaining fully accountable to regulators. These are fundamentally different requirements, and we built for the wrong one.</a:t>
             </a:r>
             <a:endParaRPr lang="en-US" dirty="0"/>
           </a:p>
@@ -2818,7 +2819,7 @@
           <a:p>
             <a:r>
               <a:rPr lang="en-US" dirty="0"/>
-              <a:t/>
+              <a:t>Land this clearly. Nobody is saying privacy is bad. The mistake is framing it as all-or-nothing, as a philosophical stance rather than a practical engineering problem with many valid configurations.</a:t>
             </a:r>
             <a:endParaRPr lang="en-US" dirty="0"/>
           </a:p>
@@ -2906,7 +2907,7 @@
           <a:p>
             <a:r>
               <a:rPr lang="en-US" dirty="0"/>
-              <a:t/>
+              <a:t>Transition: so if all-or-nothing is wrong, what does the right model look like? It starts with recognizing that privacy is not a single feature. It's a multi-dimensional design space.</a:t>
             </a:r>
             <a:endParaRPr lang="en-US" dirty="0"/>
           </a:p>
@@ -2994,7 +2995,7 @@
           <a:p>
             <a:r>
               <a:rPr lang="en-US" dirty="0"/>
-              <a:t/>
+              <a:t>Three axes of variation. Jurisdictions: GDPR vs US frameworks vs MAS in Singapore -- completely different requirements. Use cases: payroll privacy is nothing like trading privacy. Technology: each primitive (ZK, FHE, MPC, TEEs) can hide different things with different trust assumptions and performance profiles.</a:t>
             </a:r>
             <a:endParaRPr lang="en-US" dirty="0"/>
           </a:p>

--- a/slides.pptx
+++ b/slides.pptx
@@ -5,23 +5,23 @@
     <p:sldMasterId id="2147483648" r:id="rId1"/>
   </p:sldMasterIdLst>
   <p:sldIdLst>
-    <p:sldId id="256" r:id="rId2"/>
-    <p:sldId id="257" r:id="rId3"/>
-    <p:sldId id="258" r:id="rId4"/>
-    <p:sldId id="259" r:id="rId5"/>
-    <p:sldId id="260" r:id="rId6"/>
-    <p:sldId id="261" r:id="rId7"/>
-    <p:sldId id="262" r:id="rId8"/>
-    <p:sldId id="263" r:id="rId9"/>
-    <p:sldId id="264" r:id="rId10"/>
+    <p:sldId id="256" r:id="rId7"/>
+    <p:sldId id="257" r:id="rId9"/>
+    <p:sldId id="258" r:id="rId10"/>
+    <p:sldId id="259" r:id="rId11"/>
+    <p:sldId id="260" r:id="rId12"/>
+    <p:sldId id="261" r:id="rId13"/>
+    <p:sldId id="262" r:id="rId14"/>
+    <p:sldId id="263" r:id="rId15"/>
+    <p:sldId id="264" r:id="rId16"/>
   </p:sldIdLst>
-  <p:notesMasterIdLst>
-    <p:notesMasterId r:id="rId11"/>
-  </p:notesMasterIdLst>
-  <p:sldSz cx="12192000" cy="6858000"/>
-  <p:notesSz cx="6858000" cy="12192000"/>
+  <p:sldSz cx="12191695" cy="6858000" type="screen4x3"/>
+  <p:notesSz cx="6858000" cy="9144000"/>
   <p:defaultTextStyle>
-    <a:lvl1pPr marL="0" algn="l" defTabSz="914400" rtl="0" eaLnBrk="1" latinLnBrk="0" hangingPunct="1">
+    <a:defPPr>
+      <a:defRPr lang="en-US"/>
+    </a:defPPr>
+    <a:lvl1pPr marL="0" algn="l" defTabSz="457200" rtl="0" eaLnBrk="1" latinLnBrk="0" hangingPunct="1">
       <a:defRPr sz="1800" kern="1200">
         <a:solidFill>
           <a:schemeClr val="tx1"/>
@@ -31,7 +31,7 @@
         <a:cs typeface="+mn-cs"/>
       </a:defRPr>
     </a:lvl1pPr>
-    <a:lvl2pPr marL="457200" algn="l" defTabSz="914400" rtl="0" eaLnBrk="1" latinLnBrk="0" hangingPunct="1">
+    <a:lvl2pPr marL="457200" algn="l" defTabSz="457200" rtl="0" eaLnBrk="1" latinLnBrk="0" hangingPunct="1">
       <a:defRPr sz="1800" kern="1200">
         <a:solidFill>
           <a:schemeClr val="tx1"/>
@@ -41,7 +41,7 @@
         <a:cs typeface="+mn-cs"/>
       </a:defRPr>
     </a:lvl2pPr>
-    <a:lvl3pPr marL="914400" algn="l" defTabSz="914400" rtl="0" eaLnBrk="1" latinLnBrk="0" hangingPunct="1">
+    <a:lvl3pPr marL="914400" algn="l" defTabSz="457200" rtl="0" eaLnBrk="1" latinLnBrk="0" hangingPunct="1">
       <a:defRPr sz="1800" kern="1200">
         <a:solidFill>
           <a:schemeClr val="tx1"/>
@@ -51,7 +51,7 @@
         <a:cs typeface="+mn-cs"/>
       </a:defRPr>
     </a:lvl3pPr>
-    <a:lvl4pPr marL="1371600" algn="l" defTabSz="914400" rtl="0" eaLnBrk="1" latinLnBrk="0" hangingPunct="1">
+    <a:lvl4pPr marL="1371600" algn="l" defTabSz="457200" rtl="0" eaLnBrk="1" latinLnBrk="0" hangingPunct="1">
       <a:defRPr sz="1800" kern="1200">
         <a:solidFill>
           <a:schemeClr val="tx1"/>
@@ -61,7 +61,7 @@
         <a:cs typeface="+mn-cs"/>
       </a:defRPr>
     </a:lvl4pPr>
-    <a:lvl5pPr marL="1828800" algn="l" defTabSz="914400" rtl="0" eaLnBrk="1" latinLnBrk="0" hangingPunct="1">
+    <a:lvl5pPr marL="1828800" algn="l" defTabSz="457200" rtl="0" eaLnBrk="1" latinLnBrk="0" hangingPunct="1">
       <a:defRPr sz="1800" kern="1200">
         <a:solidFill>
           <a:schemeClr val="tx1"/>
@@ -71,7 +71,7 @@
         <a:cs typeface="+mn-cs"/>
       </a:defRPr>
     </a:lvl5pPr>
-    <a:lvl6pPr marL="2286000" algn="l" defTabSz="914400" rtl="0" eaLnBrk="1" latinLnBrk="0" hangingPunct="1">
+    <a:lvl6pPr marL="2286000" algn="l" defTabSz="457200" rtl="0" eaLnBrk="1" latinLnBrk="0" hangingPunct="1">
       <a:defRPr sz="1800" kern="1200">
         <a:solidFill>
           <a:schemeClr val="tx1"/>
@@ -81,7 +81,7 @@
         <a:cs typeface="+mn-cs"/>
       </a:defRPr>
     </a:lvl6pPr>
-    <a:lvl7pPr marL="2743200" algn="l" defTabSz="914400" rtl="0" eaLnBrk="1" latinLnBrk="0" hangingPunct="1">
+    <a:lvl7pPr marL="2743200" algn="l" defTabSz="457200" rtl="0" eaLnBrk="1" latinLnBrk="0" hangingPunct="1">
       <a:defRPr sz="1800" kern="1200">
         <a:solidFill>
           <a:schemeClr val="tx1"/>
@@ -91,7 +91,7 @@
         <a:cs typeface="+mn-cs"/>
       </a:defRPr>
     </a:lvl7pPr>
-    <a:lvl8pPr marL="3200400" algn="l" defTabSz="914400" rtl="0" eaLnBrk="1" latinLnBrk="0" hangingPunct="1">
+    <a:lvl8pPr marL="3200400" algn="l" defTabSz="457200" rtl="0" eaLnBrk="1" latinLnBrk="0" hangingPunct="1">
       <a:defRPr sz="1800" kern="1200">
         <a:solidFill>
           <a:schemeClr val="tx1"/>
@@ -101,7 +101,7 @@
         <a:cs typeface="+mn-cs"/>
       </a:defRPr>
     </a:lvl8pPr>
-    <a:lvl9pPr marL="3657600" algn="l" defTabSz="914400" rtl="0" eaLnBrk="1" latinLnBrk="0" hangingPunct="1">
+    <a:lvl9pPr marL="3657600" algn="l" defTabSz="457200" rtl="0" eaLnBrk="1" latinLnBrk="0" hangingPunct="1">
       <a:defRPr sz="1800" kern="1200">
         <a:solidFill>
           <a:schemeClr val="tx1"/>
@@ -116,7 +116,7 @@
 </file>
 
 <file path=ppt/notesMasters/notesMaster1.xml><?xml version="1.0" encoding="utf-8"?>
-<p:notesMaster xmlns:a="http://schemas.openxmlformats.org/drawingml/2006/main" xmlns:r="http://schemas.openxmlformats.org/officeDocument/2006/relationships" xmlns:p="http://schemas.openxmlformats.org/presentationml/2006/main">
+<p:notesMaster xmlns:a="http://schemas.openxmlformats.org/drawingml/2006/main" xmlns:p="http://schemas.openxmlformats.org/presentationml/2006/main" xmlns:r="http://schemas.openxmlformats.org/officeDocument/2006/relationships">
   <p:cSld>
     <p:bg>
       <p:bgRef idx="1001">
@@ -150,7 +150,7 @@
         <p:spPr>
           <a:xfrm>
             <a:off x="0" y="0"/>
-            <a:ext cx="2971800" cy="458788"/>
+            <a:ext cx="2971800" cy="457200"/>
           </a:xfrm>
           <a:prstGeom prst="rect">
             <a:avLst/>
@@ -181,7 +181,7 @@
         <p:spPr>
           <a:xfrm>
             <a:off x="3884613" y="0"/>
-            <a:ext cx="2971800" cy="458788"/>
+            <a:ext cx="2971800" cy="457200"/>
           </a:xfrm>
           <a:prstGeom prst="rect">
             <a:avLst/>
@@ -195,9 +195,9 @@
             </a:lvl1pPr>
           </a:lstStyle>
           <a:p>
-            <a:fld id="{5282F153-3F37-0F45-9E97-73ACFA13230C}" type="datetimeFigureOut">
-              <a:rPr lang="en-US"/>
-              <a:t>7/23/19</a:t>
+            <a:fld id="{0F89C1C7-3DCD-1040-A9CF-14679D8B5DDD}" type="datetimeFigureOut">
+              <a:rPr lang="en-US" smtClean="0"/>
+              <a:t>10/17/16</a:t>
             </a:fld>
             <a:endParaRPr lang="en-US"/>
           </a:p>
@@ -215,8 +215,8 @@
         </p:nvSpPr>
         <p:spPr>
           <a:xfrm>
-            <a:off x="685800" y="1143000"/>
-            <a:ext cx="5486400" cy="3086100"/>
+            <a:off x="1143000" y="685800"/>
+            <a:ext cx="4572000" cy="3429000"/>
           </a:xfrm>
           <a:prstGeom prst="rect">
             <a:avLst/>
@@ -248,8 +248,8 @@
         </p:nvSpPr>
         <p:spPr>
           <a:xfrm>
-            <a:off x="685800" y="4400550"/>
-            <a:ext cx="5486400" cy="3600450"/>
+            <a:off x="685800" y="4343400"/>
+            <a:ext cx="5486400" cy="4114800"/>
           </a:xfrm>
           <a:prstGeom prst="rect">
             <a:avLst/>
@@ -261,37 +261,38 @@
           <a:p>
             <a:pPr lvl="0"/>
             <a:r>
-              <a:rPr lang="en-US"/>
+              <a:rPr lang="en-US" smtClean="0"/>
               <a:t>Click to edit Master text styles</a:t>
             </a:r>
           </a:p>
           <a:p>
             <a:pPr lvl="1"/>
             <a:r>
-              <a:rPr lang="en-US"/>
+              <a:rPr lang="en-US" smtClean="0"/>
               <a:t>Second level</a:t>
             </a:r>
           </a:p>
           <a:p>
             <a:pPr lvl="2"/>
             <a:r>
-              <a:rPr lang="en-US"/>
+              <a:rPr lang="en-US" smtClean="0"/>
               <a:t>Third level</a:t>
             </a:r>
           </a:p>
           <a:p>
             <a:pPr lvl="3"/>
             <a:r>
-              <a:rPr lang="en-US"/>
+              <a:rPr lang="en-US" smtClean="0"/>
               <a:t>Fourth level</a:t>
             </a:r>
           </a:p>
           <a:p>
             <a:pPr lvl="4"/>
             <a:r>
-              <a:rPr lang="en-US"/>
+              <a:rPr lang="en-US" smtClean="0"/>
               <a:t>Fifth level</a:t>
             </a:r>
+            <a:endParaRPr lang="en-US"/>
           </a:p>
         </p:txBody>
       </p:sp>
@@ -308,7 +309,7 @@
         <p:spPr>
           <a:xfrm>
             <a:off x="0" y="8685213"/>
-            <a:ext cx="2971800" cy="458787"/>
+            <a:ext cx="2971800" cy="457200"/>
           </a:xfrm>
           <a:prstGeom prst="rect">
             <a:avLst/>
@@ -339,7 +340,7 @@
         <p:spPr>
           <a:xfrm>
             <a:off x="3884613" y="8685213"/>
-            <a:ext cx="2971800" cy="458787"/>
+            <a:ext cx="2971800" cy="457200"/>
           </a:xfrm>
           <a:prstGeom prst="rect">
             <a:avLst/>
@@ -353,8 +354,8 @@
             </a:lvl1pPr>
           </a:lstStyle>
           <a:p>
-            <a:fld id="{CE5E9CC1-C706-0F49-92D6-E571CC5EEA8F}" type="slidenum">
-              <a:rPr lang="en-US"/>
+            <a:fld id="{BB5E49A5-4136-284D-997B-48E1D791AD67}" type="slidenum">
+              <a:rPr lang="en-US" smtClean="0"/>
               <a:t>‹#›</a:t>
             </a:fld>
             <a:endParaRPr lang="en-US"/>
@@ -364,13 +365,13 @@
     </p:spTree>
     <p:extLst>
       <p:ext uri="{BB962C8B-B14F-4D97-AF65-F5344CB8AC3E}">
-        <p14:creationId xmlns:p14="http://schemas.microsoft.com/office/powerpoint/2010/main" val="1024086991"/>
+        <p14:creationId xmlns:p14="http://schemas.microsoft.com/office/powerpoint/2010/main" val="2623252185"/>
       </p:ext>
     </p:extLst>
   </p:cSld>
   <p:clrMap bg1="lt1" tx1="dk1" bg2="lt2" tx2="dk2" accent1="accent1" accent2="accent2" accent3="accent3" accent4="accent4" accent5="accent5" accent6="accent6" hlink="hlink" folHlink="folHlink"/>
   <p:notesStyle>
-    <a:lvl1pPr marL="0" algn="l" defTabSz="914400" rtl="0" eaLnBrk="1" latinLnBrk="0" hangingPunct="1">
+    <a:lvl1pPr marL="0" algn="l" defTabSz="457200" rtl="0" eaLnBrk="1" latinLnBrk="0" hangingPunct="1">
       <a:defRPr sz="1200" kern="1200">
         <a:solidFill>
           <a:schemeClr val="tx1"/>
@@ -380,7 +381,7 @@
         <a:cs typeface="+mn-cs"/>
       </a:defRPr>
     </a:lvl1pPr>
-    <a:lvl2pPr marL="457200" algn="l" defTabSz="914400" rtl="0" eaLnBrk="1" latinLnBrk="0" hangingPunct="1">
+    <a:lvl2pPr marL="457200" algn="l" defTabSz="457200" rtl="0" eaLnBrk="1" latinLnBrk="0" hangingPunct="1">
       <a:defRPr sz="1200" kern="1200">
         <a:solidFill>
           <a:schemeClr val="tx1"/>
@@ -390,7 +391,7 @@
         <a:cs typeface="+mn-cs"/>
       </a:defRPr>
     </a:lvl2pPr>
-    <a:lvl3pPr marL="914400" algn="l" defTabSz="914400" rtl="0" eaLnBrk="1" latinLnBrk="0" hangingPunct="1">
+    <a:lvl3pPr marL="914400" algn="l" defTabSz="457200" rtl="0" eaLnBrk="1" latinLnBrk="0" hangingPunct="1">
       <a:defRPr sz="1200" kern="1200">
         <a:solidFill>
           <a:schemeClr val="tx1"/>
@@ -400,7 +401,7 @@
         <a:cs typeface="+mn-cs"/>
       </a:defRPr>
     </a:lvl3pPr>
-    <a:lvl4pPr marL="1371600" algn="l" defTabSz="914400" rtl="0" eaLnBrk="1" latinLnBrk="0" hangingPunct="1">
+    <a:lvl4pPr marL="1371600" algn="l" defTabSz="457200" rtl="0" eaLnBrk="1" latinLnBrk="0" hangingPunct="1">
       <a:defRPr sz="1200" kern="1200">
         <a:solidFill>
           <a:schemeClr val="tx1"/>
@@ -410,7 +411,7 @@
         <a:cs typeface="+mn-cs"/>
       </a:defRPr>
     </a:lvl4pPr>
-    <a:lvl5pPr marL="1828800" algn="l" defTabSz="914400" rtl="0" eaLnBrk="1" latinLnBrk="0" hangingPunct="1">
+    <a:lvl5pPr marL="1828800" algn="l" defTabSz="457200" rtl="0" eaLnBrk="1" latinLnBrk="0" hangingPunct="1">
       <a:defRPr sz="1200" kern="1200">
         <a:solidFill>
           <a:schemeClr val="tx1"/>
@@ -420,7 +421,7 @@
         <a:cs typeface="+mn-cs"/>
       </a:defRPr>
     </a:lvl5pPr>
-    <a:lvl6pPr marL="2286000" algn="l" defTabSz="914400" rtl="0" eaLnBrk="1" latinLnBrk="0" hangingPunct="1">
+    <a:lvl6pPr marL="2286000" algn="l" defTabSz="457200" rtl="0" eaLnBrk="1" latinLnBrk="0" hangingPunct="1">
       <a:defRPr sz="1200" kern="1200">
         <a:solidFill>
           <a:schemeClr val="tx1"/>
@@ -430,7 +431,7 @@
         <a:cs typeface="+mn-cs"/>
       </a:defRPr>
     </a:lvl6pPr>
-    <a:lvl7pPr marL="2743200" algn="l" defTabSz="914400" rtl="0" eaLnBrk="1" latinLnBrk="0" hangingPunct="1">
+    <a:lvl7pPr marL="2743200" algn="l" defTabSz="457200" rtl="0" eaLnBrk="1" latinLnBrk="0" hangingPunct="1">
       <a:defRPr sz="1200" kern="1200">
         <a:solidFill>
           <a:schemeClr val="tx1"/>
@@ -440,7 +441,7 @@
         <a:cs typeface="+mn-cs"/>
       </a:defRPr>
     </a:lvl7pPr>
-    <a:lvl8pPr marL="3200400" algn="l" defTabSz="914400" rtl="0" eaLnBrk="1" latinLnBrk="0" hangingPunct="1">
+    <a:lvl8pPr marL="3200400" algn="l" defTabSz="457200" rtl="0" eaLnBrk="1" latinLnBrk="0" hangingPunct="1">
       <a:defRPr sz="1200" kern="1200">
         <a:solidFill>
           <a:schemeClr val="tx1"/>
@@ -450,7 +451,7 @@
         <a:cs typeface="+mn-cs"/>
       </a:defRPr>
     </a:lvl8pPr>
-    <a:lvl9pPr marL="3657600" algn="l" defTabSz="914400" rtl="0" eaLnBrk="1" latinLnBrk="0" hangingPunct="1">
+    <a:lvl9pPr marL="3657600" algn="l" defTabSz="457200" rtl="0" eaLnBrk="1" latinLnBrk="0" hangingPunct="1">
       <a:defRPr sz="1200" kern="1200">
         <a:solidFill>
           <a:schemeClr val="tx1"/>
@@ -465,7 +466,7 @@
 </file>
 
 <file path=ppt/notesSlides/notesSlide1.xml><?xml version="1.0" encoding="utf-8"?>
-<p:notes xmlns:a="http://schemas.openxmlformats.org/drawingml/2006/main" xmlns:r="http://schemas.openxmlformats.org/officeDocument/2006/relationships" xmlns:p="http://schemas.openxmlformats.org/presentationml/2006/main">
+<p:notes xmlns:a="http://schemas.openxmlformats.org/drawingml/2006/main" xmlns:p="http://schemas.openxmlformats.org/presentationml/2006/main" xmlns:r="http://schemas.openxmlformats.org/officeDocument/2006/relationships">
   <p:cSld>
     <p:spTree>
       <p:nvGrpSpPr>
@@ -485,10 +486,10 @@
         <p:nvSpPr>
           <p:cNvPr id="2" name="Slide Image Placeholder 1"/>
           <p:cNvSpPr>
-            <a:spLocks noGrp="1" noRot="1" noChangeAspect="1"/>
-          </p:cNvSpPr>
-          <p:nvPr>
-            <p:ph type="sldImg"/>
+            <a:spLocks noGrp="1"/>
+          </p:cNvSpPr>
+          <p:nvPr>
+            <p:ph type="sldImg" idx="2"/>
           </p:nvPr>
         </p:nvSpPr>
         <p:spPr/>
@@ -500,7 +501,7 @@
             <a:spLocks noGrp="1"/>
           </p:cNvSpPr>
           <p:nvPr>
-            <p:ph type="body" idx="1"/>
+            <p:ph type="body" idx="3" sz="quarter"/>
           </p:nvPr>
         </p:nvSpPr>
         <p:spPr/>
@@ -509,10 +510,8 @@
           <a:lstStyle/>
           <a:p>
             <a:r>
-              <a:rPr lang="en-US" dirty="0"/>
               <a:t>Hi, I'm Tomer Weller, CPO at the Stellar Development Foundation. I've been in crypto for almost 9 years and for the last couple of years, privacy has been my main focus. This talk is about what we've learned in discussions with institutions about privacy.</a:t>
             </a:r>
-            <a:endParaRPr lang="en-US" dirty="0"/>
           </a:p>
         </p:txBody>
       </p:sp>
@@ -523,28 +522,12 @@
             <a:spLocks noGrp="1"/>
           </p:cNvSpPr>
           <p:nvPr>
-            <p:ph type="sldNum" sz="quarter" idx="10"/>
-          </p:nvPr>
-        </p:nvSpPr>
-        <p:spPr/>
-        <p:txBody>
-          <a:bodyPr/>
-          <a:lstStyle/>
-          <a:p>
-            <a:fld id="{F7021451-1387-4CA6-816F-3879F97B5CBC}" type="slidenum">
-              <a:rPr lang="en-US"/>
-              <a:t>1</a:t>
-            </a:fld>
-            <a:endParaRPr lang="en-US"/>
-          </a:p>
-        </p:txBody>
+            <p:ph type="sldNum" idx="5" sz="quarter"/>
+          </p:nvPr>
+        </p:nvSpPr>
+        <p:spPr/>
       </p:sp>
     </p:spTree>
-    <p:extLst>
-      <p:ext uri="{BB962C8B-B14F-4D97-AF65-F5344CB8AC3E}">
-        <p14:creationId xmlns:p14="http://schemas.microsoft.com/office/powerpoint/2010/main" val="1024086991"/>
-      </p:ext>
-    </p:extLst>
   </p:cSld>
   <p:clrMapOvr>
     <a:masterClrMapping/>
@@ -553,7 +536,7 @@
 </file>
 
 <file path=ppt/notesSlides/notesSlide2.xml><?xml version="1.0" encoding="utf-8"?>
-<p:notes xmlns:a="http://schemas.openxmlformats.org/drawingml/2006/main" xmlns:r="http://schemas.openxmlformats.org/officeDocument/2006/relationships" xmlns:p="http://schemas.openxmlformats.org/presentationml/2006/main">
+<p:notes xmlns:a="http://schemas.openxmlformats.org/drawingml/2006/main" xmlns:p="http://schemas.openxmlformats.org/presentationml/2006/main" xmlns:r="http://schemas.openxmlformats.org/officeDocument/2006/relationships">
   <p:cSld>
     <p:spTree>
       <p:nvGrpSpPr>
@@ -573,10 +556,10 @@
         <p:nvSpPr>
           <p:cNvPr id="2" name="Slide Image Placeholder 1"/>
           <p:cNvSpPr>
-            <a:spLocks noGrp="1" noRot="1" noChangeAspect="1"/>
-          </p:cNvSpPr>
-          <p:nvPr>
-            <p:ph type="sldImg"/>
+            <a:spLocks noGrp="1"/>
+          </p:cNvSpPr>
+          <p:nvPr>
+            <p:ph type="sldImg" idx="2"/>
           </p:nvPr>
         </p:nvSpPr>
         <p:spPr/>
@@ -588,7 +571,7 @@
             <a:spLocks noGrp="1"/>
           </p:cNvSpPr>
           <p:nvPr>
-            <p:ph type="body" idx="1"/>
+            <p:ph type="body" idx="3" sz="quarter"/>
           </p:nvPr>
         </p:nvSpPr>
         <p:spPr/>
@@ -597,14 +580,32 @@
           <a:lstStyle/>
           <a:p>
             <a:r>
-              <a:rPr lang="en-US" dirty="0"/>
-              <a:t>If you're in this room you're probably already sold on privacy. But just to level set:
-Blockchain is the only financial system where every transaction is visible to everyone. Your paycheck is private. Your bank balance is private. But the moment any of that moves on-chain, it's public.
-For individuals, this means anyone with a block explorer can reconstruct your financial life. For institutions, it's worse -- volumes, relationships, trading strategies, payroll. This is competitive intelligence, exposed to every competitor, in real time.
-When we talk to financial institutions, they make it clear: not having a way to manage visibility is a non-starter.
-Transition: Easy -- we've been working on privacy for 10 years, no? Not exactly.</a:t>
-            </a:r>
-            <a:endParaRPr lang="en-US" dirty="0"/>
+              <a:t>If you're in this room you're probably already sold on privacy. But just to level set:</a:t>
+            </a:r>
+          </a:p>
+          <a:p/>
+          <a:p>
+            <a:r>
+              <a:t>Blockchain is the only financial system where every transaction is visible to everyone. Your paycheck is private. Your bank balance is private. But the moment any of that moves on-chain, it's public.</a:t>
+            </a:r>
+          </a:p>
+          <a:p/>
+          <a:p>
+            <a:r>
+              <a:t>For individuals, this means anyone with a block explorer can reconstruct your financial life. For institutions, it's worse -- volumes, relationships, trading strategies, payroll. This is competitive intelligence, exposed to every competitor, in real time.</a:t>
+            </a:r>
+          </a:p>
+          <a:p/>
+          <a:p>
+            <a:r>
+              <a:t>When we talk to financial institutions, they make it clear: not having a way to manage visibility is a non-starter.</a:t>
+            </a:r>
+          </a:p>
+          <a:p/>
+          <a:p>
+            <a:r>
+              <a:t>Transition: Easy -- we've been working on privacy for 10 years, no? Not exactly.</a:t>
+            </a:r>
           </a:p>
         </p:txBody>
       </p:sp>
@@ -615,28 +616,12 @@
             <a:spLocks noGrp="1"/>
           </p:cNvSpPr>
           <p:nvPr>
-            <p:ph type="sldNum" sz="quarter" idx="10"/>
-          </p:nvPr>
-        </p:nvSpPr>
-        <p:spPr/>
-        <p:txBody>
-          <a:bodyPr/>
-          <a:lstStyle/>
-          <a:p>
-            <a:fld id="{F7021451-1387-4CA6-816F-3879F97B5CBC}" type="slidenum">
-              <a:rPr lang="en-US"/>
-              <a:t>2</a:t>
-            </a:fld>
-            <a:endParaRPr lang="en-US"/>
-          </a:p>
-        </p:txBody>
+            <p:ph type="sldNum" idx="5" sz="quarter"/>
+          </p:nvPr>
+        </p:nvSpPr>
+        <p:spPr/>
       </p:sp>
     </p:spTree>
-    <p:extLst>
-      <p:ext uri="{BB962C8B-B14F-4D97-AF65-F5344CB8AC3E}">
-        <p14:creationId xmlns:p14="http://schemas.microsoft.com/office/powerpoint/2010/main" val="1024086991"/>
-      </p:ext>
-    </p:extLst>
   </p:cSld>
   <p:clrMapOvr>
     <a:masterClrMapping/>
@@ -645,7 +630,7 @@
 </file>
 
 <file path=ppt/notesSlides/notesSlide3.xml><?xml version="1.0" encoding="utf-8"?>
-<p:notes xmlns:a="http://schemas.openxmlformats.org/drawingml/2006/main" xmlns:r="http://schemas.openxmlformats.org/officeDocument/2006/relationships" xmlns:p="http://schemas.openxmlformats.org/presentationml/2006/main">
+<p:notes xmlns:a="http://schemas.openxmlformats.org/drawingml/2006/main" xmlns:p="http://schemas.openxmlformats.org/presentationml/2006/main" xmlns:r="http://schemas.openxmlformats.org/officeDocument/2006/relationships">
   <p:cSld>
     <p:spTree>
       <p:nvGrpSpPr>
@@ -665,10 +650,10 @@
         <p:nvSpPr>
           <p:cNvPr id="2" name="Slide Image Placeholder 1"/>
           <p:cNvSpPr>
-            <a:spLocks noGrp="1" noRot="1" noChangeAspect="1"/>
-          </p:cNvSpPr>
-          <p:nvPr>
-            <p:ph type="sldImg"/>
+            <a:spLocks noGrp="1"/>
+          </p:cNvSpPr>
+          <p:nvPr>
+            <p:ph type="sldImg" idx="2"/>
           </p:nvPr>
         </p:nvSpPr>
         <p:spPr/>
@@ -680,7 +665,7 @@
             <a:spLocks noGrp="1"/>
           </p:cNvSpPr>
           <p:nvPr>
-            <p:ph type="body" idx="1"/>
+            <p:ph type="body" idx="3" sz="quarter"/>
           </p:nvPr>
         </p:nvSpPr>
         <p:spPr/>
@@ -689,13 +674,26 @@
           <a:lstStyle/>
           <a:p>
             <a:r>
-              <a:rPr lang="en-US" dirty="0"/>
-              <a:t>Yeah, we've been working on privacy for a while but with a strong focus on cypherpunk values -- complete financial freedom.
-And that's awesome. But for the next wave of adoption we need institutions -- we need them to feel comfortable bringing their assets on chain, making payroll, accepting merchant payments, engaging with blockchain in a meaningful way.
-For these institutions privacy means something different -- it means managing visibility in a way that allows them to stay competitive but also in compliance.
-Transition: The mistake is that we've built absolute privacy. But what institutions are telling us is that privacy is a spectrum.</a:t>
-            </a:r>
-            <a:endParaRPr lang="en-US" dirty="0"/>
+              <a:t>Yeah, we've been working on privacy for a while but with a strong focus on cypherpunk values -- complete financial freedom.</a:t>
+            </a:r>
+          </a:p>
+          <a:p/>
+          <a:p>
+            <a:r>
+              <a:t>And that's awesome. But for the next wave of adoption we need institutions -- we need them to feel comfortable bringing their assets on chain, making payroll, accepting merchant payments, engaging with blockchain in a meaningful way.</a:t>
+            </a:r>
+          </a:p>
+          <a:p/>
+          <a:p>
+            <a:r>
+              <a:t>For these institutions privacy means something different -- it means managing visibility in a way that allows them to stay competitive but also in compliance.</a:t>
+            </a:r>
+          </a:p>
+          <a:p/>
+          <a:p>
+            <a:r>
+              <a:t>Transition: The mistake is that we've built absolute privacy. But what institutions are telling us is that privacy is a spectrum.</a:t>
+            </a:r>
           </a:p>
         </p:txBody>
       </p:sp>
@@ -706,28 +704,12 @@
             <a:spLocks noGrp="1"/>
           </p:cNvSpPr>
           <p:nvPr>
-            <p:ph type="sldNum" sz="quarter" idx="10"/>
-          </p:nvPr>
-        </p:nvSpPr>
-        <p:spPr/>
-        <p:txBody>
-          <a:bodyPr/>
-          <a:lstStyle/>
-          <a:p>
-            <a:fld id="{F7021451-1387-4CA6-816F-3879F97B5CBC}" type="slidenum">
-              <a:rPr lang="en-US"/>
-              <a:t>3</a:t>
-            </a:fld>
-            <a:endParaRPr lang="en-US"/>
-          </a:p>
-        </p:txBody>
+            <p:ph type="sldNum" idx="5" sz="quarter"/>
+          </p:nvPr>
+        </p:nvSpPr>
+        <p:spPr/>
       </p:sp>
     </p:spTree>
-    <p:extLst>
-      <p:ext uri="{BB962C8B-B14F-4D97-AF65-F5344CB8AC3E}">
-        <p14:creationId xmlns:p14="http://schemas.microsoft.com/office/powerpoint/2010/main" val="1024086991"/>
-      </p:ext>
-    </p:extLst>
   </p:cSld>
   <p:clrMapOvr>
     <a:masterClrMapping/>
@@ -736,7 +718,7 @@
 </file>
 
 <file path=ppt/notesSlides/notesSlide4.xml><?xml version="1.0" encoding="utf-8"?>
-<p:notes xmlns:a="http://schemas.openxmlformats.org/drawingml/2006/main" xmlns:r="http://schemas.openxmlformats.org/officeDocument/2006/relationships" xmlns:p="http://schemas.openxmlformats.org/presentationml/2006/main">
+<p:notes xmlns:a="http://schemas.openxmlformats.org/drawingml/2006/main" xmlns:p="http://schemas.openxmlformats.org/presentationml/2006/main" xmlns:r="http://schemas.openxmlformats.org/officeDocument/2006/relationships">
   <p:cSld>
     <p:spTree>
       <p:nvGrpSpPr>
@@ -756,10 +738,10 @@
         <p:nvSpPr>
           <p:cNvPr id="2" name="Slide Image Placeholder 1"/>
           <p:cNvSpPr>
-            <a:spLocks noGrp="1" noRot="1" noChangeAspect="1"/>
-          </p:cNvSpPr>
-          <p:nvPr>
-            <p:ph type="sldImg"/>
+            <a:spLocks noGrp="1"/>
+          </p:cNvSpPr>
+          <p:nvPr>
+            <p:ph type="sldImg" idx="2"/>
           </p:nvPr>
         </p:nvSpPr>
         <p:spPr/>
@@ -771,7 +753,7 @@
             <a:spLocks noGrp="1"/>
           </p:cNvSpPr>
           <p:nvPr>
-            <p:ph type="body" idx="1"/>
+            <p:ph type="body" idx="3" sz="quarter"/>
           </p:nvPr>
         </p:nvSpPr>
         <p:spPr/>
@@ -780,15 +762,38 @@
           <a:lstStyle/>
           <a:p>
             <a:r>
-              <a:rPr lang="en-US" dirty="0"/>
-              <a:t>Privacy is not binary. It's a spectrum with an enormous number of permutations:
-Jurisdictions vary. A regulated asset issued in the US adheres to a completely different regulatory regime than a similar one issued in Germany.
-Use cases vary. Payroll needs different privacy than trading, which needs different privacy than remittances.
-Technology varies. ZK proofs, FHE, MPC, TEEs -- each has different tradeoffs in performance, trust assumptions, and what they can actually hide.
-The real problem is that we've been treating privacy as a single feature when it's actually a multi-dimensional design space. Any solution that doesn't acknowledge this complexity is going to fail for real-world adoption.
-Transition: This is what I call "Privacy Dead Ends".</a:t>
-            </a:r>
-            <a:endParaRPr lang="en-US" dirty="0"/>
+              <a:t>Privacy is not binary. It's a spectrum with an enormous number of permutations:</a:t>
+            </a:r>
+          </a:p>
+          <a:p/>
+          <a:p>
+            <a:r>
+              <a:t>Jurisdictions vary. A regulated asset issued in the US adheres to a completely different regulatory regime than a similar one issued in Germany.</a:t>
+            </a:r>
+          </a:p>
+          <a:p/>
+          <a:p>
+            <a:r>
+              <a:t>Use cases vary. Payroll needs different privacy than trading, which needs different privacy than remittances.</a:t>
+            </a:r>
+          </a:p>
+          <a:p/>
+          <a:p>
+            <a:r>
+              <a:t>Technology varies. ZK proofs, FHE, MPC, TEEs -- each has different tradeoffs in performance, trust assumptions, and what they can actually hide.</a:t>
+            </a:r>
+          </a:p>
+          <a:p/>
+          <a:p>
+            <a:r>
+              <a:t>The real problem is that we've been treating privacy as a single feature when it's actually a multi-dimensional design space.</a:t>
+            </a:r>
+          </a:p>
+          <a:p/>
+          <a:p>
+            <a:r>
+              <a:t>Transition: This is what I call "Privacy Dead Ends".</a:t>
+            </a:r>
           </a:p>
         </p:txBody>
       </p:sp>
@@ -799,28 +804,12 @@
             <a:spLocks noGrp="1"/>
           </p:cNvSpPr>
           <p:nvPr>
-            <p:ph type="sldNum" sz="quarter" idx="10"/>
-          </p:nvPr>
-        </p:nvSpPr>
-        <p:spPr/>
-        <p:txBody>
-          <a:bodyPr/>
-          <a:lstStyle/>
-          <a:p>
-            <a:fld id="{F7021451-1387-4CA6-816F-3879F97B5CBC}" type="slidenum">
-              <a:rPr lang="en-US"/>
-              <a:t>4</a:t>
-            </a:fld>
-            <a:endParaRPr lang="en-US"/>
-          </a:p>
-        </p:txBody>
+            <p:ph type="sldNum" idx="5" sz="quarter"/>
+          </p:nvPr>
+        </p:nvSpPr>
+        <p:spPr/>
       </p:sp>
     </p:spTree>
-    <p:extLst>
-      <p:ext uri="{BB962C8B-B14F-4D97-AF65-F5344CB8AC3E}">
-        <p14:creationId xmlns:p14="http://schemas.microsoft.com/office/powerpoint/2010/main" val="1024086991"/>
-      </p:ext>
-    </p:extLst>
   </p:cSld>
   <p:clrMapOvr>
     <a:masterClrMapping/>
@@ -829,7 +818,7 @@
 </file>
 
 <file path=ppt/notesSlides/notesSlide5.xml><?xml version="1.0" encoding="utf-8"?>
-<p:notes xmlns:a="http://schemas.openxmlformats.org/drawingml/2006/main" xmlns:r="http://schemas.openxmlformats.org/officeDocument/2006/relationships" xmlns:p="http://schemas.openxmlformats.org/presentationml/2006/main">
+<p:notes xmlns:a="http://schemas.openxmlformats.org/drawingml/2006/main" xmlns:p="http://schemas.openxmlformats.org/presentationml/2006/main" xmlns:r="http://schemas.openxmlformats.org/officeDocument/2006/relationships">
   <p:cSld>
     <p:spTree>
       <p:nvGrpSpPr>
@@ -849,10 +838,10 @@
         <p:nvSpPr>
           <p:cNvPr id="2" name="Slide Image Placeholder 1"/>
           <p:cNvSpPr>
-            <a:spLocks noGrp="1" noRot="1" noChangeAspect="1"/>
-          </p:cNvSpPr>
-          <p:nvPr>
-            <p:ph type="sldImg"/>
+            <a:spLocks noGrp="1"/>
+          </p:cNvSpPr>
+          <p:nvPr>
+            <p:ph type="sldImg" idx="2"/>
           </p:nvPr>
         </p:nvSpPr>
         <p:spPr/>
@@ -864,7 +853,7 @@
             <a:spLocks noGrp="1"/>
           </p:cNvSpPr>
           <p:nvPr>
-            <p:ph type="body" idx="1"/>
+            <p:ph type="body" idx="3" sz="quarter"/>
           </p:nvPr>
         </p:nvSpPr>
         <p:spPr/>
@@ -873,13 +862,26 @@
           <a:lstStyle/>
           <a:p>
             <a:r>
-              <a:rPr lang="en-US" dirty="0"/>
-              <a:t>When we started looking at privacy for Stellar, we realized that most privacy solutions end up in one of two failure modes, or "dead ends".
-All-or-Nothing: Privacy solutions that have two modes: full transparency or full privacy, nothing in between. This can take the shape of a smart contract pool, an L2 or an appchain - but the premise is the same. Unfortunately, this doesn't leave room for regulated financial institutions to engage with.
-Permissioned Chains: I've been in crypto almost 9 years and it's very depressing - as soon as you think that the concept of permissioned chains is dead, they come back to life. Recently they've come back to life on the pretense of being private. Of course they're private - they're a fucking database on your computer, bro. Just to be clear: institutions are looking for open-participation networks - they see the value of interoperability, composability and verifiability. Permissioned chains are a dead end.
-Transition: So how do you avoid these privacy dead-ends?</a:t>
-            </a:r>
-            <a:endParaRPr lang="en-US" dirty="0"/>
+              <a:t>When we started looking at privacy for Stellar, we realized that most privacy solutions end up in one of two failure modes, or "dead ends".</a:t>
+            </a:r>
+          </a:p>
+          <a:p/>
+          <a:p>
+            <a:r>
+              <a:t>All-or-Nothing: Privacy solutions that have two modes: full transparency or full privacy, nothing in between. This can take the shape of a smart contract pool, an L2 or an appchain - but the premise is the same. Unfortunately, this doesn't leave room for regulated financial institutions to engage with.</a:t>
+            </a:r>
+          </a:p>
+          <a:p/>
+          <a:p>
+            <a:r>
+              <a:t>Permissioned Chains: I've been in crypto almost 9 years and it's very depressing - as soon as you think that the concept of permissioned chains is dead, they come back to life. Recently they've come back to life on the pretense of being private. Of course they're private - they're a fucking database on your computer, bro. Just to be clear: institutions are looking for open-participation networks - they see the value of interoperability, composability and verifiability. Permissioned chains are a dead end.</a:t>
+            </a:r>
+          </a:p>
+          <a:p/>
+          <a:p>
+            <a:r>
+              <a:t>Transition: So how do you avoid these privacy dead-ends?</a:t>
+            </a:r>
           </a:p>
         </p:txBody>
       </p:sp>
@@ -890,28 +892,12 @@
             <a:spLocks noGrp="1"/>
           </p:cNvSpPr>
           <p:nvPr>
-            <p:ph type="sldNum" sz="quarter" idx="10"/>
-          </p:nvPr>
-        </p:nvSpPr>
-        <p:spPr/>
-        <p:txBody>
-          <a:bodyPr/>
-          <a:lstStyle/>
-          <a:p>
-            <a:fld id="{F7021451-1387-4CA6-816F-3879F97B5CBC}" type="slidenum">
-              <a:rPr lang="en-US"/>
-              <a:t>5</a:t>
-            </a:fld>
-            <a:endParaRPr lang="en-US"/>
-          </a:p>
-        </p:txBody>
+            <p:ph type="sldNum" idx="5" sz="quarter"/>
+          </p:nvPr>
+        </p:nvSpPr>
+        <p:spPr/>
       </p:sp>
     </p:spTree>
-    <p:extLst>
-      <p:ext uri="{BB962C8B-B14F-4D97-AF65-F5344CB8AC3E}">
-        <p14:creationId xmlns:p14="http://schemas.microsoft.com/office/powerpoint/2010/main" val="1024086991"/>
-      </p:ext>
-    </p:extLst>
   </p:cSld>
   <p:clrMapOvr>
     <a:masterClrMapping/>
@@ -920,7 +906,7 @@
 </file>
 
 <file path=ppt/notesSlides/notesSlide6.xml><?xml version="1.0" encoding="utf-8"?>
-<p:notes xmlns:a="http://schemas.openxmlformats.org/drawingml/2006/main" xmlns:r="http://schemas.openxmlformats.org/officeDocument/2006/relationships" xmlns:p="http://schemas.openxmlformats.org/presentationml/2006/main">
+<p:notes xmlns:a="http://schemas.openxmlformats.org/drawingml/2006/main" xmlns:p="http://schemas.openxmlformats.org/presentationml/2006/main" xmlns:r="http://schemas.openxmlformats.org/officeDocument/2006/relationships">
   <p:cSld>
     <p:spTree>
       <p:nvGrpSpPr>
@@ -940,10 +926,10 @@
         <p:nvSpPr>
           <p:cNvPr id="2" name="Slide Image Placeholder 1"/>
           <p:cNvSpPr>
-            <a:spLocks noGrp="1" noRot="1" noChangeAspect="1"/>
-          </p:cNvSpPr>
-          <p:nvPr>
-            <p:ph type="sldImg"/>
+            <a:spLocks noGrp="1"/>
+          </p:cNvSpPr>
+          <p:nvPr>
+            <p:ph type="sldImg" idx="2"/>
           </p:nvPr>
         </p:nvSpPr>
         <p:spPr/>
@@ -955,7 +941,7 @@
             <a:spLocks noGrp="1"/>
           </p:cNvSpPr>
           <p:nvPr>
-            <p:ph type="body" idx="1"/>
+            <p:ph type="body" idx="3" sz="quarter"/>
           </p:nvPr>
         </p:nvSpPr>
         <p:spPr/>
@@ -964,15 +950,38 @@
           <a:lstStyle/>
           <a:p>
             <a:r>
-              <a:rPr lang="en-US" dirty="0"/>
-              <a:t>The answer is simple: a clear architectural separation.
-An open, transparent base layer -- a maximally auditable source of truth. This is the default - this is the primary issuance platform. Anyone can verify - interoperability is trivial.
-Privacy protocols built on top. Different privacy guarantees, different administrative controls, different underlying tech.
-Why transparency first? This might come as a surprise given that this is a talk about privacy but transparency is a core value proposition of blockchains. The fact that an executive at an asset manager company can go on a block explorer and see the total supply of an asset and its distribution - that is a feature - not a bug - they love that shit.
-With that said, our base layers should provide a rich set of building blocks for privacy. Stellar's X-Ray upgrade is an example of this approach -- adding ZK primitives (BN254, Poseidon) at the protocol level so that application developers can build configurable privacy without compromising the transparency of the base chain.
-Transition: We keep talking about different privacy protocols for different use cases. Let's demonstrate with some concrete examples.</a:t>
-            </a:r>
-            <a:endParaRPr lang="en-US" dirty="0"/>
+              <a:t>The answer is simple: a clear architectural separation.</a:t>
+            </a:r>
+          </a:p>
+          <a:p/>
+          <a:p>
+            <a:r>
+              <a:t>An open, transparent base layer -- a maximally auditable source of truth. This is the default - this is the primary issuance platform. Anyone can verify - interoperability is trivial.</a:t>
+            </a:r>
+          </a:p>
+          <a:p/>
+          <a:p>
+            <a:r>
+              <a:t>Privacy protocols built on top. Different privacy guarantees, different administrative controls, different underlying tech.</a:t>
+            </a:r>
+          </a:p>
+          <a:p/>
+          <a:p>
+            <a:r>
+              <a:t>Why transparency first? This might come as a surprise given that this is a talk about privacy but transparency is a core value proposition of blockchains. The fact that an executive at an asset manager company can go on a block explorer and see the total supply of an asset and its distribution - that is a feature - not a bug - they love that shit.</a:t>
+            </a:r>
+          </a:p>
+          <a:p/>
+          <a:p>
+            <a:r>
+              <a:t>With that said, our base layers should provide a rich set of building blocks for privacy. Stellar's X-Ray upgrade is an example of this approach -- adding ZK primitives (BN254, Poseidon) at the protocol level so that application developers can build configurable privacy without compromising the transparency of the base chain.</a:t>
+            </a:r>
+          </a:p>
+          <a:p/>
+          <a:p>
+            <a:r>
+              <a:t>Transition: We keep talking about different privacy protocols for different use cases. Let's demonstrate with some concrete examples.</a:t>
+            </a:r>
           </a:p>
         </p:txBody>
       </p:sp>
@@ -983,28 +992,12 @@
             <a:spLocks noGrp="1"/>
           </p:cNvSpPr>
           <p:nvPr>
-            <p:ph type="sldNum" sz="quarter" idx="10"/>
-          </p:nvPr>
-        </p:nvSpPr>
-        <p:spPr/>
-        <p:txBody>
-          <a:bodyPr/>
-          <a:lstStyle/>
-          <a:p>
-            <a:fld id="{F7021451-1387-4CA6-816F-3879F97B5CBC}" type="slidenum">
-              <a:rPr lang="en-US"/>
-              <a:t>6</a:t>
-            </a:fld>
-            <a:endParaRPr lang="en-US"/>
-          </a:p>
-        </p:txBody>
+            <p:ph type="sldNum" idx="5" sz="quarter"/>
+          </p:nvPr>
+        </p:nvSpPr>
+        <p:spPr/>
       </p:sp>
     </p:spTree>
-    <p:extLst>
-      <p:ext uri="{BB962C8B-B14F-4D97-AF65-F5344CB8AC3E}">
-        <p14:creationId xmlns:p14="http://schemas.microsoft.com/office/powerpoint/2010/main" val="1024086991"/>
-      </p:ext>
-    </p:extLst>
   </p:cSld>
   <p:clrMapOvr>
     <a:masterClrMapping/>
@@ -1013,7 +1006,7 @@
 </file>
 
 <file path=ppt/notesSlides/notesSlide7.xml><?xml version="1.0" encoding="utf-8"?>
-<p:notes xmlns:a="http://schemas.openxmlformats.org/drawingml/2006/main" xmlns:r="http://schemas.openxmlformats.org/officeDocument/2006/relationships" xmlns:p="http://schemas.openxmlformats.org/presentationml/2006/main">
+<p:notes xmlns:a="http://schemas.openxmlformats.org/drawingml/2006/main" xmlns:p="http://schemas.openxmlformats.org/presentationml/2006/main" xmlns:r="http://schemas.openxmlformats.org/officeDocument/2006/relationships">
   <p:cSld>
     <p:spTree>
       <p:nvGrpSpPr>
@@ -1033,10 +1026,10 @@
         <p:nvSpPr>
           <p:cNvPr id="2" name="Slide Image Placeholder 1"/>
           <p:cNvSpPr>
-            <a:spLocks noGrp="1" noRot="1" noChangeAspect="1"/>
-          </p:cNvSpPr>
-          <p:nvPr>
-            <p:ph type="sldImg"/>
+            <a:spLocks noGrp="1"/>
+          </p:cNvSpPr>
+          <p:nvPr>
+            <p:ph type="sldImg" idx="2"/>
           </p:nvPr>
         </p:nvSpPr>
         <p:spPr/>
@@ -1048,7 +1041,7 @@
             <a:spLocks noGrp="1"/>
           </p:cNvSpPr>
           <p:nvPr>
-            <p:ph type="body" idx="1"/>
+            <p:ph type="body" idx="3" sz="quarter"/>
           </p:nvPr>
         </p:nvSpPr>
         <p:spPr/>
@@ -1057,14 +1050,32 @@
           <a:lstStyle/>
           <a:p>
             <a:r>
-              <a:rPr lang="en-US" dirty="0"/>
-              <a:t>We're going to focus on Private Payments. There's interesting stuff happening in private defi but these are still a ways out.
-The two main families of private payment protocols that we see are confidential tokens and privacy pools.
-Confidential Tokens: Hide the what -- payment amounts and balances are concealed. But the sender and receiver are still visible on-chain. You know who's transacting, you just can't see how much. This is great for when counterparty relationships are known - for example with payroll, people know I'm employed by SDF but my salary is private. There are a bunch of different implementations of this. Stellar is part of the confidential token association and we're working with OpenZeppelin on an implementation. Narrower privacy guarantees but the tech is fairly scalable and it's a bit easier for compliance.
-Privacy Pools: Payment protocols that also hide the who -- funds are mixed so that sender and receivers identities are hidden. This provides anonymity, not just confidentiality. Much stronger privacy guarantees but they inherently mix funds, which means legitimate funds can be commingled with illicit funds - which there are ways to tackle.
-Transition: This demonstrates different privacy guarantees, and the question is how do we build administrative controls to enable compliance with these solutions and others.</a:t>
-            </a:r>
-            <a:endParaRPr lang="en-US" dirty="0"/>
+              <a:t>We're going to focus on Private Payments. There's interesting stuff happening in private defi but these are still a ways out.</a:t>
+            </a:r>
+          </a:p>
+          <a:p/>
+          <a:p>
+            <a:r>
+              <a:t>The two main families of private payment protocols that we see are confidential tokens and privacy pools.</a:t>
+            </a:r>
+          </a:p>
+          <a:p/>
+          <a:p>
+            <a:r>
+              <a:t>Confidential Tokens: Hide the what -- payment amounts and balances are concealed. But the sender and receiver are still visible on-chain. You know who's transacting, you just can't see how much. This is great for when counterparty relationships are known - for example with payroll, people know I'm employed by SDF but my salary is private. There are a bunch of different implementations of this. Stellar is part of the confidential token association and we're working with OpenZeppelin on an implementation. Narrower privacy guarantees but the tech is fairly scalable and it's a bit easier for compliance.</a:t>
+            </a:r>
+          </a:p>
+          <a:p/>
+          <a:p>
+            <a:r>
+              <a:t>Privacy Pools: Payment protocols that also hide the who -- funds are mixed so that sender and receivers identities are hidden. This provides anonymity, not just confidentiality. Much stronger privacy guarantees but they inherently mix funds, which means legitimate funds can be commingled with illicit funds - which there are ways to tackle.</a:t>
+            </a:r>
+          </a:p>
+          <a:p/>
+          <a:p>
+            <a:r>
+              <a:t>Transition: This demonstrates different privacy guarantees, and the question is how do we build administrative controls to enable compliance with these solutions and others.</a:t>
+            </a:r>
           </a:p>
         </p:txBody>
       </p:sp>
@@ -1075,28 +1086,12 @@
             <a:spLocks noGrp="1"/>
           </p:cNvSpPr>
           <p:nvPr>
-            <p:ph type="sldNum" sz="quarter" idx="10"/>
-          </p:nvPr>
-        </p:nvSpPr>
-        <p:spPr/>
-        <p:txBody>
-          <a:bodyPr/>
-          <a:lstStyle/>
-          <a:p>
-            <a:fld id="{F7021451-1387-4CA6-816F-3879F97B5CBC}" type="slidenum">
-              <a:rPr lang="en-US"/>
-              <a:t>7</a:t>
-            </a:fld>
-            <a:endParaRPr lang="en-US"/>
-          </a:p>
-        </p:txBody>
+            <p:ph type="sldNum" idx="5" sz="quarter"/>
+          </p:nvPr>
+        </p:nvSpPr>
+        <p:spPr/>
       </p:sp>
     </p:spTree>
-    <p:extLst>
-      <p:ext uri="{BB962C8B-B14F-4D97-AF65-F5344CB8AC3E}">
-        <p14:creationId xmlns:p14="http://schemas.microsoft.com/office/powerpoint/2010/main" val="1024086991"/>
-      </p:ext>
-    </p:extLst>
   </p:cSld>
   <p:clrMapOvr>
     <a:masterClrMapping/>
@@ -1105,7 +1100,7 @@
 </file>
 
 <file path=ppt/notesSlides/notesSlide8.xml><?xml version="1.0" encoding="utf-8"?>
-<p:notes xmlns:a="http://schemas.openxmlformats.org/drawingml/2006/main" xmlns:r="http://schemas.openxmlformats.org/officeDocument/2006/relationships" xmlns:p="http://schemas.openxmlformats.org/presentationml/2006/main">
+<p:notes xmlns:a="http://schemas.openxmlformats.org/drawingml/2006/main" xmlns:p="http://schemas.openxmlformats.org/presentationml/2006/main" xmlns:r="http://schemas.openxmlformats.org/officeDocument/2006/relationships">
   <p:cSld>
     <p:spTree>
       <p:nvGrpSpPr>
@@ -1125,10 +1120,10 @@
         <p:nvSpPr>
           <p:cNvPr id="2" name="Slide Image Placeholder 1"/>
           <p:cNvSpPr>
-            <a:spLocks noGrp="1" noRot="1" noChangeAspect="1"/>
-          </p:cNvSpPr>
-          <p:nvPr>
-            <p:ph type="sldImg"/>
+            <a:spLocks noGrp="1"/>
+          </p:cNvSpPr>
+          <p:nvPr>
+            <p:ph type="sldImg" idx="2"/>
           </p:nvPr>
         </p:nvSpPr>
         <p:spPr/>
@@ -1140,7 +1135,7 @@
             <a:spLocks noGrp="1"/>
           </p:cNvSpPr>
           <p:nvPr>
-            <p:ph type="body" idx="1"/>
+            <p:ph type="body" idx="3" sz="quarter"/>
           </p:nvPr>
         </p:nvSpPr>
         <p:spPr/>
@@ -1149,16 +1144,44 @@
           <a:lstStyle/>
           <a:p>
             <a:r>
-              <a:rPr lang="en-US" dirty="0"/>
-              <a:t>At Stellar, we've been working with various builders in the space to define a compliance menu of opt-in administrative controls. The asterisk is deliberate. First of all I'm not a lawyer, and also regulators haven't defined what compliance looks like for on-chain privacy yet. These are the administrative controls we're starting to see as requirements, this is not a comprehensive list and the idea is to have these as configurable opt-in.
-Selective Disclosure (View Keys): The user chooses to reveal specific transaction details to specific parties. This allows the user to show a source of funds on demand. This is a very powerful primitive that has existed for a while, but unfortunately we haven't seen great products built around it yet.
-Non-Selective Disclosure (Auditor Keys): A third party authority (e.g., an issuer or a pool operator) holds a key that can view all transactions within a scope. This means that if a law enforcement agency has a subpoena they have an actual door to knock on.
-Association Sets: An allow list controlled by a pool operator - it ensures that all funds mixed come from approved addresses and reduces the risk of commingling with illicit funds.
-Forced Transparent Withdrawals: Addresses an issue with association sets: what happens if an account gets revoked? They're forced to withdraw transparently -- no hiding behind the pool on the way out. 0xBow calls this rage quit and we're starting to see more of these.
-Clawback: And finally, yes - clawback. If clawbacks are triggering for you then you are in the wrong room and you are not ready for what's coming next. Tokenization is at full speed and regulated assets often require clawback capabilities. If we want to see RWA issuers have first class support for privacy on blockchains - they need clawback capabilities.
-Transition: These are dials, not switches. Different combinations serve different jurisdictions, use cases, and risk profiles. The menu lets you compose the compliance posture you need.</a:t>
-            </a:r>
-            <a:endParaRPr lang="en-US" dirty="0"/>
+              <a:t>At Stellar, we've been working with various builders in the space to define a compliance menu of opt-in administrative controls. The asterisk is deliberate. First of all I'm not a lawyer, and also regulators haven't defined what compliance looks like for on-chain privacy yet. These are the administrative controls we're starting to see as requirements, this is not a comprehensive list and the idea is to have these as configurable opt-in.</a:t>
+            </a:r>
+          </a:p>
+          <a:p/>
+          <a:p>
+            <a:r>
+              <a:t>Selective Disclosure (View Keys): The user chooses to reveal specific transaction details to specific parties. This allows the user to show a source of funds on demand.</a:t>
+            </a:r>
+          </a:p>
+          <a:p/>
+          <a:p>
+            <a:r>
+              <a:t>Non-Selective Disclosure (Auditor Keys): A third party authority holds a key that can view all transactions within a scope. This means that if a law enforcement agency has a subpoena they have an actual door to knock on.</a:t>
+            </a:r>
+          </a:p>
+          <a:p/>
+          <a:p>
+            <a:r>
+              <a:t>Association Sets: An allow list controlled by a pool operator - it ensures that all funds mixed come from approved addresses and reduces the risk of commingling with illicit funds.</a:t>
+            </a:r>
+          </a:p>
+          <a:p/>
+          <a:p>
+            <a:r>
+              <a:t>Forced Transparent Withdrawals: What happens if an account gets revoked? They're forced to withdraw transparently -- no hiding behind the pool on the way out. 0xBow calls this rage quit.</a:t>
+            </a:r>
+          </a:p>
+          <a:p/>
+          <a:p>
+            <a:r>
+              <a:t>Clawback: If clawbacks are triggering for you then you are in the wrong room and you are not ready for what's coming next. Tokenization is at full speed and regulated assets often require clawback capabilities.</a:t>
+            </a:r>
+          </a:p>
+          <a:p/>
+          <a:p>
+            <a:r>
+              <a:t>Transition: These are dials, not switches. Different combinations serve different jurisdictions, use cases, and risk profiles.</a:t>
+            </a:r>
           </a:p>
         </p:txBody>
       </p:sp>
@@ -1169,28 +1192,12 @@
             <a:spLocks noGrp="1"/>
           </p:cNvSpPr>
           <p:nvPr>
-            <p:ph type="sldNum" sz="quarter" idx="10"/>
-          </p:nvPr>
-        </p:nvSpPr>
-        <p:spPr/>
-        <p:txBody>
-          <a:bodyPr/>
-          <a:lstStyle/>
-          <a:p>
-            <a:fld id="{F7021451-1387-4CA6-816F-3879F97B5CBC}" type="slidenum">
-              <a:rPr lang="en-US"/>
-              <a:t>8</a:t>
-            </a:fld>
-            <a:endParaRPr lang="en-US"/>
-          </a:p>
-        </p:txBody>
+            <p:ph type="sldNum" idx="5" sz="quarter"/>
+          </p:nvPr>
+        </p:nvSpPr>
+        <p:spPr/>
       </p:sp>
     </p:spTree>
-    <p:extLst>
-      <p:ext uri="{BB962C8B-B14F-4D97-AF65-F5344CB8AC3E}">
-        <p14:creationId xmlns:p14="http://schemas.microsoft.com/office/powerpoint/2010/main" val="1024086991"/>
-      </p:ext>
-    </p:extLst>
   </p:cSld>
   <p:clrMapOvr>
     <a:masterClrMapping/>
@@ -1199,7 +1206,7 @@
 </file>
 
 <file path=ppt/notesSlides/notesSlide9.xml><?xml version="1.0" encoding="utf-8"?>
-<p:notes xmlns:a="http://schemas.openxmlformats.org/drawingml/2006/main" xmlns:r="http://schemas.openxmlformats.org/officeDocument/2006/relationships" xmlns:p="http://schemas.openxmlformats.org/presentationml/2006/main">
+<p:notes xmlns:a="http://schemas.openxmlformats.org/drawingml/2006/main" xmlns:p="http://schemas.openxmlformats.org/presentationml/2006/main" xmlns:r="http://schemas.openxmlformats.org/officeDocument/2006/relationships">
   <p:cSld>
     <p:spTree>
       <p:nvGrpSpPr>
@@ -1219,10 +1226,10 @@
         <p:nvSpPr>
           <p:cNvPr id="2" name="Slide Image Placeholder 1"/>
           <p:cNvSpPr>
-            <a:spLocks noGrp="1" noRot="1" noChangeAspect="1"/>
-          </p:cNvSpPr>
-          <p:nvPr>
-            <p:ph type="sldImg"/>
+            <a:spLocks noGrp="1"/>
+          </p:cNvSpPr>
+          <p:nvPr>
+            <p:ph type="sldImg" idx="2"/>
           </p:nvPr>
         </p:nvSpPr>
         <p:spPr/>
@@ -1234,7 +1241,7 @@
             <a:spLocks noGrp="1"/>
           </p:cNvSpPr>
           <p:nvPr>
-            <p:ph type="body" idx="1"/>
+            <p:ph type="body" idx="3" sz="quarter"/>
           </p:nvPr>
         </p:nvSpPr>
         <p:spPr/>
@@ -1243,16 +1250,44 @@
           <a:lstStyle/>
           <a:p>
             <a:r>
-              <a:rPr lang="en-US" dirty="0"/>
-              <a:t>So to wrap up:
-We've been building privacy with ideology first and that's great -- but it's not enough. Institutions need privacy too, and for them it's more nuanced.
-Privacy is a spectrum. Different jurisdictions, different use cases, different tech. There's no single answer and that's okay -- that's actually the point.
-The right approach is transparency first -- keep the base layer open, build configurable privacy on top. Confidential tokens, privacy pools, a compliance menu of administrative controls. Dials, not switches.
-All the building blocks are in place - we have a non-hostile administration in the US, we have institutions that are at the table and see the value in blockchain, and the tech is ready.
-There are no excuses - we're building privacy that doesn't break the chain. If that's interesting to you -- come build with us on Stellar.
-Thanks.</a:t>
-            </a:r>
-            <a:endParaRPr lang="en-US" dirty="0"/>
+              <a:t>So to wrap up:</a:t>
+            </a:r>
+          </a:p>
+          <a:p/>
+          <a:p>
+            <a:r>
+              <a:t>We've been building privacy with ideology first and that's great -- but it's not enough. Institutions need privacy too, and for them it's more nuanced.</a:t>
+            </a:r>
+          </a:p>
+          <a:p/>
+          <a:p>
+            <a:r>
+              <a:t>Privacy is a spectrum. Different jurisdictions, different use cases, different tech. There's no single answer and that's okay -- that's actually the point.</a:t>
+            </a:r>
+          </a:p>
+          <a:p/>
+          <a:p>
+            <a:r>
+              <a:t>The right approach is transparency first -- keep the base layer open, build configurable privacy on top. Confidential tokens, privacy pools, a compliance menu of administrative controls. Dials, not switches.</a:t>
+            </a:r>
+          </a:p>
+          <a:p/>
+          <a:p>
+            <a:r>
+              <a:t>All the building blocks are in place - we have a non-hostile administration in the US, we have institutions that are at the table and see the value in blockchain, and the tech is ready.</a:t>
+            </a:r>
+          </a:p>
+          <a:p/>
+          <a:p>
+            <a:r>
+              <a:t>There are no excuses - we're building privacy that doesn't break the chain. If that's interesting to you -- come build with us on Stellar.</a:t>
+            </a:r>
+          </a:p>
+          <a:p/>
+          <a:p>
+            <a:r>
+              <a:t>Thanks.</a:t>
+            </a:r>
           </a:p>
         </p:txBody>
       </p:sp>
@@ -1263,28 +1298,12 @@
             <a:spLocks noGrp="1"/>
           </p:cNvSpPr>
           <p:nvPr>
-            <p:ph type="sldNum" sz="quarter" idx="10"/>
-          </p:nvPr>
-        </p:nvSpPr>
-        <p:spPr/>
-        <p:txBody>
-          <a:bodyPr/>
-          <a:lstStyle/>
-          <a:p>
-            <a:fld id="{F7021451-1387-4CA6-816F-3879F97B5CBC}" type="slidenum">
-              <a:rPr lang="en-US"/>
-              <a:t>9</a:t>
-            </a:fld>
-            <a:endParaRPr lang="en-US"/>
-          </a:p>
-        </p:txBody>
+            <p:ph type="sldNum" idx="5" sz="quarter"/>
+          </p:nvPr>
+        </p:nvSpPr>
+        <p:spPr/>
       </p:sp>
     </p:spTree>
-    <p:extLst>
-      <p:ext uri="{BB962C8B-B14F-4D97-AF65-F5344CB8AC3E}">
-        <p14:creationId xmlns:p14="http://schemas.microsoft.com/office/powerpoint/2010/main" val="1024086991"/>
-      </p:ext>
-    </p:extLst>
   </p:cSld>
   <p:clrMapOvr>
     <a:masterClrMapping/>
@@ -1293,8 +1312,2469 @@
 </file>
 
 <file path=ppt/slideLayouts/slideLayout1.xml><?xml version="1.0" encoding="utf-8"?>
-<p:sldLayout xmlns:a="http://schemas.openxmlformats.org/drawingml/2006/main" xmlns:r="http://schemas.openxmlformats.org/officeDocument/2006/relationships" xmlns:p="http://schemas.openxmlformats.org/presentationml/2006/main" preserve="1">
-  <p:cSld name="DEFAULT">
+<p:sldLayout xmlns:a="http://schemas.openxmlformats.org/drawingml/2006/main" xmlns:r="http://schemas.openxmlformats.org/officeDocument/2006/relationships" xmlns:p="http://schemas.openxmlformats.org/presentationml/2006/main" type="title" preserve="1">
+  <p:cSld name="Title Slide">
+    <p:spTree>
+      <p:nvGrpSpPr>
+        <p:cNvPr id="1" name=""/>
+        <p:cNvGrpSpPr/>
+        <p:nvPr/>
+      </p:nvGrpSpPr>
+      <p:grpSpPr>
+        <a:xfrm>
+          <a:off x="0" y="0"/>
+          <a:ext cx="0" cy="0"/>
+          <a:chOff x="0" y="0"/>
+          <a:chExt cx="0" cy="0"/>
+        </a:xfrm>
+      </p:grpSpPr>
+      <p:sp>
+        <p:nvSpPr>
+          <p:cNvPr id="2" name="Title 1"/>
+          <p:cNvSpPr>
+            <a:spLocks noGrp="1"/>
+          </p:cNvSpPr>
+          <p:nvPr>
+            <p:ph type="ctrTitle"/>
+          </p:nvPr>
+        </p:nvSpPr>
+        <p:spPr>
+          <a:xfrm>
+            <a:off x="685800" y="2130425"/>
+            <a:ext cx="7772400" cy="1470025"/>
+          </a:xfrm>
+        </p:spPr>
+        <p:txBody>
+          <a:bodyPr/>
+          <a:lstStyle/>
+          <a:p>
+            <a:r>
+              <a:rPr lang="en-US" smtClean="0"/>
+              <a:t>Click to edit Master title style</a:t>
+            </a:r>
+            <a:endParaRPr lang="en-US"/>
+          </a:p>
+        </p:txBody>
+      </p:sp>
+      <p:sp>
+        <p:nvSpPr>
+          <p:cNvPr id="3" name="Subtitle 2"/>
+          <p:cNvSpPr>
+            <a:spLocks noGrp="1"/>
+          </p:cNvSpPr>
+          <p:nvPr>
+            <p:ph type="subTitle" idx="1"/>
+          </p:nvPr>
+        </p:nvSpPr>
+        <p:spPr>
+          <a:xfrm>
+            <a:off x="1371600" y="3886200"/>
+            <a:ext cx="6400800" cy="1752600"/>
+          </a:xfrm>
+        </p:spPr>
+        <p:txBody>
+          <a:bodyPr/>
+          <a:lstStyle>
+            <a:lvl1pPr marL="0" indent="0" algn="ctr">
+              <a:buNone/>
+              <a:defRPr>
+                <a:solidFill>
+                  <a:schemeClr val="tx1">
+                    <a:tint val="75000"/>
+                  </a:schemeClr>
+                </a:solidFill>
+              </a:defRPr>
+            </a:lvl1pPr>
+            <a:lvl2pPr marL="457200" indent="0" algn="ctr">
+              <a:buNone/>
+              <a:defRPr>
+                <a:solidFill>
+                  <a:schemeClr val="tx1">
+                    <a:tint val="75000"/>
+                  </a:schemeClr>
+                </a:solidFill>
+              </a:defRPr>
+            </a:lvl2pPr>
+            <a:lvl3pPr marL="914400" indent="0" algn="ctr">
+              <a:buNone/>
+              <a:defRPr>
+                <a:solidFill>
+                  <a:schemeClr val="tx1">
+                    <a:tint val="75000"/>
+                  </a:schemeClr>
+                </a:solidFill>
+              </a:defRPr>
+            </a:lvl3pPr>
+            <a:lvl4pPr marL="1371600" indent="0" algn="ctr">
+              <a:buNone/>
+              <a:defRPr>
+                <a:solidFill>
+                  <a:schemeClr val="tx1">
+                    <a:tint val="75000"/>
+                  </a:schemeClr>
+                </a:solidFill>
+              </a:defRPr>
+            </a:lvl4pPr>
+            <a:lvl5pPr marL="1828800" indent="0" algn="ctr">
+              <a:buNone/>
+              <a:defRPr>
+                <a:solidFill>
+                  <a:schemeClr val="tx1">
+                    <a:tint val="75000"/>
+                  </a:schemeClr>
+                </a:solidFill>
+              </a:defRPr>
+            </a:lvl5pPr>
+            <a:lvl6pPr marL="2286000" indent="0" algn="ctr">
+              <a:buNone/>
+              <a:defRPr>
+                <a:solidFill>
+                  <a:schemeClr val="tx1">
+                    <a:tint val="75000"/>
+                  </a:schemeClr>
+                </a:solidFill>
+              </a:defRPr>
+            </a:lvl6pPr>
+            <a:lvl7pPr marL="2743200" indent="0" algn="ctr">
+              <a:buNone/>
+              <a:defRPr>
+                <a:solidFill>
+                  <a:schemeClr val="tx1">
+                    <a:tint val="75000"/>
+                  </a:schemeClr>
+                </a:solidFill>
+              </a:defRPr>
+            </a:lvl7pPr>
+            <a:lvl8pPr marL="3200400" indent="0" algn="ctr">
+              <a:buNone/>
+              <a:defRPr>
+                <a:solidFill>
+                  <a:schemeClr val="tx1">
+                    <a:tint val="75000"/>
+                  </a:schemeClr>
+                </a:solidFill>
+              </a:defRPr>
+            </a:lvl8pPr>
+            <a:lvl9pPr marL="3657600" indent="0" algn="ctr">
+              <a:buNone/>
+              <a:defRPr>
+                <a:solidFill>
+                  <a:schemeClr val="tx1">
+                    <a:tint val="75000"/>
+                  </a:schemeClr>
+                </a:solidFill>
+              </a:defRPr>
+            </a:lvl9pPr>
+          </a:lstStyle>
+          <a:p>
+            <a:r>
+              <a:rPr lang="en-US" smtClean="0"/>
+              <a:t>Click to edit Master subtitle style</a:t>
+            </a:r>
+            <a:endParaRPr lang="en-US"/>
+          </a:p>
+        </p:txBody>
+      </p:sp>
+      <p:sp>
+        <p:nvSpPr>
+          <p:cNvPr id="4" name="Date Placeholder 3"/>
+          <p:cNvSpPr>
+            <a:spLocks noGrp="1"/>
+          </p:cNvSpPr>
+          <p:nvPr>
+            <p:ph type="dt" sz="half" idx="10"/>
+          </p:nvPr>
+        </p:nvSpPr>
+        <p:spPr/>
+        <p:txBody>
+          <a:bodyPr/>
+          <a:lstStyle/>
+          <a:p>
+            <a:fld id="{5BCAD085-E8A6-8845-BD4E-CB4CCA059FC4}" type="datetimeFigureOut">
+              <a:rPr lang="en-US" smtClean="0"/>
+              <a:t>1/27/13</a:t>
+            </a:fld>
+            <a:endParaRPr lang="en-US"/>
+          </a:p>
+        </p:txBody>
+      </p:sp>
+      <p:sp>
+        <p:nvSpPr>
+          <p:cNvPr id="5" name="Footer Placeholder 4"/>
+          <p:cNvSpPr>
+            <a:spLocks noGrp="1"/>
+          </p:cNvSpPr>
+          <p:nvPr>
+            <p:ph type="ftr" sz="quarter" idx="11"/>
+          </p:nvPr>
+        </p:nvSpPr>
+        <p:spPr/>
+        <p:txBody>
+          <a:bodyPr/>
+          <a:lstStyle/>
+          <a:p>
+            <a:endParaRPr lang="en-US"/>
+          </a:p>
+        </p:txBody>
+      </p:sp>
+      <p:sp>
+        <p:nvSpPr>
+          <p:cNvPr id="6" name="Slide Number Placeholder 5"/>
+          <p:cNvSpPr>
+            <a:spLocks noGrp="1"/>
+          </p:cNvSpPr>
+          <p:nvPr>
+            <p:ph type="sldNum" sz="quarter" idx="12"/>
+          </p:nvPr>
+        </p:nvSpPr>
+        <p:spPr/>
+        <p:txBody>
+          <a:bodyPr/>
+          <a:lstStyle/>
+          <a:p>
+            <a:fld id="{C1FF6DA9-008F-8B48-92A6-B652298478BF}" type="slidenum">
+              <a:rPr lang="en-US" smtClean="0"/>
+              <a:t>‹#›</a:t>
+            </a:fld>
+            <a:endParaRPr lang="en-US"/>
+          </a:p>
+        </p:txBody>
+      </p:sp>
+    </p:spTree>
+    <p:extLst>
+      <p:ext uri="{BB962C8B-B14F-4D97-AF65-F5344CB8AC3E}">
+        <p14:creationId xmlns:p14="http://schemas.microsoft.com/office/powerpoint/2010/main" val="3168075583"/>
+      </p:ext>
+    </p:extLst>
+  </p:cSld>
+  <p:clrMapOvr>
+    <a:masterClrMapping/>
+  </p:clrMapOvr>
+</p:sldLayout>
+</file>
+
+<file path=ppt/slideLayouts/slideLayout10.xml><?xml version="1.0" encoding="utf-8"?>
+<p:sldLayout xmlns:a="http://schemas.openxmlformats.org/drawingml/2006/main" xmlns:r="http://schemas.openxmlformats.org/officeDocument/2006/relationships" xmlns:p="http://schemas.openxmlformats.org/presentationml/2006/main" type="vertTx" preserve="1">
+  <p:cSld name="Title and Vertical Text">
+    <p:spTree>
+      <p:nvGrpSpPr>
+        <p:cNvPr id="1" name=""/>
+        <p:cNvGrpSpPr/>
+        <p:nvPr/>
+      </p:nvGrpSpPr>
+      <p:grpSpPr>
+        <a:xfrm>
+          <a:off x="0" y="0"/>
+          <a:ext cx="0" cy="0"/>
+          <a:chOff x="0" y="0"/>
+          <a:chExt cx="0" cy="0"/>
+        </a:xfrm>
+      </p:grpSpPr>
+      <p:sp>
+        <p:nvSpPr>
+          <p:cNvPr id="2" name="Title 1"/>
+          <p:cNvSpPr>
+            <a:spLocks noGrp="1"/>
+          </p:cNvSpPr>
+          <p:nvPr>
+            <p:ph type="title"/>
+          </p:nvPr>
+        </p:nvSpPr>
+        <p:spPr/>
+        <p:txBody>
+          <a:bodyPr/>
+          <a:lstStyle/>
+          <a:p>
+            <a:r>
+              <a:rPr lang="en-US" smtClean="0"/>
+              <a:t>Click to edit Master title style</a:t>
+            </a:r>
+            <a:endParaRPr lang="en-US"/>
+          </a:p>
+        </p:txBody>
+      </p:sp>
+      <p:sp>
+        <p:nvSpPr>
+          <p:cNvPr id="3" name="Vertical Text Placeholder 2"/>
+          <p:cNvSpPr>
+            <a:spLocks noGrp="1"/>
+          </p:cNvSpPr>
+          <p:nvPr>
+            <p:ph type="body" orient="vert" idx="1"/>
+          </p:nvPr>
+        </p:nvSpPr>
+        <p:spPr/>
+        <p:txBody>
+          <a:bodyPr vert="eaVert"/>
+          <a:lstStyle/>
+          <a:p>
+            <a:pPr lvl="0"/>
+            <a:r>
+              <a:rPr lang="en-US" smtClean="0"/>
+              <a:t>Click to edit Master text styles</a:t>
+            </a:r>
+          </a:p>
+          <a:p>
+            <a:pPr lvl="1"/>
+            <a:r>
+              <a:rPr lang="en-US" smtClean="0"/>
+              <a:t>Second level</a:t>
+            </a:r>
+          </a:p>
+          <a:p>
+            <a:pPr lvl="2"/>
+            <a:r>
+              <a:rPr lang="en-US" smtClean="0"/>
+              <a:t>Third level</a:t>
+            </a:r>
+          </a:p>
+          <a:p>
+            <a:pPr lvl="3"/>
+            <a:r>
+              <a:rPr lang="en-US" smtClean="0"/>
+              <a:t>Fourth level</a:t>
+            </a:r>
+          </a:p>
+          <a:p>
+            <a:pPr lvl="4"/>
+            <a:r>
+              <a:rPr lang="en-US" smtClean="0"/>
+              <a:t>Fifth level</a:t>
+            </a:r>
+            <a:endParaRPr lang="en-US"/>
+          </a:p>
+        </p:txBody>
+      </p:sp>
+      <p:sp>
+        <p:nvSpPr>
+          <p:cNvPr id="4" name="Date Placeholder 3"/>
+          <p:cNvSpPr>
+            <a:spLocks noGrp="1"/>
+          </p:cNvSpPr>
+          <p:nvPr>
+            <p:ph type="dt" sz="half" idx="10"/>
+          </p:nvPr>
+        </p:nvSpPr>
+        <p:spPr/>
+        <p:txBody>
+          <a:bodyPr/>
+          <a:lstStyle/>
+          <a:p>
+            <a:fld id="{5BCAD085-E8A6-8845-BD4E-CB4CCA059FC4}" type="datetimeFigureOut">
+              <a:rPr lang="en-US" smtClean="0"/>
+              <a:t>1/27/13</a:t>
+            </a:fld>
+            <a:endParaRPr lang="en-US"/>
+          </a:p>
+        </p:txBody>
+      </p:sp>
+      <p:sp>
+        <p:nvSpPr>
+          <p:cNvPr id="5" name="Footer Placeholder 4"/>
+          <p:cNvSpPr>
+            <a:spLocks noGrp="1"/>
+          </p:cNvSpPr>
+          <p:nvPr>
+            <p:ph type="ftr" sz="quarter" idx="11"/>
+          </p:nvPr>
+        </p:nvSpPr>
+        <p:spPr/>
+        <p:txBody>
+          <a:bodyPr/>
+          <a:lstStyle/>
+          <a:p>
+            <a:endParaRPr lang="en-US"/>
+          </a:p>
+        </p:txBody>
+      </p:sp>
+      <p:sp>
+        <p:nvSpPr>
+          <p:cNvPr id="6" name="Slide Number Placeholder 5"/>
+          <p:cNvSpPr>
+            <a:spLocks noGrp="1"/>
+          </p:cNvSpPr>
+          <p:nvPr>
+            <p:ph type="sldNum" sz="quarter" idx="12"/>
+          </p:nvPr>
+        </p:nvSpPr>
+        <p:spPr/>
+        <p:txBody>
+          <a:bodyPr/>
+          <a:lstStyle/>
+          <a:p>
+            <a:fld id="{C1FF6DA9-008F-8B48-92A6-B652298478BF}" type="slidenum">
+              <a:rPr lang="en-US" smtClean="0"/>
+              <a:t>‹#›</a:t>
+            </a:fld>
+            <a:endParaRPr lang="en-US"/>
+          </a:p>
+        </p:txBody>
+      </p:sp>
+    </p:spTree>
+    <p:extLst>
+      <p:ext uri="{BB962C8B-B14F-4D97-AF65-F5344CB8AC3E}">
+        <p14:creationId xmlns:p14="http://schemas.microsoft.com/office/powerpoint/2010/main" val="2910927964"/>
+      </p:ext>
+    </p:extLst>
+  </p:cSld>
+  <p:clrMapOvr>
+    <a:masterClrMapping/>
+  </p:clrMapOvr>
+</p:sldLayout>
+</file>
+
+<file path=ppt/slideLayouts/slideLayout11.xml><?xml version="1.0" encoding="utf-8"?>
+<p:sldLayout xmlns:a="http://schemas.openxmlformats.org/drawingml/2006/main" xmlns:r="http://schemas.openxmlformats.org/officeDocument/2006/relationships" xmlns:p="http://schemas.openxmlformats.org/presentationml/2006/main" type="vertTitleAndTx" preserve="1">
+  <p:cSld name="Vertical Title and Text">
+    <p:spTree>
+      <p:nvGrpSpPr>
+        <p:cNvPr id="1" name=""/>
+        <p:cNvGrpSpPr/>
+        <p:nvPr/>
+      </p:nvGrpSpPr>
+      <p:grpSpPr>
+        <a:xfrm>
+          <a:off x="0" y="0"/>
+          <a:ext cx="0" cy="0"/>
+          <a:chOff x="0" y="0"/>
+          <a:chExt cx="0" cy="0"/>
+        </a:xfrm>
+      </p:grpSpPr>
+      <p:sp>
+        <p:nvSpPr>
+          <p:cNvPr id="2" name="Vertical Title 1"/>
+          <p:cNvSpPr>
+            <a:spLocks noGrp="1"/>
+          </p:cNvSpPr>
+          <p:nvPr>
+            <p:ph type="title" orient="vert"/>
+          </p:nvPr>
+        </p:nvSpPr>
+        <p:spPr>
+          <a:xfrm>
+            <a:off x="6629400" y="274638"/>
+            <a:ext cx="2057400" cy="5851525"/>
+          </a:xfrm>
+        </p:spPr>
+        <p:txBody>
+          <a:bodyPr vert="eaVert"/>
+          <a:lstStyle/>
+          <a:p>
+            <a:r>
+              <a:rPr lang="en-US" smtClean="0"/>
+              <a:t>Click to edit Master title style</a:t>
+            </a:r>
+            <a:endParaRPr lang="en-US"/>
+          </a:p>
+        </p:txBody>
+      </p:sp>
+      <p:sp>
+        <p:nvSpPr>
+          <p:cNvPr id="3" name="Vertical Text Placeholder 2"/>
+          <p:cNvSpPr>
+            <a:spLocks noGrp="1"/>
+          </p:cNvSpPr>
+          <p:nvPr>
+            <p:ph type="body" orient="vert" idx="1"/>
+          </p:nvPr>
+        </p:nvSpPr>
+        <p:spPr>
+          <a:xfrm>
+            <a:off x="457200" y="274638"/>
+            <a:ext cx="6019800" cy="5851525"/>
+          </a:xfrm>
+        </p:spPr>
+        <p:txBody>
+          <a:bodyPr vert="eaVert"/>
+          <a:lstStyle/>
+          <a:p>
+            <a:pPr lvl="0"/>
+            <a:r>
+              <a:rPr lang="en-US" smtClean="0"/>
+              <a:t>Click to edit Master text styles</a:t>
+            </a:r>
+          </a:p>
+          <a:p>
+            <a:pPr lvl="1"/>
+            <a:r>
+              <a:rPr lang="en-US" smtClean="0"/>
+              <a:t>Second level</a:t>
+            </a:r>
+          </a:p>
+          <a:p>
+            <a:pPr lvl="2"/>
+            <a:r>
+              <a:rPr lang="en-US" smtClean="0"/>
+              <a:t>Third level</a:t>
+            </a:r>
+          </a:p>
+          <a:p>
+            <a:pPr lvl="3"/>
+            <a:r>
+              <a:rPr lang="en-US" smtClean="0"/>
+              <a:t>Fourth level</a:t>
+            </a:r>
+          </a:p>
+          <a:p>
+            <a:pPr lvl="4"/>
+            <a:r>
+              <a:rPr lang="en-US" smtClean="0"/>
+              <a:t>Fifth level</a:t>
+            </a:r>
+            <a:endParaRPr lang="en-US"/>
+          </a:p>
+        </p:txBody>
+      </p:sp>
+      <p:sp>
+        <p:nvSpPr>
+          <p:cNvPr id="4" name="Date Placeholder 3"/>
+          <p:cNvSpPr>
+            <a:spLocks noGrp="1"/>
+          </p:cNvSpPr>
+          <p:nvPr>
+            <p:ph type="dt" sz="half" idx="10"/>
+          </p:nvPr>
+        </p:nvSpPr>
+        <p:spPr/>
+        <p:txBody>
+          <a:bodyPr/>
+          <a:lstStyle/>
+          <a:p>
+            <a:fld id="{5BCAD085-E8A6-8845-BD4E-CB4CCA059FC4}" type="datetimeFigureOut">
+              <a:rPr lang="en-US" smtClean="0"/>
+              <a:t>1/27/13</a:t>
+            </a:fld>
+            <a:endParaRPr lang="en-US"/>
+          </a:p>
+        </p:txBody>
+      </p:sp>
+      <p:sp>
+        <p:nvSpPr>
+          <p:cNvPr id="5" name="Footer Placeholder 4"/>
+          <p:cNvSpPr>
+            <a:spLocks noGrp="1"/>
+          </p:cNvSpPr>
+          <p:nvPr>
+            <p:ph type="ftr" sz="quarter" idx="11"/>
+          </p:nvPr>
+        </p:nvSpPr>
+        <p:spPr/>
+        <p:txBody>
+          <a:bodyPr/>
+          <a:lstStyle/>
+          <a:p>
+            <a:endParaRPr lang="en-US"/>
+          </a:p>
+        </p:txBody>
+      </p:sp>
+      <p:sp>
+        <p:nvSpPr>
+          <p:cNvPr id="6" name="Slide Number Placeholder 5"/>
+          <p:cNvSpPr>
+            <a:spLocks noGrp="1"/>
+          </p:cNvSpPr>
+          <p:nvPr>
+            <p:ph type="sldNum" sz="quarter" idx="12"/>
+          </p:nvPr>
+        </p:nvSpPr>
+        <p:spPr/>
+        <p:txBody>
+          <a:bodyPr/>
+          <a:lstStyle/>
+          <a:p>
+            <a:fld id="{C1FF6DA9-008F-8B48-92A6-B652298478BF}" type="slidenum">
+              <a:rPr lang="en-US" smtClean="0"/>
+              <a:t>‹#›</a:t>
+            </a:fld>
+            <a:endParaRPr lang="en-US"/>
+          </a:p>
+        </p:txBody>
+      </p:sp>
+    </p:spTree>
+    <p:extLst>
+      <p:ext uri="{BB962C8B-B14F-4D97-AF65-F5344CB8AC3E}">
+        <p14:creationId xmlns:p14="http://schemas.microsoft.com/office/powerpoint/2010/main" val="3612223792"/>
+      </p:ext>
+    </p:extLst>
+  </p:cSld>
+  <p:clrMapOvr>
+    <a:masterClrMapping/>
+  </p:clrMapOvr>
+</p:sldLayout>
+</file>
+
+<file path=ppt/slideLayouts/slideLayout2.xml><?xml version="1.0" encoding="utf-8"?>
+<p:sldLayout xmlns:a="http://schemas.openxmlformats.org/drawingml/2006/main" xmlns:r="http://schemas.openxmlformats.org/officeDocument/2006/relationships" xmlns:p="http://schemas.openxmlformats.org/presentationml/2006/main" type="obj" preserve="1">
+  <p:cSld name="Title and Content">
+    <p:spTree>
+      <p:nvGrpSpPr>
+        <p:cNvPr id="1" name=""/>
+        <p:cNvGrpSpPr/>
+        <p:nvPr/>
+      </p:nvGrpSpPr>
+      <p:grpSpPr>
+        <a:xfrm>
+          <a:off x="0" y="0"/>
+          <a:ext cx="0" cy="0"/>
+          <a:chOff x="0" y="0"/>
+          <a:chExt cx="0" cy="0"/>
+        </a:xfrm>
+      </p:grpSpPr>
+      <p:sp>
+        <p:nvSpPr>
+          <p:cNvPr id="2" name="Title 1"/>
+          <p:cNvSpPr>
+            <a:spLocks noGrp="1"/>
+          </p:cNvSpPr>
+          <p:nvPr>
+            <p:ph type="title"/>
+          </p:nvPr>
+        </p:nvSpPr>
+        <p:spPr/>
+        <p:txBody>
+          <a:bodyPr/>
+          <a:lstStyle/>
+          <a:p>
+            <a:r>
+              <a:rPr lang="en-US" smtClean="0"/>
+              <a:t>Click to edit Master title style</a:t>
+            </a:r>
+            <a:endParaRPr lang="en-US"/>
+          </a:p>
+        </p:txBody>
+      </p:sp>
+      <p:sp>
+        <p:nvSpPr>
+          <p:cNvPr id="3" name="Content Placeholder 2"/>
+          <p:cNvSpPr>
+            <a:spLocks noGrp="1"/>
+          </p:cNvSpPr>
+          <p:nvPr>
+            <p:ph idx="1"/>
+          </p:nvPr>
+        </p:nvSpPr>
+        <p:spPr/>
+        <p:txBody>
+          <a:bodyPr/>
+          <a:lstStyle/>
+          <a:p>
+            <a:pPr lvl="0"/>
+            <a:r>
+              <a:rPr lang="en-US" smtClean="0"/>
+              <a:t>Click to edit Master text styles</a:t>
+            </a:r>
+          </a:p>
+          <a:p>
+            <a:pPr lvl="1"/>
+            <a:r>
+              <a:rPr lang="en-US" smtClean="0"/>
+              <a:t>Second level</a:t>
+            </a:r>
+          </a:p>
+          <a:p>
+            <a:pPr lvl="2"/>
+            <a:r>
+              <a:rPr lang="en-US" smtClean="0"/>
+              <a:t>Third level</a:t>
+            </a:r>
+          </a:p>
+          <a:p>
+            <a:pPr lvl="3"/>
+            <a:r>
+              <a:rPr lang="en-US" smtClean="0"/>
+              <a:t>Fourth level</a:t>
+            </a:r>
+          </a:p>
+          <a:p>
+            <a:pPr lvl="4"/>
+            <a:r>
+              <a:rPr lang="en-US" smtClean="0"/>
+              <a:t>Fifth level</a:t>
+            </a:r>
+            <a:endParaRPr lang="en-US"/>
+          </a:p>
+        </p:txBody>
+      </p:sp>
+      <p:sp>
+        <p:nvSpPr>
+          <p:cNvPr id="4" name="Date Placeholder 3"/>
+          <p:cNvSpPr>
+            <a:spLocks noGrp="1"/>
+          </p:cNvSpPr>
+          <p:nvPr>
+            <p:ph type="dt" sz="half" idx="10"/>
+          </p:nvPr>
+        </p:nvSpPr>
+        <p:spPr/>
+        <p:txBody>
+          <a:bodyPr/>
+          <a:lstStyle/>
+          <a:p>
+            <a:fld id="{5BCAD085-E8A6-8845-BD4E-CB4CCA059FC4}" type="datetimeFigureOut">
+              <a:rPr lang="en-US" smtClean="0"/>
+              <a:t>1/27/13</a:t>
+            </a:fld>
+            <a:endParaRPr lang="en-US"/>
+          </a:p>
+        </p:txBody>
+      </p:sp>
+      <p:sp>
+        <p:nvSpPr>
+          <p:cNvPr id="5" name="Footer Placeholder 4"/>
+          <p:cNvSpPr>
+            <a:spLocks noGrp="1"/>
+          </p:cNvSpPr>
+          <p:nvPr>
+            <p:ph type="ftr" sz="quarter" idx="11"/>
+          </p:nvPr>
+        </p:nvSpPr>
+        <p:spPr/>
+        <p:txBody>
+          <a:bodyPr/>
+          <a:lstStyle/>
+          <a:p>
+            <a:endParaRPr lang="en-US"/>
+          </a:p>
+        </p:txBody>
+      </p:sp>
+      <p:sp>
+        <p:nvSpPr>
+          <p:cNvPr id="6" name="Slide Number Placeholder 5"/>
+          <p:cNvSpPr>
+            <a:spLocks noGrp="1"/>
+          </p:cNvSpPr>
+          <p:nvPr>
+            <p:ph type="sldNum" sz="quarter" idx="12"/>
+          </p:nvPr>
+        </p:nvSpPr>
+        <p:spPr/>
+        <p:txBody>
+          <a:bodyPr/>
+          <a:lstStyle/>
+          <a:p>
+            <a:fld id="{C1FF6DA9-008F-8B48-92A6-B652298478BF}" type="slidenum">
+              <a:rPr lang="en-US" smtClean="0"/>
+              <a:t>‹#›</a:t>
+            </a:fld>
+            <a:endParaRPr lang="en-US"/>
+          </a:p>
+        </p:txBody>
+      </p:sp>
+    </p:spTree>
+    <p:extLst>
+      <p:ext uri="{BB962C8B-B14F-4D97-AF65-F5344CB8AC3E}">
+        <p14:creationId xmlns:p14="http://schemas.microsoft.com/office/powerpoint/2010/main" val="2614314258"/>
+      </p:ext>
+    </p:extLst>
+  </p:cSld>
+  <p:clrMapOvr>
+    <a:masterClrMapping/>
+  </p:clrMapOvr>
+</p:sldLayout>
+</file>
+
+<file path=ppt/slideLayouts/slideLayout3.xml><?xml version="1.0" encoding="utf-8"?>
+<p:sldLayout xmlns:a="http://schemas.openxmlformats.org/drawingml/2006/main" xmlns:r="http://schemas.openxmlformats.org/officeDocument/2006/relationships" xmlns:p="http://schemas.openxmlformats.org/presentationml/2006/main" type="secHead" preserve="1">
+  <p:cSld name="Section Header">
+    <p:spTree>
+      <p:nvGrpSpPr>
+        <p:cNvPr id="1" name=""/>
+        <p:cNvGrpSpPr/>
+        <p:nvPr/>
+      </p:nvGrpSpPr>
+      <p:grpSpPr>
+        <a:xfrm>
+          <a:off x="0" y="0"/>
+          <a:ext cx="0" cy="0"/>
+          <a:chOff x="0" y="0"/>
+          <a:chExt cx="0" cy="0"/>
+        </a:xfrm>
+      </p:grpSpPr>
+      <p:sp>
+        <p:nvSpPr>
+          <p:cNvPr id="2" name="Title 1"/>
+          <p:cNvSpPr>
+            <a:spLocks noGrp="1"/>
+          </p:cNvSpPr>
+          <p:nvPr>
+            <p:ph type="title"/>
+          </p:nvPr>
+        </p:nvSpPr>
+        <p:spPr>
+          <a:xfrm>
+            <a:off x="722313" y="4406900"/>
+            <a:ext cx="7772400" cy="1362075"/>
+          </a:xfrm>
+        </p:spPr>
+        <p:txBody>
+          <a:bodyPr anchor="t"/>
+          <a:lstStyle>
+            <a:lvl1pPr algn="l">
+              <a:defRPr sz="4000" b="1" cap="all"/>
+            </a:lvl1pPr>
+          </a:lstStyle>
+          <a:p>
+            <a:r>
+              <a:rPr lang="en-US" smtClean="0"/>
+              <a:t>Click to edit Master title style</a:t>
+            </a:r>
+            <a:endParaRPr lang="en-US"/>
+          </a:p>
+        </p:txBody>
+      </p:sp>
+      <p:sp>
+        <p:nvSpPr>
+          <p:cNvPr id="3" name="Text Placeholder 2"/>
+          <p:cNvSpPr>
+            <a:spLocks noGrp="1"/>
+          </p:cNvSpPr>
+          <p:nvPr>
+            <p:ph type="body" idx="1"/>
+          </p:nvPr>
+        </p:nvSpPr>
+        <p:spPr>
+          <a:xfrm>
+            <a:off x="722313" y="2906713"/>
+            <a:ext cx="7772400" cy="1500187"/>
+          </a:xfrm>
+        </p:spPr>
+        <p:txBody>
+          <a:bodyPr anchor="b"/>
+          <a:lstStyle>
+            <a:lvl1pPr marL="0" indent="0">
+              <a:buNone/>
+              <a:defRPr sz="2000">
+                <a:solidFill>
+                  <a:schemeClr val="tx1">
+                    <a:tint val="75000"/>
+                  </a:schemeClr>
+                </a:solidFill>
+              </a:defRPr>
+            </a:lvl1pPr>
+            <a:lvl2pPr marL="457200" indent="0">
+              <a:buNone/>
+              <a:defRPr sz="1800">
+                <a:solidFill>
+                  <a:schemeClr val="tx1">
+                    <a:tint val="75000"/>
+                  </a:schemeClr>
+                </a:solidFill>
+              </a:defRPr>
+            </a:lvl2pPr>
+            <a:lvl3pPr marL="914400" indent="0">
+              <a:buNone/>
+              <a:defRPr sz="1600">
+                <a:solidFill>
+                  <a:schemeClr val="tx1">
+                    <a:tint val="75000"/>
+                  </a:schemeClr>
+                </a:solidFill>
+              </a:defRPr>
+            </a:lvl3pPr>
+            <a:lvl4pPr marL="1371600" indent="0">
+              <a:buNone/>
+              <a:defRPr sz="1400">
+                <a:solidFill>
+                  <a:schemeClr val="tx1">
+                    <a:tint val="75000"/>
+                  </a:schemeClr>
+                </a:solidFill>
+              </a:defRPr>
+            </a:lvl4pPr>
+            <a:lvl5pPr marL="1828800" indent="0">
+              <a:buNone/>
+              <a:defRPr sz="1400">
+                <a:solidFill>
+                  <a:schemeClr val="tx1">
+                    <a:tint val="75000"/>
+                  </a:schemeClr>
+                </a:solidFill>
+              </a:defRPr>
+            </a:lvl5pPr>
+            <a:lvl6pPr marL="2286000" indent="0">
+              <a:buNone/>
+              <a:defRPr sz="1400">
+                <a:solidFill>
+                  <a:schemeClr val="tx1">
+                    <a:tint val="75000"/>
+                  </a:schemeClr>
+                </a:solidFill>
+              </a:defRPr>
+            </a:lvl6pPr>
+            <a:lvl7pPr marL="2743200" indent="0">
+              <a:buNone/>
+              <a:defRPr sz="1400">
+                <a:solidFill>
+                  <a:schemeClr val="tx1">
+                    <a:tint val="75000"/>
+                  </a:schemeClr>
+                </a:solidFill>
+              </a:defRPr>
+            </a:lvl7pPr>
+            <a:lvl8pPr marL="3200400" indent="0">
+              <a:buNone/>
+              <a:defRPr sz="1400">
+                <a:solidFill>
+                  <a:schemeClr val="tx1">
+                    <a:tint val="75000"/>
+                  </a:schemeClr>
+                </a:solidFill>
+              </a:defRPr>
+            </a:lvl8pPr>
+            <a:lvl9pPr marL="3657600" indent="0">
+              <a:buNone/>
+              <a:defRPr sz="1400">
+                <a:solidFill>
+                  <a:schemeClr val="tx1">
+                    <a:tint val="75000"/>
+                  </a:schemeClr>
+                </a:solidFill>
+              </a:defRPr>
+            </a:lvl9pPr>
+          </a:lstStyle>
+          <a:p>
+            <a:pPr lvl="0"/>
+            <a:r>
+              <a:rPr lang="en-US" smtClean="0"/>
+              <a:t>Click to edit Master text styles</a:t>
+            </a:r>
+          </a:p>
+        </p:txBody>
+      </p:sp>
+      <p:sp>
+        <p:nvSpPr>
+          <p:cNvPr id="4" name="Date Placeholder 3"/>
+          <p:cNvSpPr>
+            <a:spLocks noGrp="1"/>
+          </p:cNvSpPr>
+          <p:nvPr>
+            <p:ph type="dt" sz="half" idx="10"/>
+          </p:nvPr>
+        </p:nvSpPr>
+        <p:spPr/>
+        <p:txBody>
+          <a:bodyPr/>
+          <a:lstStyle/>
+          <a:p>
+            <a:fld id="{5BCAD085-E8A6-8845-BD4E-CB4CCA059FC4}" type="datetimeFigureOut">
+              <a:rPr lang="en-US" smtClean="0"/>
+              <a:t>1/27/13</a:t>
+            </a:fld>
+            <a:endParaRPr lang="en-US"/>
+          </a:p>
+        </p:txBody>
+      </p:sp>
+      <p:sp>
+        <p:nvSpPr>
+          <p:cNvPr id="5" name="Footer Placeholder 4"/>
+          <p:cNvSpPr>
+            <a:spLocks noGrp="1"/>
+          </p:cNvSpPr>
+          <p:nvPr>
+            <p:ph type="ftr" sz="quarter" idx="11"/>
+          </p:nvPr>
+        </p:nvSpPr>
+        <p:spPr/>
+        <p:txBody>
+          <a:bodyPr/>
+          <a:lstStyle/>
+          <a:p>
+            <a:endParaRPr lang="en-US"/>
+          </a:p>
+        </p:txBody>
+      </p:sp>
+      <p:sp>
+        <p:nvSpPr>
+          <p:cNvPr id="6" name="Slide Number Placeholder 5"/>
+          <p:cNvSpPr>
+            <a:spLocks noGrp="1"/>
+          </p:cNvSpPr>
+          <p:nvPr>
+            <p:ph type="sldNum" sz="quarter" idx="12"/>
+          </p:nvPr>
+        </p:nvSpPr>
+        <p:spPr/>
+        <p:txBody>
+          <a:bodyPr/>
+          <a:lstStyle/>
+          <a:p>
+            <a:fld id="{C1FF6DA9-008F-8B48-92A6-B652298478BF}" type="slidenum">
+              <a:rPr lang="en-US" smtClean="0"/>
+              <a:t>‹#›</a:t>
+            </a:fld>
+            <a:endParaRPr lang="en-US"/>
+          </a:p>
+        </p:txBody>
+      </p:sp>
+    </p:spTree>
+    <p:extLst>
+      <p:ext uri="{BB962C8B-B14F-4D97-AF65-F5344CB8AC3E}">
+        <p14:creationId xmlns:p14="http://schemas.microsoft.com/office/powerpoint/2010/main" val="960648375"/>
+      </p:ext>
+    </p:extLst>
+  </p:cSld>
+  <p:clrMapOvr>
+    <a:masterClrMapping/>
+  </p:clrMapOvr>
+</p:sldLayout>
+</file>
+
+<file path=ppt/slideLayouts/slideLayout4.xml><?xml version="1.0" encoding="utf-8"?>
+<p:sldLayout xmlns:a="http://schemas.openxmlformats.org/drawingml/2006/main" xmlns:r="http://schemas.openxmlformats.org/officeDocument/2006/relationships" xmlns:p="http://schemas.openxmlformats.org/presentationml/2006/main" type="twoObj" preserve="1">
+  <p:cSld name="Two Content">
+    <p:spTree>
+      <p:nvGrpSpPr>
+        <p:cNvPr id="1" name=""/>
+        <p:cNvGrpSpPr/>
+        <p:nvPr/>
+      </p:nvGrpSpPr>
+      <p:grpSpPr>
+        <a:xfrm>
+          <a:off x="0" y="0"/>
+          <a:ext cx="0" cy="0"/>
+          <a:chOff x="0" y="0"/>
+          <a:chExt cx="0" cy="0"/>
+        </a:xfrm>
+      </p:grpSpPr>
+      <p:sp>
+        <p:nvSpPr>
+          <p:cNvPr id="2" name="Title 1"/>
+          <p:cNvSpPr>
+            <a:spLocks noGrp="1"/>
+          </p:cNvSpPr>
+          <p:nvPr>
+            <p:ph type="title"/>
+          </p:nvPr>
+        </p:nvSpPr>
+        <p:spPr/>
+        <p:txBody>
+          <a:bodyPr/>
+          <a:lstStyle/>
+          <a:p>
+            <a:r>
+              <a:rPr lang="en-US" smtClean="0"/>
+              <a:t>Click to edit Master title style</a:t>
+            </a:r>
+            <a:endParaRPr lang="en-US"/>
+          </a:p>
+        </p:txBody>
+      </p:sp>
+      <p:sp>
+        <p:nvSpPr>
+          <p:cNvPr id="3" name="Content Placeholder 2"/>
+          <p:cNvSpPr>
+            <a:spLocks noGrp="1"/>
+          </p:cNvSpPr>
+          <p:nvPr>
+            <p:ph sz="half" idx="1"/>
+          </p:nvPr>
+        </p:nvSpPr>
+        <p:spPr>
+          <a:xfrm>
+            <a:off x="457200" y="1600200"/>
+            <a:ext cx="4038600" cy="4525963"/>
+          </a:xfrm>
+        </p:spPr>
+        <p:txBody>
+          <a:bodyPr/>
+          <a:lstStyle>
+            <a:lvl1pPr>
+              <a:defRPr sz="2800"/>
+            </a:lvl1pPr>
+            <a:lvl2pPr>
+              <a:defRPr sz="2400"/>
+            </a:lvl2pPr>
+            <a:lvl3pPr>
+              <a:defRPr sz="2000"/>
+            </a:lvl3pPr>
+            <a:lvl4pPr>
+              <a:defRPr sz="1800"/>
+            </a:lvl4pPr>
+            <a:lvl5pPr>
+              <a:defRPr sz="1800"/>
+            </a:lvl5pPr>
+            <a:lvl6pPr>
+              <a:defRPr sz="1800"/>
+            </a:lvl6pPr>
+            <a:lvl7pPr>
+              <a:defRPr sz="1800"/>
+            </a:lvl7pPr>
+            <a:lvl8pPr>
+              <a:defRPr sz="1800"/>
+            </a:lvl8pPr>
+            <a:lvl9pPr>
+              <a:defRPr sz="1800"/>
+            </a:lvl9pPr>
+          </a:lstStyle>
+          <a:p>
+            <a:pPr lvl="0"/>
+            <a:r>
+              <a:rPr lang="en-US" smtClean="0"/>
+              <a:t>Click to edit Master text styles</a:t>
+            </a:r>
+          </a:p>
+          <a:p>
+            <a:pPr lvl="1"/>
+            <a:r>
+              <a:rPr lang="en-US" smtClean="0"/>
+              <a:t>Second level</a:t>
+            </a:r>
+          </a:p>
+          <a:p>
+            <a:pPr lvl="2"/>
+            <a:r>
+              <a:rPr lang="en-US" smtClean="0"/>
+              <a:t>Third level</a:t>
+            </a:r>
+          </a:p>
+          <a:p>
+            <a:pPr lvl="3"/>
+            <a:r>
+              <a:rPr lang="en-US" smtClean="0"/>
+              <a:t>Fourth level</a:t>
+            </a:r>
+          </a:p>
+          <a:p>
+            <a:pPr lvl="4"/>
+            <a:r>
+              <a:rPr lang="en-US" smtClean="0"/>
+              <a:t>Fifth level</a:t>
+            </a:r>
+            <a:endParaRPr lang="en-US"/>
+          </a:p>
+        </p:txBody>
+      </p:sp>
+      <p:sp>
+        <p:nvSpPr>
+          <p:cNvPr id="4" name="Content Placeholder 3"/>
+          <p:cNvSpPr>
+            <a:spLocks noGrp="1"/>
+          </p:cNvSpPr>
+          <p:nvPr>
+            <p:ph sz="half" idx="2"/>
+          </p:nvPr>
+        </p:nvSpPr>
+        <p:spPr>
+          <a:xfrm>
+            <a:off x="4648200" y="1600200"/>
+            <a:ext cx="4038600" cy="4525963"/>
+          </a:xfrm>
+        </p:spPr>
+        <p:txBody>
+          <a:bodyPr/>
+          <a:lstStyle>
+            <a:lvl1pPr>
+              <a:defRPr sz="2800"/>
+            </a:lvl1pPr>
+            <a:lvl2pPr>
+              <a:defRPr sz="2400"/>
+            </a:lvl2pPr>
+            <a:lvl3pPr>
+              <a:defRPr sz="2000"/>
+            </a:lvl3pPr>
+            <a:lvl4pPr>
+              <a:defRPr sz="1800"/>
+            </a:lvl4pPr>
+            <a:lvl5pPr>
+              <a:defRPr sz="1800"/>
+            </a:lvl5pPr>
+            <a:lvl6pPr>
+              <a:defRPr sz="1800"/>
+            </a:lvl6pPr>
+            <a:lvl7pPr>
+              <a:defRPr sz="1800"/>
+            </a:lvl7pPr>
+            <a:lvl8pPr>
+              <a:defRPr sz="1800"/>
+            </a:lvl8pPr>
+            <a:lvl9pPr>
+              <a:defRPr sz="1800"/>
+            </a:lvl9pPr>
+          </a:lstStyle>
+          <a:p>
+            <a:pPr lvl="0"/>
+            <a:r>
+              <a:rPr lang="en-US" smtClean="0"/>
+              <a:t>Click to edit Master text styles</a:t>
+            </a:r>
+          </a:p>
+          <a:p>
+            <a:pPr lvl="1"/>
+            <a:r>
+              <a:rPr lang="en-US" smtClean="0"/>
+              <a:t>Second level</a:t>
+            </a:r>
+          </a:p>
+          <a:p>
+            <a:pPr lvl="2"/>
+            <a:r>
+              <a:rPr lang="en-US" smtClean="0"/>
+              <a:t>Third level</a:t>
+            </a:r>
+          </a:p>
+          <a:p>
+            <a:pPr lvl="3"/>
+            <a:r>
+              <a:rPr lang="en-US" smtClean="0"/>
+              <a:t>Fourth level</a:t>
+            </a:r>
+          </a:p>
+          <a:p>
+            <a:pPr lvl="4"/>
+            <a:r>
+              <a:rPr lang="en-US" smtClean="0"/>
+              <a:t>Fifth level</a:t>
+            </a:r>
+            <a:endParaRPr lang="en-US"/>
+          </a:p>
+        </p:txBody>
+      </p:sp>
+      <p:sp>
+        <p:nvSpPr>
+          <p:cNvPr id="5" name="Date Placeholder 4"/>
+          <p:cNvSpPr>
+            <a:spLocks noGrp="1"/>
+          </p:cNvSpPr>
+          <p:nvPr>
+            <p:ph type="dt" sz="half" idx="10"/>
+          </p:nvPr>
+        </p:nvSpPr>
+        <p:spPr/>
+        <p:txBody>
+          <a:bodyPr/>
+          <a:lstStyle/>
+          <a:p>
+            <a:fld id="{5BCAD085-E8A6-8845-BD4E-CB4CCA059FC4}" type="datetimeFigureOut">
+              <a:rPr lang="en-US" smtClean="0"/>
+              <a:t>1/27/13</a:t>
+            </a:fld>
+            <a:endParaRPr lang="en-US"/>
+          </a:p>
+        </p:txBody>
+      </p:sp>
+      <p:sp>
+        <p:nvSpPr>
+          <p:cNvPr id="6" name="Footer Placeholder 5"/>
+          <p:cNvSpPr>
+            <a:spLocks noGrp="1"/>
+          </p:cNvSpPr>
+          <p:nvPr>
+            <p:ph type="ftr" sz="quarter" idx="11"/>
+          </p:nvPr>
+        </p:nvSpPr>
+        <p:spPr/>
+        <p:txBody>
+          <a:bodyPr/>
+          <a:lstStyle/>
+          <a:p>
+            <a:endParaRPr lang="en-US"/>
+          </a:p>
+        </p:txBody>
+      </p:sp>
+      <p:sp>
+        <p:nvSpPr>
+          <p:cNvPr id="7" name="Slide Number Placeholder 6"/>
+          <p:cNvSpPr>
+            <a:spLocks noGrp="1"/>
+          </p:cNvSpPr>
+          <p:nvPr>
+            <p:ph type="sldNum" sz="quarter" idx="12"/>
+          </p:nvPr>
+        </p:nvSpPr>
+        <p:spPr/>
+        <p:txBody>
+          <a:bodyPr/>
+          <a:lstStyle/>
+          <a:p>
+            <a:fld id="{C1FF6DA9-008F-8B48-92A6-B652298478BF}" type="slidenum">
+              <a:rPr lang="en-US" smtClean="0"/>
+              <a:t>‹#›</a:t>
+            </a:fld>
+            <a:endParaRPr lang="en-US"/>
+          </a:p>
+        </p:txBody>
+      </p:sp>
+    </p:spTree>
+    <p:extLst>
+      <p:ext uri="{BB962C8B-B14F-4D97-AF65-F5344CB8AC3E}">
+        <p14:creationId xmlns:p14="http://schemas.microsoft.com/office/powerpoint/2010/main" val="2782244947"/>
+      </p:ext>
+    </p:extLst>
+  </p:cSld>
+  <p:clrMapOvr>
+    <a:masterClrMapping/>
+  </p:clrMapOvr>
+</p:sldLayout>
+</file>
+
+<file path=ppt/slideLayouts/slideLayout5.xml><?xml version="1.0" encoding="utf-8"?>
+<p:sldLayout xmlns:a="http://schemas.openxmlformats.org/drawingml/2006/main" xmlns:r="http://schemas.openxmlformats.org/officeDocument/2006/relationships" xmlns:p="http://schemas.openxmlformats.org/presentationml/2006/main" type="twoTxTwoObj" preserve="1">
+  <p:cSld name="Comparison">
+    <p:spTree>
+      <p:nvGrpSpPr>
+        <p:cNvPr id="1" name=""/>
+        <p:cNvGrpSpPr/>
+        <p:nvPr/>
+      </p:nvGrpSpPr>
+      <p:grpSpPr>
+        <a:xfrm>
+          <a:off x="0" y="0"/>
+          <a:ext cx="0" cy="0"/>
+          <a:chOff x="0" y="0"/>
+          <a:chExt cx="0" cy="0"/>
+        </a:xfrm>
+      </p:grpSpPr>
+      <p:sp>
+        <p:nvSpPr>
+          <p:cNvPr id="2" name="Title 1"/>
+          <p:cNvSpPr>
+            <a:spLocks noGrp="1"/>
+          </p:cNvSpPr>
+          <p:nvPr>
+            <p:ph type="title"/>
+          </p:nvPr>
+        </p:nvSpPr>
+        <p:spPr/>
+        <p:txBody>
+          <a:bodyPr/>
+          <a:lstStyle>
+            <a:lvl1pPr>
+              <a:defRPr/>
+            </a:lvl1pPr>
+          </a:lstStyle>
+          <a:p>
+            <a:r>
+              <a:rPr lang="en-US" smtClean="0"/>
+              <a:t>Click to edit Master title style</a:t>
+            </a:r>
+            <a:endParaRPr lang="en-US"/>
+          </a:p>
+        </p:txBody>
+      </p:sp>
+      <p:sp>
+        <p:nvSpPr>
+          <p:cNvPr id="3" name="Text Placeholder 2"/>
+          <p:cNvSpPr>
+            <a:spLocks noGrp="1"/>
+          </p:cNvSpPr>
+          <p:nvPr>
+            <p:ph type="body" idx="1"/>
+          </p:nvPr>
+        </p:nvSpPr>
+        <p:spPr>
+          <a:xfrm>
+            <a:off x="457200" y="1535113"/>
+            <a:ext cx="4040188" cy="639762"/>
+          </a:xfrm>
+        </p:spPr>
+        <p:txBody>
+          <a:bodyPr anchor="b"/>
+          <a:lstStyle>
+            <a:lvl1pPr marL="0" indent="0">
+              <a:buNone/>
+              <a:defRPr sz="2400" b="1"/>
+            </a:lvl1pPr>
+            <a:lvl2pPr marL="457200" indent="0">
+              <a:buNone/>
+              <a:defRPr sz="2000" b="1"/>
+            </a:lvl2pPr>
+            <a:lvl3pPr marL="914400" indent="0">
+              <a:buNone/>
+              <a:defRPr sz="1800" b="1"/>
+            </a:lvl3pPr>
+            <a:lvl4pPr marL="1371600" indent="0">
+              <a:buNone/>
+              <a:defRPr sz="1600" b="1"/>
+            </a:lvl4pPr>
+            <a:lvl5pPr marL="1828800" indent="0">
+              <a:buNone/>
+              <a:defRPr sz="1600" b="1"/>
+            </a:lvl5pPr>
+            <a:lvl6pPr marL="2286000" indent="0">
+              <a:buNone/>
+              <a:defRPr sz="1600" b="1"/>
+            </a:lvl6pPr>
+            <a:lvl7pPr marL="2743200" indent="0">
+              <a:buNone/>
+              <a:defRPr sz="1600" b="1"/>
+            </a:lvl7pPr>
+            <a:lvl8pPr marL="3200400" indent="0">
+              <a:buNone/>
+              <a:defRPr sz="1600" b="1"/>
+            </a:lvl8pPr>
+            <a:lvl9pPr marL="3657600" indent="0">
+              <a:buNone/>
+              <a:defRPr sz="1600" b="1"/>
+            </a:lvl9pPr>
+          </a:lstStyle>
+          <a:p>
+            <a:pPr lvl="0"/>
+            <a:r>
+              <a:rPr lang="en-US" smtClean="0"/>
+              <a:t>Click to edit Master text styles</a:t>
+            </a:r>
+          </a:p>
+        </p:txBody>
+      </p:sp>
+      <p:sp>
+        <p:nvSpPr>
+          <p:cNvPr id="4" name="Content Placeholder 3"/>
+          <p:cNvSpPr>
+            <a:spLocks noGrp="1"/>
+          </p:cNvSpPr>
+          <p:nvPr>
+            <p:ph sz="half" idx="2"/>
+          </p:nvPr>
+        </p:nvSpPr>
+        <p:spPr>
+          <a:xfrm>
+            <a:off x="457200" y="2174875"/>
+            <a:ext cx="4040188" cy="3951288"/>
+          </a:xfrm>
+        </p:spPr>
+        <p:txBody>
+          <a:bodyPr/>
+          <a:lstStyle>
+            <a:lvl1pPr>
+              <a:defRPr sz="2400"/>
+            </a:lvl1pPr>
+            <a:lvl2pPr>
+              <a:defRPr sz="2000"/>
+            </a:lvl2pPr>
+            <a:lvl3pPr>
+              <a:defRPr sz="1800"/>
+            </a:lvl3pPr>
+            <a:lvl4pPr>
+              <a:defRPr sz="1600"/>
+            </a:lvl4pPr>
+            <a:lvl5pPr>
+              <a:defRPr sz="1600"/>
+            </a:lvl5pPr>
+            <a:lvl6pPr>
+              <a:defRPr sz="1600"/>
+            </a:lvl6pPr>
+            <a:lvl7pPr>
+              <a:defRPr sz="1600"/>
+            </a:lvl7pPr>
+            <a:lvl8pPr>
+              <a:defRPr sz="1600"/>
+            </a:lvl8pPr>
+            <a:lvl9pPr>
+              <a:defRPr sz="1600"/>
+            </a:lvl9pPr>
+          </a:lstStyle>
+          <a:p>
+            <a:pPr lvl="0"/>
+            <a:r>
+              <a:rPr lang="en-US" smtClean="0"/>
+              <a:t>Click to edit Master text styles</a:t>
+            </a:r>
+          </a:p>
+          <a:p>
+            <a:pPr lvl="1"/>
+            <a:r>
+              <a:rPr lang="en-US" smtClean="0"/>
+              <a:t>Second level</a:t>
+            </a:r>
+          </a:p>
+          <a:p>
+            <a:pPr lvl="2"/>
+            <a:r>
+              <a:rPr lang="en-US" smtClean="0"/>
+              <a:t>Third level</a:t>
+            </a:r>
+          </a:p>
+          <a:p>
+            <a:pPr lvl="3"/>
+            <a:r>
+              <a:rPr lang="en-US" smtClean="0"/>
+              <a:t>Fourth level</a:t>
+            </a:r>
+          </a:p>
+          <a:p>
+            <a:pPr lvl="4"/>
+            <a:r>
+              <a:rPr lang="en-US" smtClean="0"/>
+              <a:t>Fifth level</a:t>
+            </a:r>
+            <a:endParaRPr lang="en-US"/>
+          </a:p>
+        </p:txBody>
+      </p:sp>
+      <p:sp>
+        <p:nvSpPr>
+          <p:cNvPr id="5" name="Text Placeholder 4"/>
+          <p:cNvSpPr>
+            <a:spLocks noGrp="1"/>
+          </p:cNvSpPr>
+          <p:nvPr>
+            <p:ph type="body" sz="quarter" idx="3"/>
+          </p:nvPr>
+        </p:nvSpPr>
+        <p:spPr>
+          <a:xfrm>
+            <a:off x="4645025" y="1535113"/>
+            <a:ext cx="4041775" cy="639762"/>
+          </a:xfrm>
+        </p:spPr>
+        <p:txBody>
+          <a:bodyPr anchor="b"/>
+          <a:lstStyle>
+            <a:lvl1pPr marL="0" indent="0">
+              <a:buNone/>
+              <a:defRPr sz="2400" b="1"/>
+            </a:lvl1pPr>
+            <a:lvl2pPr marL="457200" indent="0">
+              <a:buNone/>
+              <a:defRPr sz="2000" b="1"/>
+            </a:lvl2pPr>
+            <a:lvl3pPr marL="914400" indent="0">
+              <a:buNone/>
+              <a:defRPr sz="1800" b="1"/>
+            </a:lvl3pPr>
+            <a:lvl4pPr marL="1371600" indent="0">
+              <a:buNone/>
+              <a:defRPr sz="1600" b="1"/>
+            </a:lvl4pPr>
+            <a:lvl5pPr marL="1828800" indent="0">
+              <a:buNone/>
+              <a:defRPr sz="1600" b="1"/>
+            </a:lvl5pPr>
+            <a:lvl6pPr marL="2286000" indent="0">
+              <a:buNone/>
+              <a:defRPr sz="1600" b="1"/>
+            </a:lvl6pPr>
+            <a:lvl7pPr marL="2743200" indent="0">
+              <a:buNone/>
+              <a:defRPr sz="1600" b="1"/>
+            </a:lvl7pPr>
+            <a:lvl8pPr marL="3200400" indent="0">
+              <a:buNone/>
+              <a:defRPr sz="1600" b="1"/>
+            </a:lvl8pPr>
+            <a:lvl9pPr marL="3657600" indent="0">
+              <a:buNone/>
+              <a:defRPr sz="1600" b="1"/>
+            </a:lvl9pPr>
+          </a:lstStyle>
+          <a:p>
+            <a:pPr lvl="0"/>
+            <a:r>
+              <a:rPr lang="en-US" smtClean="0"/>
+              <a:t>Click to edit Master text styles</a:t>
+            </a:r>
+          </a:p>
+        </p:txBody>
+      </p:sp>
+      <p:sp>
+        <p:nvSpPr>
+          <p:cNvPr id="6" name="Content Placeholder 5"/>
+          <p:cNvSpPr>
+            <a:spLocks noGrp="1"/>
+          </p:cNvSpPr>
+          <p:nvPr>
+            <p:ph sz="quarter" idx="4"/>
+          </p:nvPr>
+        </p:nvSpPr>
+        <p:spPr>
+          <a:xfrm>
+            <a:off x="4645025" y="2174875"/>
+            <a:ext cx="4041775" cy="3951288"/>
+          </a:xfrm>
+        </p:spPr>
+        <p:txBody>
+          <a:bodyPr/>
+          <a:lstStyle>
+            <a:lvl1pPr>
+              <a:defRPr sz="2400"/>
+            </a:lvl1pPr>
+            <a:lvl2pPr>
+              <a:defRPr sz="2000"/>
+            </a:lvl2pPr>
+            <a:lvl3pPr>
+              <a:defRPr sz="1800"/>
+            </a:lvl3pPr>
+            <a:lvl4pPr>
+              <a:defRPr sz="1600"/>
+            </a:lvl4pPr>
+            <a:lvl5pPr>
+              <a:defRPr sz="1600"/>
+            </a:lvl5pPr>
+            <a:lvl6pPr>
+              <a:defRPr sz="1600"/>
+            </a:lvl6pPr>
+            <a:lvl7pPr>
+              <a:defRPr sz="1600"/>
+            </a:lvl7pPr>
+            <a:lvl8pPr>
+              <a:defRPr sz="1600"/>
+            </a:lvl8pPr>
+            <a:lvl9pPr>
+              <a:defRPr sz="1600"/>
+            </a:lvl9pPr>
+          </a:lstStyle>
+          <a:p>
+            <a:pPr lvl="0"/>
+            <a:r>
+              <a:rPr lang="en-US" smtClean="0"/>
+              <a:t>Click to edit Master text styles</a:t>
+            </a:r>
+          </a:p>
+          <a:p>
+            <a:pPr lvl="1"/>
+            <a:r>
+              <a:rPr lang="en-US" smtClean="0"/>
+              <a:t>Second level</a:t>
+            </a:r>
+          </a:p>
+          <a:p>
+            <a:pPr lvl="2"/>
+            <a:r>
+              <a:rPr lang="en-US" smtClean="0"/>
+              <a:t>Third level</a:t>
+            </a:r>
+          </a:p>
+          <a:p>
+            <a:pPr lvl="3"/>
+            <a:r>
+              <a:rPr lang="en-US" smtClean="0"/>
+              <a:t>Fourth level</a:t>
+            </a:r>
+          </a:p>
+          <a:p>
+            <a:pPr lvl="4"/>
+            <a:r>
+              <a:rPr lang="en-US" smtClean="0"/>
+              <a:t>Fifth level</a:t>
+            </a:r>
+            <a:endParaRPr lang="en-US"/>
+          </a:p>
+        </p:txBody>
+      </p:sp>
+      <p:sp>
+        <p:nvSpPr>
+          <p:cNvPr id="7" name="Date Placeholder 6"/>
+          <p:cNvSpPr>
+            <a:spLocks noGrp="1"/>
+          </p:cNvSpPr>
+          <p:nvPr>
+            <p:ph type="dt" sz="half" idx="10"/>
+          </p:nvPr>
+        </p:nvSpPr>
+        <p:spPr/>
+        <p:txBody>
+          <a:bodyPr/>
+          <a:lstStyle/>
+          <a:p>
+            <a:fld id="{5BCAD085-E8A6-8845-BD4E-CB4CCA059FC4}" type="datetimeFigureOut">
+              <a:rPr lang="en-US" smtClean="0"/>
+              <a:t>1/27/13</a:t>
+            </a:fld>
+            <a:endParaRPr lang="en-US"/>
+          </a:p>
+        </p:txBody>
+      </p:sp>
+      <p:sp>
+        <p:nvSpPr>
+          <p:cNvPr id="8" name="Footer Placeholder 7"/>
+          <p:cNvSpPr>
+            <a:spLocks noGrp="1"/>
+          </p:cNvSpPr>
+          <p:nvPr>
+            <p:ph type="ftr" sz="quarter" idx="11"/>
+          </p:nvPr>
+        </p:nvSpPr>
+        <p:spPr/>
+        <p:txBody>
+          <a:bodyPr/>
+          <a:lstStyle/>
+          <a:p>
+            <a:endParaRPr lang="en-US"/>
+          </a:p>
+        </p:txBody>
+      </p:sp>
+      <p:sp>
+        <p:nvSpPr>
+          <p:cNvPr id="9" name="Slide Number Placeholder 8"/>
+          <p:cNvSpPr>
+            <a:spLocks noGrp="1"/>
+          </p:cNvSpPr>
+          <p:nvPr>
+            <p:ph type="sldNum" sz="quarter" idx="12"/>
+          </p:nvPr>
+        </p:nvSpPr>
+        <p:spPr/>
+        <p:txBody>
+          <a:bodyPr/>
+          <a:lstStyle/>
+          <a:p>
+            <a:fld id="{C1FF6DA9-008F-8B48-92A6-B652298478BF}" type="slidenum">
+              <a:rPr lang="en-US" smtClean="0"/>
+              <a:t>‹#›</a:t>
+            </a:fld>
+            <a:endParaRPr lang="en-US"/>
+          </a:p>
+        </p:txBody>
+      </p:sp>
+    </p:spTree>
+    <p:extLst>
+      <p:ext uri="{BB962C8B-B14F-4D97-AF65-F5344CB8AC3E}">
+        <p14:creationId xmlns:p14="http://schemas.microsoft.com/office/powerpoint/2010/main" val="990158736"/>
+      </p:ext>
+    </p:extLst>
+  </p:cSld>
+  <p:clrMapOvr>
+    <a:masterClrMapping/>
+  </p:clrMapOvr>
+</p:sldLayout>
+</file>
+
+<file path=ppt/slideLayouts/slideLayout6.xml><?xml version="1.0" encoding="utf-8"?>
+<p:sldLayout xmlns:a="http://schemas.openxmlformats.org/drawingml/2006/main" xmlns:r="http://schemas.openxmlformats.org/officeDocument/2006/relationships" xmlns:p="http://schemas.openxmlformats.org/presentationml/2006/main" type="titleOnly" preserve="1">
+  <p:cSld name="Title Only">
+    <p:spTree>
+      <p:nvGrpSpPr>
+        <p:cNvPr id="1" name=""/>
+        <p:cNvGrpSpPr/>
+        <p:nvPr/>
+      </p:nvGrpSpPr>
+      <p:grpSpPr>
+        <a:xfrm>
+          <a:off x="0" y="0"/>
+          <a:ext cx="0" cy="0"/>
+          <a:chOff x="0" y="0"/>
+          <a:chExt cx="0" cy="0"/>
+        </a:xfrm>
+      </p:grpSpPr>
+      <p:sp>
+        <p:nvSpPr>
+          <p:cNvPr id="2" name="Title 1"/>
+          <p:cNvSpPr>
+            <a:spLocks noGrp="1"/>
+          </p:cNvSpPr>
+          <p:nvPr>
+            <p:ph type="title"/>
+          </p:nvPr>
+        </p:nvSpPr>
+        <p:spPr/>
+        <p:txBody>
+          <a:bodyPr/>
+          <a:lstStyle/>
+          <a:p>
+            <a:r>
+              <a:rPr lang="en-US" smtClean="0"/>
+              <a:t>Click to edit Master title style</a:t>
+            </a:r>
+            <a:endParaRPr lang="en-US"/>
+          </a:p>
+        </p:txBody>
+      </p:sp>
+      <p:sp>
+        <p:nvSpPr>
+          <p:cNvPr id="3" name="Date Placeholder 2"/>
+          <p:cNvSpPr>
+            <a:spLocks noGrp="1"/>
+          </p:cNvSpPr>
+          <p:nvPr>
+            <p:ph type="dt" sz="half" idx="10"/>
+          </p:nvPr>
+        </p:nvSpPr>
+        <p:spPr/>
+        <p:txBody>
+          <a:bodyPr/>
+          <a:lstStyle/>
+          <a:p>
+            <a:fld id="{5BCAD085-E8A6-8845-BD4E-CB4CCA059FC4}" type="datetimeFigureOut">
+              <a:rPr lang="en-US" smtClean="0"/>
+              <a:t>1/27/13</a:t>
+            </a:fld>
+            <a:endParaRPr lang="en-US"/>
+          </a:p>
+        </p:txBody>
+      </p:sp>
+      <p:sp>
+        <p:nvSpPr>
+          <p:cNvPr id="4" name="Footer Placeholder 3"/>
+          <p:cNvSpPr>
+            <a:spLocks noGrp="1"/>
+          </p:cNvSpPr>
+          <p:nvPr>
+            <p:ph type="ftr" sz="quarter" idx="11"/>
+          </p:nvPr>
+        </p:nvSpPr>
+        <p:spPr/>
+        <p:txBody>
+          <a:bodyPr/>
+          <a:lstStyle/>
+          <a:p>
+            <a:endParaRPr lang="en-US"/>
+          </a:p>
+        </p:txBody>
+      </p:sp>
+      <p:sp>
+        <p:nvSpPr>
+          <p:cNvPr id="5" name="Slide Number Placeholder 4"/>
+          <p:cNvSpPr>
+            <a:spLocks noGrp="1"/>
+          </p:cNvSpPr>
+          <p:nvPr>
+            <p:ph type="sldNum" sz="quarter" idx="12"/>
+          </p:nvPr>
+        </p:nvSpPr>
+        <p:spPr/>
+        <p:txBody>
+          <a:bodyPr/>
+          <a:lstStyle/>
+          <a:p>
+            <a:fld id="{C1FF6DA9-008F-8B48-92A6-B652298478BF}" type="slidenum">
+              <a:rPr lang="en-US" smtClean="0"/>
+              <a:t>‹#›</a:t>
+            </a:fld>
+            <a:endParaRPr lang="en-US"/>
+          </a:p>
+        </p:txBody>
+      </p:sp>
+    </p:spTree>
+    <p:extLst>
+      <p:ext uri="{BB962C8B-B14F-4D97-AF65-F5344CB8AC3E}">
+        <p14:creationId xmlns:p14="http://schemas.microsoft.com/office/powerpoint/2010/main" val="727027711"/>
+      </p:ext>
+    </p:extLst>
+  </p:cSld>
+  <p:clrMapOvr>
+    <a:masterClrMapping/>
+  </p:clrMapOvr>
+</p:sldLayout>
+</file>
+
+<file path=ppt/slideLayouts/slideLayout7.xml><?xml version="1.0" encoding="utf-8"?>
+<p:sldLayout xmlns:a="http://schemas.openxmlformats.org/drawingml/2006/main" xmlns:r="http://schemas.openxmlformats.org/officeDocument/2006/relationships" xmlns:p="http://schemas.openxmlformats.org/presentationml/2006/main" type="blank" preserve="1">
+  <p:cSld name="Blank">
+    <p:spTree>
+      <p:nvGrpSpPr>
+        <p:cNvPr id="1" name=""/>
+        <p:cNvGrpSpPr/>
+        <p:nvPr/>
+      </p:nvGrpSpPr>
+      <p:grpSpPr>
+        <a:xfrm>
+          <a:off x="0" y="0"/>
+          <a:ext cx="0" cy="0"/>
+          <a:chOff x="0" y="0"/>
+          <a:chExt cx="0" cy="0"/>
+        </a:xfrm>
+      </p:grpSpPr>
+      <p:sp>
+        <p:nvSpPr>
+          <p:cNvPr id="2" name="Date Placeholder 1"/>
+          <p:cNvSpPr>
+            <a:spLocks noGrp="1"/>
+          </p:cNvSpPr>
+          <p:nvPr>
+            <p:ph type="dt" sz="half" idx="10"/>
+          </p:nvPr>
+        </p:nvSpPr>
+        <p:spPr/>
+        <p:txBody>
+          <a:bodyPr/>
+          <a:lstStyle/>
+          <a:p>
+            <a:fld id="{5BCAD085-E8A6-8845-BD4E-CB4CCA059FC4}" type="datetimeFigureOut">
+              <a:rPr lang="en-US" smtClean="0"/>
+              <a:t>1/27/13</a:t>
+            </a:fld>
+            <a:endParaRPr lang="en-US"/>
+          </a:p>
+        </p:txBody>
+      </p:sp>
+      <p:sp>
+        <p:nvSpPr>
+          <p:cNvPr id="3" name="Footer Placeholder 2"/>
+          <p:cNvSpPr>
+            <a:spLocks noGrp="1"/>
+          </p:cNvSpPr>
+          <p:nvPr>
+            <p:ph type="ftr" sz="quarter" idx="11"/>
+          </p:nvPr>
+        </p:nvSpPr>
+        <p:spPr/>
+        <p:txBody>
+          <a:bodyPr/>
+          <a:lstStyle/>
+          <a:p>
+            <a:endParaRPr lang="en-US"/>
+          </a:p>
+        </p:txBody>
+      </p:sp>
+      <p:sp>
+        <p:nvSpPr>
+          <p:cNvPr id="4" name="Slide Number Placeholder 3"/>
+          <p:cNvSpPr>
+            <a:spLocks noGrp="1"/>
+          </p:cNvSpPr>
+          <p:nvPr>
+            <p:ph type="sldNum" sz="quarter" idx="12"/>
+          </p:nvPr>
+        </p:nvSpPr>
+        <p:spPr/>
+        <p:txBody>
+          <a:bodyPr/>
+          <a:lstStyle/>
+          <a:p>
+            <a:fld id="{C1FF6DA9-008F-8B48-92A6-B652298478BF}" type="slidenum">
+              <a:rPr lang="en-US" smtClean="0"/>
+              <a:t>‹#›</a:t>
+            </a:fld>
+            <a:endParaRPr lang="en-US"/>
+          </a:p>
+        </p:txBody>
+      </p:sp>
+    </p:spTree>
+    <p:extLst>
+      <p:ext uri="{BB962C8B-B14F-4D97-AF65-F5344CB8AC3E}">
+        <p14:creationId xmlns:p14="http://schemas.microsoft.com/office/powerpoint/2010/main" val="1212999818"/>
+      </p:ext>
+    </p:extLst>
+  </p:cSld>
+  <p:clrMapOvr>
+    <a:masterClrMapping/>
+  </p:clrMapOvr>
+</p:sldLayout>
+</file>
+
+<file path=ppt/slideLayouts/slideLayout8.xml><?xml version="1.0" encoding="utf-8"?>
+<p:sldLayout xmlns:a="http://schemas.openxmlformats.org/drawingml/2006/main" xmlns:r="http://schemas.openxmlformats.org/officeDocument/2006/relationships" xmlns:p="http://schemas.openxmlformats.org/presentationml/2006/main" type="objTx" preserve="1">
+  <p:cSld name="Content with Caption">
+    <p:spTree>
+      <p:nvGrpSpPr>
+        <p:cNvPr id="1" name=""/>
+        <p:cNvGrpSpPr/>
+        <p:nvPr/>
+      </p:nvGrpSpPr>
+      <p:grpSpPr>
+        <a:xfrm>
+          <a:off x="0" y="0"/>
+          <a:ext cx="0" cy="0"/>
+          <a:chOff x="0" y="0"/>
+          <a:chExt cx="0" cy="0"/>
+        </a:xfrm>
+      </p:grpSpPr>
+      <p:sp>
+        <p:nvSpPr>
+          <p:cNvPr id="2" name="Title 1"/>
+          <p:cNvSpPr>
+            <a:spLocks noGrp="1"/>
+          </p:cNvSpPr>
+          <p:nvPr>
+            <p:ph type="title"/>
+          </p:nvPr>
+        </p:nvSpPr>
+        <p:spPr>
+          <a:xfrm>
+            <a:off x="457200" y="273050"/>
+            <a:ext cx="3008313" cy="1162050"/>
+          </a:xfrm>
+        </p:spPr>
+        <p:txBody>
+          <a:bodyPr anchor="b"/>
+          <a:lstStyle>
+            <a:lvl1pPr algn="l">
+              <a:defRPr sz="2000" b="1"/>
+            </a:lvl1pPr>
+          </a:lstStyle>
+          <a:p>
+            <a:r>
+              <a:rPr lang="en-US" smtClean="0"/>
+              <a:t>Click to edit Master title style</a:t>
+            </a:r>
+            <a:endParaRPr lang="en-US"/>
+          </a:p>
+        </p:txBody>
+      </p:sp>
+      <p:sp>
+        <p:nvSpPr>
+          <p:cNvPr id="3" name="Content Placeholder 2"/>
+          <p:cNvSpPr>
+            <a:spLocks noGrp="1"/>
+          </p:cNvSpPr>
+          <p:nvPr>
+            <p:ph idx="1"/>
+          </p:nvPr>
+        </p:nvSpPr>
+        <p:spPr>
+          <a:xfrm>
+            <a:off x="3575050" y="273050"/>
+            <a:ext cx="5111750" cy="5853113"/>
+          </a:xfrm>
+        </p:spPr>
+        <p:txBody>
+          <a:bodyPr/>
+          <a:lstStyle>
+            <a:lvl1pPr>
+              <a:defRPr sz="3200"/>
+            </a:lvl1pPr>
+            <a:lvl2pPr>
+              <a:defRPr sz="2800"/>
+            </a:lvl2pPr>
+            <a:lvl3pPr>
+              <a:defRPr sz="2400"/>
+            </a:lvl3pPr>
+            <a:lvl4pPr>
+              <a:defRPr sz="2000"/>
+            </a:lvl4pPr>
+            <a:lvl5pPr>
+              <a:defRPr sz="2000"/>
+            </a:lvl5pPr>
+            <a:lvl6pPr>
+              <a:defRPr sz="2000"/>
+            </a:lvl6pPr>
+            <a:lvl7pPr>
+              <a:defRPr sz="2000"/>
+            </a:lvl7pPr>
+            <a:lvl8pPr>
+              <a:defRPr sz="2000"/>
+            </a:lvl8pPr>
+            <a:lvl9pPr>
+              <a:defRPr sz="2000"/>
+            </a:lvl9pPr>
+          </a:lstStyle>
+          <a:p>
+            <a:pPr lvl="0"/>
+            <a:r>
+              <a:rPr lang="en-US" smtClean="0"/>
+              <a:t>Click to edit Master text styles</a:t>
+            </a:r>
+          </a:p>
+          <a:p>
+            <a:pPr lvl="1"/>
+            <a:r>
+              <a:rPr lang="en-US" smtClean="0"/>
+              <a:t>Second level</a:t>
+            </a:r>
+          </a:p>
+          <a:p>
+            <a:pPr lvl="2"/>
+            <a:r>
+              <a:rPr lang="en-US" smtClean="0"/>
+              <a:t>Third level</a:t>
+            </a:r>
+          </a:p>
+          <a:p>
+            <a:pPr lvl="3"/>
+            <a:r>
+              <a:rPr lang="en-US" smtClean="0"/>
+              <a:t>Fourth level</a:t>
+            </a:r>
+          </a:p>
+          <a:p>
+            <a:pPr lvl="4"/>
+            <a:r>
+              <a:rPr lang="en-US" smtClean="0"/>
+              <a:t>Fifth level</a:t>
+            </a:r>
+            <a:endParaRPr lang="en-US"/>
+          </a:p>
+        </p:txBody>
+      </p:sp>
+      <p:sp>
+        <p:nvSpPr>
+          <p:cNvPr id="4" name="Text Placeholder 3"/>
+          <p:cNvSpPr>
+            <a:spLocks noGrp="1"/>
+          </p:cNvSpPr>
+          <p:nvPr>
+            <p:ph type="body" sz="half" idx="2"/>
+          </p:nvPr>
+        </p:nvSpPr>
+        <p:spPr>
+          <a:xfrm>
+            <a:off x="457200" y="1435100"/>
+            <a:ext cx="3008313" cy="4691063"/>
+          </a:xfrm>
+        </p:spPr>
+        <p:txBody>
+          <a:bodyPr/>
+          <a:lstStyle>
+            <a:lvl1pPr marL="0" indent="0">
+              <a:buNone/>
+              <a:defRPr sz="1400"/>
+            </a:lvl1pPr>
+            <a:lvl2pPr marL="457200" indent="0">
+              <a:buNone/>
+              <a:defRPr sz="1200"/>
+            </a:lvl2pPr>
+            <a:lvl3pPr marL="914400" indent="0">
+              <a:buNone/>
+              <a:defRPr sz="1000"/>
+            </a:lvl3pPr>
+            <a:lvl4pPr marL="1371600" indent="0">
+              <a:buNone/>
+              <a:defRPr sz="900"/>
+            </a:lvl4pPr>
+            <a:lvl5pPr marL="1828800" indent="0">
+              <a:buNone/>
+              <a:defRPr sz="900"/>
+            </a:lvl5pPr>
+            <a:lvl6pPr marL="2286000" indent="0">
+              <a:buNone/>
+              <a:defRPr sz="900"/>
+            </a:lvl6pPr>
+            <a:lvl7pPr marL="2743200" indent="0">
+              <a:buNone/>
+              <a:defRPr sz="900"/>
+            </a:lvl7pPr>
+            <a:lvl8pPr marL="3200400" indent="0">
+              <a:buNone/>
+              <a:defRPr sz="900"/>
+            </a:lvl8pPr>
+            <a:lvl9pPr marL="3657600" indent="0">
+              <a:buNone/>
+              <a:defRPr sz="900"/>
+            </a:lvl9pPr>
+          </a:lstStyle>
+          <a:p>
+            <a:pPr lvl="0"/>
+            <a:r>
+              <a:rPr lang="en-US" smtClean="0"/>
+              <a:t>Click to edit Master text styles</a:t>
+            </a:r>
+          </a:p>
+        </p:txBody>
+      </p:sp>
+      <p:sp>
+        <p:nvSpPr>
+          <p:cNvPr id="5" name="Date Placeholder 4"/>
+          <p:cNvSpPr>
+            <a:spLocks noGrp="1"/>
+          </p:cNvSpPr>
+          <p:nvPr>
+            <p:ph type="dt" sz="half" idx="10"/>
+          </p:nvPr>
+        </p:nvSpPr>
+        <p:spPr/>
+        <p:txBody>
+          <a:bodyPr/>
+          <a:lstStyle/>
+          <a:p>
+            <a:fld id="{5BCAD085-E8A6-8845-BD4E-CB4CCA059FC4}" type="datetimeFigureOut">
+              <a:rPr lang="en-US" smtClean="0"/>
+              <a:t>1/27/13</a:t>
+            </a:fld>
+            <a:endParaRPr lang="en-US"/>
+          </a:p>
+        </p:txBody>
+      </p:sp>
+      <p:sp>
+        <p:nvSpPr>
+          <p:cNvPr id="6" name="Footer Placeholder 5"/>
+          <p:cNvSpPr>
+            <a:spLocks noGrp="1"/>
+          </p:cNvSpPr>
+          <p:nvPr>
+            <p:ph type="ftr" sz="quarter" idx="11"/>
+          </p:nvPr>
+        </p:nvSpPr>
+        <p:spPr/>
+        <p:txBody>
+          <a:bodyPr/>
+          <a:lstStyle/>
+          <a:p>
+            <a:endParaRPr lang="en-US"/>
+          </a:p>
+        </p:txBody>
+      </p:sp>
+      <p:sp>
+        <p:nvSpPr>
+          <p:cNvPr id="7" name="Slide Number Placeholder 6"/>
+          <p:cNvSpPr>
+            <a:spLocks noGrp="1"/>
+          </p:cNvSpPr>
+          <p:nvPr>
+            <p:ph type="sldNum" sz="quarter" idx="12"/>
+          </p:nvPr>
+        </p:nvSpPr>
+        <p:spPr/>
+        <p:txBody>
+          <a:bodyPr/>
+          <a:lstStyle/>
+          <a:p>
+            <a:fld id="{C1FF6DA9-008F-8B48-92A6-B652298478BF}" type="slidenum">
+              <a:rPr lang="en-US" smtClean="0"/>
+              <a:t>‹#›</a:t>
+            </a:fld>
+            <a:endParaRPr lang="en-US"/>
+          </a:p>
+        </p:txBody>
+      </p:sp>
+    </p:spTree>
+    <p:extLst>
+      <p:ext uri="{BB962C8B-B14F-4D97-AF65-F5344CB8AC3E}">
+        <p14:creationId xmlns:p14="http://schemas.microsoft.com/office/powerpoint/2010/main" val="1840726560"/>
+      </p:ext>
+    </p:extLst>
+  </p:cSld>
+  <p:clrMapOvr>
+    <a:masterClrMapping/>
+  </p:clrMapOvr>
+</p:sldLayout>
+</file>
+
+<file path=ppt/slideLayouts/slideLayout9.xml><?xml version="1.0" encoding="utf-8"?>
+<p:sldLayout xmlns:a="http://schemas.openxmlformats.org/drawingml/2006/main" xmlns:r="http://schemas.openxmlformats.org/officeDocument/2006/relationships" xmlns:p="http://schemas.openxmlformats.org/presentationml/2006/main" type="picTx" preserve="1">
+  <p:cSld name="Picture with Caption">
+    <p:spTree>
+      <p:nvGrpSpPr>
+        <p:cNvPr id="1" name=""/>
+        <p:cNvGrpSpPr/>
+        <p:nvPr/>
+      </p:nvGrpSpPr>
+      <p:grpSpPr>
+        <a:xfrm>
+          <a:off x="0" y="0"/>
+          <a:ext cx="0" cy="0"/>
+          <a:chOff x="0" y="0"/>
+          <a:chExt cx="0" cy="0"/>
+        </a:xfrm>
+      </p:grpSpPr>
+      <p:sp>
+        <p:nvSpPr>
+          <p:cNvPr id="2" name="Title 1"/>
+          <p:cNvSpPr>
+            <a:spLocks noGrp="1"/>
+          </p:cNvSpPr>
+          <p:nvPr>
+            <p:ph type="title"/>
+          </p:nvPr>
+        </p:nvSpPr>
+        <p:spPr>
+          <a:xfrm>
+            <a:off x="1792288" y="4800600"/>
+            <a:ext cx="5486400" cy="566738"/>
+          </a:xfrm>
+        </p:spPr>
+        <p:txBody>
+          <a:bodyPr anchor="b"/>
+          <a:lstStyle>
+            <a:lvl1pPr algn="l">
+              <a:defRPr sz="2000" b="1"/>
+            </a:lvl1pPr>
+          </a:lstStyle>
+          <a:p>
+            <a:r>
+              <a:rPr lang="en-US" smtClean="0"/>
+              <a:t>Click to edit Master title style</a:t>
+            </a:r>
+            <a:endParaRPr lang="en-US"/>
+          </a:p>
+        </p:txBody>
+      </p:sp>
+      <p:sp>
+        <p:nvSpPr>
+          <p:cNvPr id="3" name="Picture Placeholder 2"/>
+          <p:cNvSpPr>
+            <a:spLocks noGrp="1"/>
+          </p:cNvSpPr>
+          <p:nvPr>
+            <p:ph type="pic" idx="1"/>
+          </p:nvPr>
+        </p:nvSpPr>
+        <p:spPr>
+          <a:xfrm>
+            <a:off x="1792288" y="612775"/>
+            <a:ext cx="5486400" cy="4114800"/>
+          </a:xfrm>
+        </p:spPr>
+        <p:txBody>
+          <a:bodyPr/>
+          <a:lstStyle>
+            <a:lvl1pPr marL="0" indent="0">
+              <a:buNone/>
+              <a:defRPr sz="3200"/>
+            </a:lvl1pPr>
+            <a:lvl2pPr marL="457200" indent="0">
+              <a:buNone/>
+              <a:defRPr sz="2800"/>
+            </a:lvl2pPr>
+            <a:lvl3pPr marL="914400" indent="0">
+              <a:buNone/>
+              <a:defRPr sz="2400"/>
+            </a:lvl3pPr>
+            <a:lvl4pPr marL="1371600" indent="0">
+              <a:buNone/>
+              <a:defRPr sz="2000"/>
+            </a:lvl4pPr>
+            <a:lvl5pPr marL="1828800" indent="0">
+              <a:buNone/>
+              <a:defRPr sz="2000"/>
+            </a:lvl5pPr>
+            <a:lvl6pPr marL="2286000" indent="0">
+              <a:buNone/>
+              <a:defRPr sz="2000"/>
+            </a:lvl6pPr>
+            <a:lvl7pPr marL="2743200" indent="0">
+              <a:buNone/>
+              <a:defRPr sz="2000"/>
+            </a:lvl7pPr>
+            <a:lvl8pPr marL="3200400" indent="0">
+              <a:buNone/>
+              <a:defRPr sz="2000"/>
+            </a:lvl8pPr>
+            <a:lvl9pPr marL="3657600" indent="0">
+              <a:buNone/>
+              <a:defRPr sz="2000"/>
+            </a:lvl9pPr>
+          </a:lstStyle>
+          <a:p>
+            <a:endParaRPr lang="en-US"/>
+          </a:p>
+        </p:txBody>
+      </p:sp>
+      <p:sp>
+        <p:nvSpPr>
+          <p:cNvPr id="4" name="Text Placeholder 3"/>
+          <p:cNvSpPr>
+            <a:spLocks noGrp="1"/>
+          </p:cNvSpPr>
+          <p:nvPr>
+            <p:ph type="body" sz="half" idx="2"/>
+          </p:nvPr>
+        </p:nvSpPr>
+        <p:spPr>
+          <a:xfrm>
+            <a:off x="1792288" y="5367338"/>
+            <a:ext cx="5486400" cy="804862"/>
+          </a:xfrm>
+        </p:spPr>
+        <p:txBody>
+          <a:bodyPr/>
+          <a:lstStyle>
+            <a:lvl1pPr marL="0" indent="0">
+              <a:buNone/>
+              <a:defRPr sz="1400"/>
+            </a:lvl1pPr>
+            <a:lvl2pPr marL="457200" indent="0">
+              <a:buNone/>
+              <a:defRPr sz="1200"/>
+            </a:lvl2pPr>
+            <a:lvl3pPr marL="914400" indent="0">
+              <a:buNone/>
+              <a:defRPr sz="1000"/>
+            </a:lvl3pPr>
+            <a:lvl4pPr marL="1371600" indent="0">
+              <a:buNone/>
+              <a:defRPr sz="900"/>
+            </a:lvl4pPr>
+            <a:lvl5pPr marL="1828800" indent="0">
+              <a:buNone/>
+              <a:defRPr sz="900"/>
+            </a:lvl5pPr>
+            <a:lvl6pPr marL="2286000" indent="0">
+              <a:buNone/>
+              <a:defRPr sz="900"/>
+            </a:lvl6pPr>
+            <a:lvl7pPr marL="2743200" indent="0">
+              <a:buNone/>
+              <a:defRPr sz="900"/>
+            </a:lvl7pPr>
+            <a:lvl8pPr marL="3200400" indent="0">
+              <a:buNone/>
+              <a:defRPr sz="900"/>
+            </a:lvl8pPr>
+            <a:lvl9pPr marL="3657600" indent="0">
+              <a:buNone/>
+              <a:defRPr sz="900"/>
+            </a:lvl9pPr>
+          </a:lstStyle>
+          <a:p>
+            <a:pPr lvl="0"/>
+            <a:r>
+              <a:rPr lang="en-US" smtClean="0"/>
+              <a:t>Click to edit Master text styles</a:t>
+            </a:r>
+          </a:p>
+        </p:txBody>
+      </p:sp>
+      <p:sp>
+        <p:nvSpPr>
+          <p:cNvPr id="5" name="Date Placeholder 4"/>
+          <p:cNvSpPr>
+            <a:spLocks noGrp="1"/>
+          </p:cNvSpPr>
+          <p:nvPr>
+            <p:ph type="dt" sz="half" idx="10"/>
+          </p:nvPr>
+        </p:nvSpPr>
+        <p:spPr/>
+        <p:txBody>
+          <a:bodyPr/>
+          <a:lstStyle/>
+          <a:p>
+            <a:fld id="{5BCAD085-E8A6-8845-BD4E-CB4CCA059FC4}" type="datetimeFigureOut">
+              <a:rPr lang="en-US" smtClean="0"/>
+              <a:t>1/27/13</a:t>
+            </a:fld>
+            <a:endParaRPr lang="en-US"/>
+          </a:p>
+        </p:txBody>
+      </p:sp>
+      <p:sp>
+        <p:nvSpPr>
+          <p:cNvPr id="6" name="Footer Placeholder 5"/>
+          <p:cNvSpPr>
+            <a:spLocks noGrp="1"/>
+          </p:cNvSpPr>
+          <p:nvPr>
+            <p:ph type="ftr" sz="quarter" idx="11"/>
+          </p:nvPr>
+        </p:nvSpPr>
+        <p:spPr/>
+        <p:txBody>
+          <a:bodyPr/>
+          <a:lstStyle/>
+          <a:p>
+            <a:endParaRPr lang="en-US"/>
+          </a:p>
+        </p:txBody>
+      </p:sp>
+      <p:sp>
+        <p:nvSpPr>
+          <p:cNvPr id="7" name="Slide Number Placeholder 6"/>
+          <p:cNvSpPr>
+            <a:spLocks noGrp="1"/>
+          </p:cNvSpPr>
+          <p:nvPr>
+            <p:ph type="sldNum" sz="quarter" idx="12"/>
+          </p:nvPr>
+        </p:nvSpPr>
+        <p:spPr/>
+        <p:txBody>
+          <a:bodyPr/>
+          <a:lstStyle/>
+          <a:p>
+            <a:fld id="{C1FF6DA9-008F-8B48-92A6-B652298478BF}" type="slidenum">
+              <a:rPr lang="en-US" smtClean="0"/>
+              <a:t>‹#›</a:t>
+            </a:fld>
+            <a:endParaRPr lang="en-US"/>
+          </a:p>
+        </p:txBody>
+      </p:sp>
+    </p:spTree>
+    <p:extLst>
+      <p:ext uri="{BB962C8B-B14F-4D97-AF65-F5344CB8AC3E}">
+        <p14:creationId xmlns:p14="http://schemas.microsoft.com/office/powerpoint/2010/main" val="3889236939"/>
+      </p:ext>
+    </p:extLst>
+  </p:cSld>
+  <p:clrMapOvr>
+    <a:masterClrMapping/>
+  </p:clrMapOvr>
+</p:sldLayout>
+</file>
+
+<file path=ppt/slideMasters/slideMaster1.xml><?xml version="1.0" encoding="utf-8"?>
+<p:sldMaster xmlns:a="http://schemas.openxmlformats.org/drawingml/2006/main" xmlns:r="http://schemas.openxmlformats.org/officeDocument/2006/relationships" xmlns:p="http://schemas.openxmlformats.org/presentationml/2006/main">
+  <p:cSld>
     <p:bg>
       <p:bgRef idx="1001">
         <a:schemeClr val="bg1"/>
@@ -1314,41 +3794,244 @@
           <a:chExt cx="0" cy="0"/>
         </a:xfrm>
       </p:grpSpPr>
+      <p:sp>
+        <p:nvSpPr>
+          <p:cNvPr id="2" name="Title Placeholder 1"/>
+          <p:cNvSpPr>
+            <a:spLocks noGrp="1"/>
+          </p:cNvSpPr>
+          <p:nvPr>
+            <p:ph type="title"/>
+          </p:nvPr>
+        </p:nvSpPr>
+        <p:spPr>
+          <a:xfrm>
+            <a:off x="457200" y="274638"/>
+            <a:ext cx="8229600" cy="1143000"/>
+          </a:xfrm>
+          <a:prstGeom prst="rect">
+            <a:avLst/>
+          </a:prstGeom>
+        </p:spPr>
+        <p:txBody>
+          <a:bodyPr vert="horz" lIns="91440" tIns="45720" rIns="91440" bIns="45720" rtlCol="0" anchor="ctr">
+            <a:normAutofit/>
+          </a:bodyPr>
+          <a:lstStyle/>
+          <a:p>
+            <a:r>
+              <a:rPr lang="en-US" smtClean="0"/>
+              <a:t>Click to edit Master title style</a:t>
+            </a:r>
+            <a:endParaRPr lang="en-US"/>
+          </a:p>
+        </p:txBody>
+      </p:sp>
+      <p:sp>
+        <p:nvSpPr>
+          <p:cNvPr id="3" name="Text Placeholder 2"/>
+          <p:cNvSpPr>
+            <a:spLocks noGrp="1"/>
+          </p:cNvSpPr>
+          <p:nvPr>
+            <p:ph type="body" idx="1"/>
+          </p:nvPr>
+        </p:nvSpPr>
+        <p:spPr>
+          <a:xfrm>
+            <a:off x="457200" y="1600200"/>
+            <a:ext cx="8229600" cy="4525963"/>
+          </a:xfrm>
+          <a:prstGeom prst="rect">
+            <a:avLst/>
+          </a:prstGeom>
+        </p:spPr>
+        <p:txBody>
+          <a:bodyPr vert="horz" lIns="91440" tIns="45720" rIns="91440" bIns="45720" rtlCol="0">
+            <a:normAutofit/>
+          </a:bodyPr>
+          <a:lstStyle/>
+          <a:p>
+            <a:pPr lvl="0"/>
+            <a:r>
+              <a:rPr lang="en-US" smtClean="0"/>
+              <a:t>Click to edit Master text styles</a:t>
+            </a:r>
+          </a:p>
+          <a:p>
+            <a:pPr lvl="1"/>
+            <a:r>
+              <a:rPr lang="en-US" smtClean="0"/>
+              <a:t>Second level</a:t>
+            </a:r>
+          </a:p>
+          <a:p>
+            <a:pPr lvl="2"/>
+            <a:r>
+              <a:rPr lang="en-US" smtClean="0"/>
+              <a:t>Third level</a:t>
+            </a:r>
+          </a:p>
+          <a:p>
+            <a:pPr lvl="3"/>
+            <a:r>
+              <a:rPr lang="en-US" smtClean="0"/>
+              <a:t>Fourth level</a:t>
+            </a:r>
+          </a:p>
+          <a:p>
+            <a:pPr lvl="4"/>
+            <a:r>
+              <a:rPr lang="en-US" smtClean="0"/>
+              <a:t>Fifth level</a:t>
+            </a:r>
+            <a:endParaRPr lang="en-US"/>
+          </a:p>
+        </p:txBody>
+      </p:sp>
+      <p:sp>
+        <p:nvSpPr>
+          <p:cNvPr id="4" name="Date Placeholder 3"/>
+          <p:cNvSpPr>
+            <a:spLocks noGrp="1"/>
+          </p:cNvSpPr>
+          <p:nvPr>
+            <p:ph type="dt" sz="half" idx="2"/>
+          </p:nvPr>
+        </p:nvSpPr>
+        <p:spPr>
+          <a:xfrm>
+            <a:off x="457200" y="6356350"/>
+            <a:ext cx="2133600" cy="365125"/>
+          </a:xfrm>
+          <a:prstGeom prst="rect">
+            <a:avLst/>
+          </a:prstGeom>
+        </p:spPr>
+        <p:txBody>
+          <a:bodyPr vert="horz" lIns="91440" tIns="45720" rIns="91440" bIns="45720" rtlCol="0" anchor="ctr"/>
+          <a:lstStyle>
+            <a:lvl1pPr algn="l">
+              <a:defRPr sz="1200">
+                <a:solidFill>
+                  <a:schemeClr val="tx1">
+                    <a:tint val="75000"/>
+                  </a:schemeClr>
+                </a:solidFill>
+              </a:defRPr>
+            </a:lvl1pPr>
+          </a:lstStyle>
+          <a:p>
+            <a:fld id="{5BCAD085-E8A6-8845-BD4E-CB4CCA059FC4}" type="datetimeFigureOut">
+              <a:rPr lang="en-US" smtClean="0"/>
+              <a:t>1/27/13</a:t>
+            </a:fld>
+            <a:endParaRPr lang="en-US"/>
+          </a:p>
+        </p:txBody>
+      </p:sp>
+      <p:sp>
+        <p:nvSpPr>
+          <p:cNvPr id="5" name="Footer Placeholder 4"/>
+          <p:cNvSpPr>
+            <a:spLocks noGrp="1"/>
+          </p:cNvSpPr>
+          <p:nvPr>
+            <p:ph type="ftr" sz="quarter" idx="3"/>
+          </p:nvPr>
+        </p:nvSpPr>
+        <p:spPr>
+          <a:xfrm>
+            <a:off x="3124200" y="6356350"/>
+            <a:ext cx="2895600" cy="365125"/>
+          </a:xfrm>
+          <a:prstGeom prst="rect">
+            <a:avLst/>
+          </a:prstGeom>
+        </p:spPr>
+        <p:txBody>
+          <a:bodyPr vert="horz" lIns="91440" tIns="45720" rIns="91440" bIns="45720" rtlCol="0" anchor="ctr"/>
+          <a:lstStyle>
+            <a:lvl1pPr algn="ctr">
+              <a:defRPr sz="1200">
+                <a:solidFill>
+                  <a:schemeClr val="tx1">
+                    <a:tint val="75000"/>
+                  </a:schemeClr>
+                </a:solidFill>
+              </a:defRPr>
+            </a:lvl1pPr>
+          </a:lstStyle>
+          <a:p>
+            <a:endParaRPr lang="en-US"/>
+          </a:p>
+        </p:txBody>
+      </p:sp>
+      <p:sp>
+        <p:nvSpPr>
+          <p:cNvPr id="6" name="Slide Number Placeholder 5"/>
+          <p:cNvSpPr>
+            <a:spLocks noGrp="1"/>
+          </p:cNvSpPr>
+          <p:nvPr>
+            <p:ph type="sldNum" sz="quarter" idx="4"/>
+          </p:nvPr>
+        </p:nvSpPr>
+        <p:spPr>
+          <a:xfrm>
+            <a:off x="6553200" y="6356350"/>
+            <a:ext cx="2133600" cy="365125"/>
+          </a:xfrm>
+          <a:prstGeom prst="rect">
+            <a:avLst/>
+          </a:prstGeom>
+        </p:spPr>
+        <p:txBody>
+          <a:bodyPr vert="horz" lIns="91440" tIns="45720" rIns="91440" bIns="45720" rtlCol="0" anchor="ctr"/>
+          <a:lstStyle>
+            <a:lvl1pPr algn="r">
+              <a:defRPr sz="1200">
+                <a:solidFill>
+                  <a:schemeClr val="tx1">
+                    <a:tint val="75000"/>
+                  </a:schemeClr>
+                </a:solidFill>
+              </a:defRPr>
+            </a:lvl1pPr>
+          </a:lstStyle>
+          <a:p>
+            <a:fld id="{C1FF6DA9-008F-8B48-92A6-B652298478BF}" type="slidenum">
+              <a:rPr lang="en-US" smtClean="0"/>
+              <a:t>‹#›</a:t>
+            </a:fld>
+            <a:endParaRPr lang="en-US"/>
+          </a:p>
+        </p:txBody>
+      </p:sp>
     </p:spTree>
-  </p:cSld>
-  <p:clrMapOvr>
-    <a:masterClrMapping/>
-  </p:clrMapOvr>
-</p:sldLayout>
-</file>
-
-<file path=ppt/slideMasters/slideMaster1.xml><?xml version="1.0" encoding="utf-8"?>
-<p:sldMaster xmlns:a="http://schemas.openxmlformats.org/drawingml/2006/main" xmlns:r="http://schemas.openxmlformats.org/officeDocument/2006/relationships" xmlns:p="http://schemas.openxmlformats.org/presentationml/2006/main">
-  <p:cSld>
-    <p:spTree>
-      <p:nvGrpSpPr>
-        <p:cNvPr id="1" name=""/>
-        <p:cNvGrpSpPr/>
-        <p:nvPr/>
-      </p:nvGrpSpPr>
-      <p:grpSpPr>
-        <a:xfrm>
-          <a:off x="0" y="0"/>
-          <a:ext cx="0" cy="0"/>
-          <a:chOff x="0" y="0"/>
-          <a:chExt cx="0" cy="0"/>
-        </a:xfrm>
-      </p:grpSpPr>
-    </p:spTree>
+    <p:extLst>
+      <p:ext uri="{BB962C8B-B14F-4D97-AF65-F5344CB8AC3E}">
+        <p14:creationId xmlns:p14="http://schemas.microsoft.com/office/powerpoint/2010/main" val="2209977519"/>
+      </p:ext>
+    </p:extLst>
   </p:cSld>
   <p:clrMap bg1="lt1" tx1="dk1" bg2="lt2" tx2="dk2" accent1="accent1" accent2="accent2" accent3="accent3" accent4="accent4" accent5="accent5" accent6="accent6" hlink="hlink" folHlink="folHlink"/>
   <p:sldLayoutIdLst>
     <p:sldLayoutId id="2147483649" r:id="rId1"/>
+    <p:sldLayoutId id="2147483650" r:id="rId2"/>
+    <p:sldLayoutId id="2147483651" r:id="rId3"/>
+    <p:sldLayoutId id="2147483652" r:id="rId4"/>
+    <p:sldLayoutId id="2147483653" r:id="rId5"/>
+    <p:sldLayoutId id="2147483654" r:id="rId6"/>
+    <p:sldLayoutId id="2147483655" r:id="rId7"/>
+    <p:sldLayoutId id="2147483656" r:id="rId8"/>
+    <p:sldLayoutId id="2147483657" r:id="rId9"/>
+    <p:sldLayoutId id="2147483658" r:id="rId10"/>
+    <p:sldLayoutId id="2147483659" r:id="rId11"/>
   </p:sldLayoutIdLst>
-  <p:hf sldNum="0" hdr="0" ftr="0" dt="0"/>
   <p:txStyles>
     <p:titleStyle>
-      <a:lvl1pPr algn="ctr" defTabSz="914400" rtl="0" eaLnBrk="1" latinLnBrk="0" hangingPunct="1">
+      <a:lvl1pPr algn="ctr" defTabSz="457200" rtl="0" eaLnBrk="1" latinLnBrk="0" hangingPunct="1">
         <a:spcBef>
           <a:spcPct val="0"/>
         </a:spcBef>
@@ -1364,11 +4047,11 @@
       </a:lvl1pPr>
     </p:titleStyle>
     <p:bodyStyle>
-      <a:lvl1pPr marL="342900" indent="-342900" algn="l" defTabSz="914400" rtl="0" eaLnBrk="1" latinLnBrk="0" hangingPunct="1">
+      <a:lvl1pPr marL="342900" indent="-342900" algn="l" defTabSz="457200" rtl="0" eaLnBrk="1" latinLnBrk="0" hangingPunct="1">
         <a:spcBef>
           <a:spcPct val="20000"/>
         </a:spcBef>
-        <a:buFont typeface="Arial" pitchFamily="34" charset="0"/>
+        <a:buFont typeface="Arial"/>
         <a:buChar char="•"/>
         <a:defRPr sz="3200" kern="1200">
           <a:solidFill>
@@ -1379,11 +4062,11 @@
           <a:cs typeface="+mn-cs"/>
         </a:defRPr>
       </a:lvl1pPr>
-      <a:lvl2pPr marL="742950" indent="-285750" algn="l" defTabSz="914400" rtl="0" eaLnBrk="1" latinLnBrk="0" hangingPunct="1">
+      <a:lvl2pPr marL="742950" indent="-285750" algn="l" defTabSz="457200" rtl="0" eaLnBrk="1" latinLnBrk="0" hangingPunct="1">
         <a:spcBef>
           <a:spcPct val="20000"/>
         </a:spcBef>
-        <a:buFont typeface="Arial" pitchFamily="34" charset="0"/>
+        <a:buFont typeface="Arial"/>
         <a:buChar char="–"/>
         <a:defRPr sz="2800" kern="1200">
           <a:solidFill>
@@ -1394,11 +4077,11 @@
           <a:cs typeface="+mn-cs"/>
         </a:defRPr>
       </a:lvl2pPr>
-      <a:lvl3pPr marL="1143000" indent="-228600" algn="l" defTabSz="914400" rtl="0" eaLnBrk="1" latinLnBrk="0" hangingPunct="1">
+      <a:lvl3pPr marL="1143000" indent="-228600" algn="l" defTabSz="457200" rtl="0" eaLnBrk="1" latinLnBrk="0" hangingPunct="1">
         <a:spcBef>
           <a:spcPct val="20000"/>
         </a:spcBef>
-        <a:buFont typeface="Arial" pitchFamily="34" charset="0"/>
+        <a:buFont typeface="Arial"/>
         <a:buChar char="•"/>
         <a:defRPr sz="2400" kern="1200">
           <a:solidFill>
@@ -1409,11 +4092,11 @@
           <a:cs typeface="+mn-cs"/>
         </a:defRPr>
       </a:lvl3pPr>
-      <a:lvl4pPr marL="1600200" indent="-228600" algn="l" defTabSz="914400" rtl="0" eaLnBrk="1" latinLnBrk="0" hangingPunct="1">
+      <a:lvl4pPr marL="1600200" indent="-228600" algn="l" defTabSz="457200" rtl="0" eaLnBrk="1" latinLnBrk="0" hangingPunct="1">
         <a:spcBef>
           <a:spcPct val="20000"/>
         </a:spcBef>
-        <a:buFont typeface="Arial" pitchFamily="34" charset="0"/>
+        <a:buFont typeface="Arial"/>
         <a:buChar char="–"/>
         <a:defRPr sz="2000" kern="1200">
           <a:solidFill>
@@ -1424,11 +4107,11 @@
           <a:cs typeface="+mn-cs"/>
         </a:defRPr>
       </a:lvl4pPr>
-      <a:lvl5pPr marL="2057400" indent="-228600" algn="l" defTabSz="914400" rtl="0" eaLnBrk="1" latinLnBrk="0" hangingPunct="1">
+      <a:lvl5pPr marL="2057400" indent="-228600" algn="l" defTabSz="457200" rtl="0" eaLnBrk="1" latinLnBrk="0" hangingPunct="1">
         <a:spcBef>
           <a:spcPct val="20000"/>
         </a:spcBef>
-        <a:buFont typeface="Arial" pitchFamily="34" charset="0"/>
+        <a:buFont typeface="Arial"/>
         <a:buChar char="»"/>
         <a:defRPr sz="2000" kern="1200">
           <a:solidFill>
@@ -1439,11 +4122,11 @@
           <a:cs typeface="+mn-cs"/>
         </a:defRPr>
       </a:lvl5pPr>
-      <a:lvl6pPr marL="2514600" indent="-228600" algn="l" defTabSz="914400" rtl="0" eaLnBrk="1" latinLnBrk="0" hangingPunct="1">
+      <a:lvl6pPr marL="2514600" indent="-228600" algn="l" defTabSz="457200" rtl="0" eaLnBrk="1" latinLnBrk="0" hangingPunct="1">
         <a:spcBef>
           <a:spcPct val="20000"/>
         </a:spcBef>
-        <a:buFont typeface="Arial" pitchFamily="34" charset="0"/>
+        <a:buFont typeface="Arial"/>
         <a:buChar char="•"/>
         <a:defRPr sz="2000" kern="1200">
           <a:solidFill>
@@ -1454,11 +4137,11 @@
           <a:cs typeface="+mn-cs"/>
         </a:defRPr>
       </a:lvl6pPr>
-      <a:lvl7pPr marL="2971800" indent="-228600" algn="l" defTabSz="914400" rtl="0" eaLnBrk="1" latinLnBrk="0" hangingPunct="1">
+      <a:lvl7pPr marL="2971800" indent="-228600" algn="l" defTabSz="457200" rtl="0" eaLnBrk="1" latinLnBrk="0" hangingPunct="1">
         <a:spcBef>
           <a:spcPct val="20000"/>
         </a:spcBef>
-        <a:buFont typeface="Arial" pitchFamily="34" charset="0"/>
+        <a:buFont typeface="Arial"/>
         <a:buChar char="•"/>
         <a:defRPr sz="2000" kern="1200">
           <a:solidFill>
@@ -1469,11 +4152,11 @@
           <a:cs typeface="+mn-cs"/>
         </a:defRPr>
       </a:lvl7pPr>
-      <a:lvl8pPr marL="3429000" indent="-228600" algn="l" defTabSz="914400" rtl="0" eaLnBrk="1" latinLnBrk="0" hangingPunct="1">
+      <a:lvl8pPr marL="3429000" indent="-228600" algn="l" defTabSz="457200" rtl="0" eaLnBrk="1" latinLnBrk="0" hangingPunct="1">
         <a:spcBef>
           <a:spcPct val="20000"/>
         </a:spcBef>
-        <a:buFont typeface="Arial" pitchFamily="34" charset="0"/>
+        <a:buFont typeface="Arial"/>
         <a:buChar char="•"/>
         <a:defRPr sz="2000" kern="1200">
           <a:solidFill>
@@ -1484,11 +4167,11 @@
           <a:cs typeface="+mn-cs"/>
         </a:defRPr>
       </a:lvl8pPr>
-      <a:lvl9pPr marL="3886200" indent="-228600" algn="l" defTabSz="914400" rtl="0" eaLnBrk="1" latinLnBrk="0" hangingPunct="1">
+      <a:lvl9pPr marL="3886200" indent="-228600" algn="l" defTabSz="457200" rtl="0" eaLnBrk="1" latinLnBrk="0" hangingPunct="1">
         <a:spcBef>
           <a:spcPct val="20000"/>
         </a:spcBef>
-        <a:buFont typeface="Arial" pitchFamily="34" charset="0"/>
+        <a:buFont typeface="Arial"/>
         <a:buChar char="•"/>
         <a:defRPr sz="2000" kern="1200">
           <a:solidFill>
@@ -1504,7 +4187,7 @@
       <a:defPPr>
         <a:defRPr lang="en-US"/>
       </a:defPPr>
-      <a:lvl1pPr marL="0" algn="l" defTabSz="914400" rtl="0" eaLnBrk="1" latinLnBrk="0" hangingPunct="1">
+      <a:lvl1pPr marL="0" algn="l" defTabSz="457200" rtl="0" eaLnBrk="1" latinLnBrk="0" hangingPunct="1">
         <a:defRPr sz="1800" kern="1200">
           <a:solidFill>
             <a:schemeClr val="tx1"/>
@@ -1514,7 +4197,7 @@
           <a:cs typeface="+mn-cs"/>
         </a:defRPr>
       </a:lvl1pPr>
-      <a:lvl2pPr marL="457200" algn="l" defTabSz="914400" rtl="0" eaLnBrk="1" latinLnBrk="0" hangingPunct="1">
+      <a:lvl2pPr marL="457200" algn="l" defTabSz="457200" rtl="0" eaLnBrk="1" latinLnBrk="0" hangingPunct="1">
         <a:defRPr sz="1800" kern="1200">
           <a:solidFill>
             <a:schemeClr val="tx1"/>
@@ -1524,7 +4207,7 @@
           <a:cs typeface="+mn-cs"/>
         </a:defRPr>
       </a:lvl2pPr>
-      <a:lvl3pPr marL="914400" algn="l" defTabSz="914400" rtl="0" eaLnBrk="1" latinLnBrk="0" hangingPunct="1">
+      <a:lvl3pPr marL="914400" algn="l" defTabSz="457200" rtl="0" eaLnBrk="1" latinLnBrk="0" hangingPunct="1">
         <a:defRPr sz="1800" kern="1200">
           <a:solidFill>
             <a:schemeClr val="tx1"/>
@@ -1534,7 +4217,7 @@
           <a:cs typeface="+mn-cs"/>
         </a:defRPr>
       </a:lvl3pPr>
-      <a:lvl4pPr marL="1371600" algn="l" defTabSz="914400" rtl="0" eaLnBrk="1" latinLnBrk="0" hangingPunct="1">
+      <a:lvl4pPr marL="1371600" algn="l" defTabSz="457200" rtl="0" eaLnBrk="1" latinLnBrk="0" hangingPunct="1">
         <a:defRPr sz="1800" kern="1200">
           <a:solidFill>
             <a:schemeClr val="tx1"/>
@@ -1544,7 +4227,7 @@
           <a:cs typeface="+mn-cs"/>
         </a:defRPr>
       </a:lvl4pPr>
-      <a:lvl5pPr marL="1828800" algn="l" defTabSz="914400" rtl="0" eaLnBrk="1" latinLnBrk="0" hangingPunct="1">
+      <a:lvl5pPr marL="1828800" algn="l" defTabSz="457200" rtl="0" eaLnBrk="1" latinLnBrk="0" hangingPunct="1">
         <a:defRPr sz="1800" kern="1200">
           <a:solidFill>
             <a:schemeClr val="tx1"/>
@@ -1554,7 +4237,7 @@
           <a:cs typeface="+mn-cs"/>
         </a:defRPr>
       </a:lvl5pPr>
-      <a:lvl6pPr marL="2286000" algn="l" defTabSz="914400" rtl="0" eaLnBrk="1" latinLnBrk="0" hangingPunct="1">
+      <a:lvl6pPr marL="2286000" algn="l" defTabSz="457200" rtl="0" eaLnBrk="1" latinLnBrk="0" hangingPunct="1">
         <a:defRPr sz="1800" kern="1200">
           <a:solidFill>
             <a:schemeClr val="tx1"/>
@@ -1564,7 +4247,7 @@
           <a:cs typeface="+mn-cs"/>
         </a:defRPr>
       </a:lvl6pPr>
-      <a:lvl7pPr marL="2743200" algn="l" defTabSz="914400" rtl="0" eaLnBrk="1" latinLnBrk="0" hangingPunct="1">
+      <a:lvl7pPr marL="2743200" algn="l" defTabSz="457200" rtl="0" eaLnBrk="1" latinLnBrk="0" hangingPunct="1">
         <a:defRPr sz="1800" kern="1200">
           <a:solidFill>
             <a:schemeClr val="tx1"/>
@@ -1574,7 +4257,7 @@
           <a:cs typeface="+mn-cs"/>
         </a:defRPr>
       </a:lvl7pPr>
-      <a:lvl8pPr marL="3200400" algn="l" defTabSz="914400" rtl="0" eaLnBrk="1" latinLnBrk="0" hangingPunct="1">
+      <a:lvl8pPr marL="3200400" algn="l" defTabSz="457200" rtl="0" eaLnBrk="1" latinLnBrk="0" hangingPunct="1">
         <a:defRPr sz="1800" kern="1200">
           <a:solidFill>
             <a:schemeClr val="tx1"/>
@@ -1584,7 +4267,7 @@
           <a:cs typeface="+mn-cs"/>
         </a:defRPr>
       </a:lvl8pPr>
-      <a:lvl9pPr marL="3657600" algn="l" defTabSz="914400" rtl="0" eaLnBrk="1" latinLnBrk="0" hangingPunct="1">
+      <a:lvl9pPr marL="3657600" algn="l" defTabSz="457200" rtl="0" eaLnBrk="1" latinLnBrk="0" hangingPunct="1">
         <a:defRPr sz="1800" kern="1200">
           <a:solidFill>
             <a:schemeClr val="tx1"/>
@@ -1600,19 +4283,13 @@
 </file>
 
 <file path=ppt/slides/slide1.xml><?xml version="1.0" encoding="utf-8"?>
-<p:sld xmlns:a="http://schemas.openxmlformats.org/drawingml/2006/main" xmlns:r="http://schemas.openxmlformats.org/officeDocument/2006/relationships" xmlns:p="http://schemas.openxmlformats.org/presentationml/2006/main">
-  <p:cSld name="Slide 1">
+<p:sld xmlns:a="http://schemas.openxmlformats.org/drawingml/2006/main" xmlns:p="http://schemas.openxmlformats.org/presentationml/2006/main" xmlns:r="http://schemas.openxmlformats.org/officeDocument/2006/relationships">
+  <p:cSld>
     <p:bg>
       <p:bgPr>
-        <a:blipFill dpi="0" rotWithShape="1">
-          <a:blip r:embed="rId1">
-            <a:lum/>
-          </a:blip>
-          <a:srcRect/>
-          <a:stretch>
-            <a:fillRect/>
-          </a:stretch>
-        </a:blipFill>
+        <a:solidFill>
+          <a:srgbClr val="0F0F0F"/>
+        </a:solidFill>
         <a:effectLst/>
       </p:bgPr>
     </p:bg>
@@ -1622,14 +4299,81 @@
         <p:cNvGrpSpPr/>
         <p:nvPr/>
       </p:nvGrpSpPr>
-      <p:grpSpPr>
-        <a:xfrm>
-          <a:off x="0" y="0"/>
-          <a:ext cx="0" cy="0"/>
-          <a:chOff x="0" y="0"/>
-          <a:chExt cx="0" cy="0"/>
-        </a:xfrm>
-      </p:grpSpPr>
+      <p:grpSpPr/>
+      <p:sp>
+        <p:nvSpPr>
+          <p:cNvPr id="2" name="TextBox 1"/>
+          <p:cNvSpPr txBox="1"/>
+          <p:nvPr/>
+        </p:nvSpPr>
+        <p:spPr>
+          <a:xfrm>
+            <a:off x="1097280" y="2011680"/>
+            <a:ext cx="9601200" cy="2286000"/>
+          </a:xfrm>
+          <a:prstGeom prst="rect">
+            <a:avLst/>
+          </a:prstGeom>
+          <a:noFill/>
+        </p:spPr>
+        <p:txBody>
+          <a:bodyPr wrap="square"/>
+          <a:lstStyle/>
+          <a:p>
+            <a:pPr algn="l">
+              <a:defRPr sz="5400" b="1">
+                <a:solidFill>
+                  <a:srgbClr val="F6F7F8"/>
+                </a:solidFill>
+                <a:latin typeface="Lora"/>
+              </a:defRPr>
+            </a:pPr>
+            <a:r>
+              <a:t>Privacy That Doesn't</a:t>
+            </a:r>
+            <a:br/>
+            <a:r>
+              <a:t>Break the Chain</a:t>
+            </a:r>
+          </a:p>
+        </p:txBody>
+      </p:sp>
+      <p:sp>
+        <p:nvSpPr>
+          <p:cNvPr id="3" name="TextBox 2"/>
+          <p:cNvSpPr txBox="1"/>
+          <p:nvPr/>
+        </p:nvSpPr>
+        <p:spPr>
+          <a:xfrm>
+            <a:off x="1097280" y="4023360"/>
+            <a:ext cx="9601200" cy="731520"/>
+          </a:xfrm>
+          <a:prstGeom prst="rect">
+            <a:avLst/>
+          </a:prstGeom>
+          <a:noFill/>
+        </p:spPr>
+        <p:txBody>
+          <a:bodyPr wrap="square">
+            <a:spAutoFit/>
+          </a:bodyPr>
+          <a:lstStyle/>
+          <a:p>
+            <a:pPr algn="l">
+              <a:defRPr sz="2400">
+                <a:solidFill>
+                  <a:srgbClr val="D6D2C4"/>
+                </a:solidFill>
+                <a:latin typeface="Inter"/>
+              </a:defRPr>
+            </a:pPr>
+            <a:r>
+              <a:t>Tomer Weller · Stellar.org</a:t>
+            </a:r>
+          </a:p>
+        </p:txBody>
+      </p:sp>
     </p:spTree>
   </p:cSld>
   <p:clrMapOvr>
@@ -1639,19 +4383,13 @@
 </file>
 
 <file path=ppt/slides/slide2.xml><?xml version="1.0" encoding="utf-8"?>
-<p:sld xmlns:a="http://schemas.openxmlformats.org/drawingml/2006/main" xmlns:r="http://schemas.openxmlformats.org/officeDocument/2006/relationships" xmlns:p="http://schemas.openxmlformats.org/presentationml/2006/main">
-  <p:cSld name="Slide 2">
+<p:sld xmlns:a="http://schemas.openxmlformats.org/drawingml/2006/main" xmlns:p="http://schemas.openxmlformats.org/presentationml/2006/main" xmlns:r="http://schemas.openxmlformats.org/officeDocument/2006/relationships">
+  <p:cSld>
     <p:bg>
       <p:bgPr>
-        <a:blipFill dpi="0" rotWithShape="1">
-          <a:blip r:embed="rId1">
-            <a:lum/>
-          </a:blip>
-          <a:srcRect/>
-          <a:stretch>
-            <a:fillRect/>
-          </a:stretch>
-        </a:blipFill>
+        <a:solidFill>
+          <a:srgbClr val="0F0F0F"/>
+        </a:solidFill>
         <a:effectLst/>
       </p:bgPr>
     </p:bg>
@@ -1661,14 +4399,41 @@
         <p:cNvGrpSpPr/>
         <p:nvPr/>
       </p:nvGrpSpPr>
-      <p:grpSpPr>
-        <a:xfrm>
-          <a:off x="0" y="0"/>
-          <a:ext cx="0" cy="0"/>
-          <a:chOff x="0" y="0"/>
-          <a:chExt cx="0" cy="0"/>
-        </a:xfrm>
-      </p:grpSpPr>
+      <p:grpSpPr/>
+      <p:sp>
+        <p:nvSpPr>
+          <p:cNvPr id="2" name="TextBox 1"/>
+          <p:cNvSpPr txBox="1"/>
+          <p:nvPr/>
+        </p:nvSpPr>
+        <p:spPr>
+          <a:xfrm>
+            <a:off x="1097280" y="2560320"/>
+            <a:ext cx="9601200" cy="1828800"/>
+          </a:xfrm>
+          <a:prstGeom prst="rect">
+            <a:avLst/>
+          </a:prstGeom>
+          <a:noFill/>
+        </p:spPr>
+        <p:txBody>
+          <a:bodyPr wrap="square"/>
+          <a:lstStyle/>
+          <a:p>
+            <a:pPr algn="l">
+              <a:defRPr sz="4400" b="1">
+                <a:solidFill>
+                  <a:srgbClr val="F6F7F8"/>
+                </a:solidFill>
+                <a:latin typeface="Lora"/>
+              </a:defRPr>
+            </a:pPr>
+            <a:r>
+              <a:t>Why Privacy?</a:t>
+            </a:r>
+          </a:p>
+        </p:txBody>
+      </p:sp>
     </p:spTree>
   </p:cSld>
   <p:clrMapOvr>
@@ -1678,19 +4443,13 @@
 </file>
 
 <file path=ppt/slides/slide3.xml><?xml version="1.0" encoding="utf-8"?>
-<p:sld xmlns:a="http://schemas.openxmlformats.org/drawingml/2006/main" xmlns:r="http://schemas.openxmlformats.org/officeDocument/2006/relationships" xmlns:p="http://schemas.openxmlformats.org/presentationml/2006/main">
-  <p:cSld name="Slide 3">
+<p:sld xmlns:a="http://schemas.openxmlformats.org/drawingml/2006/main" xmlns:p="http://schemas.openxmlformats.org/presentationml/2006/main" xmlns:r="http://schemas.openxmlformats.org/officeDocument/2006/relationships">
+  <p:cSld>
     <p:bg>
       <p:bgPr>
-        <a:blipFill dpi="0" rotWithShape="1">
-          <a:blip r:embed="rId1">
-            <a:lum/>
-          </a:blip>
-          <a:srcRect/>
-          <a:stretch>
-            <a:fillRect/>
-          </a:stretch>
-        </a:blipFill>
+        <a:solidFill>
+          <a:srgbClr val="0F0F0F"/>
+        </a:solidFill>
         <a:effectLst/>
       </p:bgPr>
     </p:bg>
@@ -1700,14 +4459,41 @@
         <p:cNvGrpSpPr/>
         <p:nvPr/>
       </p:nvGrpSpPr>
-      <p:grpSpPr>
-        <a:xfrm>
-          <a:off x="0" y="0"/>
-          <a:ext cx="0" cy="0"/>
-          <a:chOff x="0" y="0"/>
-          <a:chExt cx="0" cy="0"/>
-        </a:xfrm>
-      </p:grpSpPr>
+      <p:grpSpPr/>
+      <p:sp>
+        <p:nvSpPr>
+          <p:cNvPr id="2" name="TextBox 1"/>
+          <p:cNvSpPr txBox="1"/>
+          <p:nvPr/>
+        </p:nvSpPr>
+        <p:spPr>
+          <a:xfrm>
+            <a:off x="1097280" y="2560320"/>
+            <a:ext cx="9601200" cy="1828800"/>
+          </a:xfrm>
+          <a:prstGeom prst="rect">
+            <a:avLst/>
+          </a:prstGeom>
+          <a:noFill/>
+        </p:spPr>
+        <p:txBody>
+          <a:bodyPr wrap="square"/>
+          <a:lstStyle/>
+          <a:p>
+            <a:pPr algn="l">
+              <a:defRPr sz="4400" b="1">
+                <a:solidFill>
+                  <a:srgbClr val="F6F7F8"/>
+                </a:solidFill>
+                <a:latin typeface="Lora"/>
+              </a:defRPr>
+            </a:pPr>
+            <a:r>
+              <a:t>The Privacy Mistake</a:t>
+            </a:r>
+          </a:p>
+        </p:txBody>
+      </p:sp>
     </p:spTree>
   </p:cSld>
   <p:clrMapOvr>
@@ -1717,19 +4503,13 @@
 </file>
 
 <file path=ppt/slides/slide4.xml><?xml version="1.0" encoding="utf-8"?>
-<p:sld xmlns:a="http://schemas.openxmlformats.org/drawingml/2006/main" xmlns:r="http://schemas.openxmlformats.org/officeDocument/2006/relationships" xmlns:p="http://schemas.openxmlformats.org/presentationml/2006/main">
-  <p:cSld name="Slide 4">
+<p:sld xmlns:a="http://schemas.openxmlformats.org/drawingml/2006/main" xmlns:p="http://schemas.openxmlformats.org/presentationml/2006/main" xmlns:r="http://schemas.openxmlformats.org/officeDocument/2006/relationships">
+  <p:cSld>
     <p:bg>
       <p:bgPr>
-        <a:blipFill dpi="0" rotWithShape="1">
-          <a:blip r:embed="rId1">
-            <a:lum/>
-          </a:blip>
-          <a:srcRect/>
-          <a:stretch>
-            <a:fillRect/>
-          </a:stretch>
-        </a:blipFill>
+        <a:solidFill>
+          <a:srgbClr val="0F0F0F"/>
+        </a:solidFill>
         <a:effectLst/>
       </p:bgPr>
     </p:bg>
@@ -1739,14 +4519,41 @@
         <p:cNvGrpSpPr/>
         <p:nvPr/>
       </p:nvGrpSpPr>
-      <p:grpSpPr>
-        <a:xfrm>
-          <a:off x="0" y="0"/>
-          <a:ext cx="0" cy="0"/>
-          <a:chOff x="0" y="0"/>
-          <a:chExt cx="0" cy="0"/>
-        </a:xfrm>
-      </p:grpSpPr>
+      <p:grpSpPr/>
+      <p:sp>
+        <p:nvSpPr>
+          <p:cNvPr id="2" name="TextBox 1"/>
+          <p:cNvSpPr txBox="1"/>
+          <p:nvPr/>
+        </p:nvSpPr>
+        <p:spPr>
+          <a:xfrm>
+            <a:off x="1097280" y="2560320"/>
+            <a:ext cx="9601200" cy="1828800"/>
+          </a:xfrm>
+          <a:prstGeom prst="rect">
+            <a:avLst/>
+          </a:prstGeom>
+          <a:noFill/>
+        </p:spPr>
+        <p:txBody>
+          <a:bodyPr wrap="square"/>
+          <a:lstStyle/>
+          <a:p>
+            <a:pPr algn="l">
+              <a:defRPr sz="4400" b="1">
+                <a:solidFill>
+                  <a:srgbClr val="F6F7F8"/>
+                </a:solidFill>
+                <a:latin typeface="Lora"/>
+              </a:defRPr>
+            </a:pPr>
+            <a:r>
+              <a:t>Privacy is a Spectrum</a:t>
+            </a:r>
+          </a:p>
+        </p:txBody>
+      </p:sp>
     </p:spTree>
   </p:cSld>
   <p:clrMapOvr>
@@ -1756,19 +4563,13 @@
 </file>
 
 <file path=ppt/slides/slide5.xml><?xml version="1.0" encoding="utf-8"?>
-<p:sld xmlns:a="http://schemas.openxmlformats.org/drawingml/2006/main" xmlns:r="http://schemas.openxmlformats.org/officeDocument/2006/relationships" xmlns:p="http://schemas.openxmlformats.org/presentationml/2006/main">
-  <p:cSld name="Slide 5">
+<p:sld xmlns:a="http://schemas.openxmlformats.org/drawingml/2006/main" xmlns:p="http://schemas.openxmlformats.org/presentationml/2006/main" xmlns:r="http://schemas.openxmlformats.org/officeDocument/2006/relationships">
+  <p:cSld>
     <p:bg>
       <p:bgPr>
-        <a:blipFill dpi="0" rotWithShape="1">
-          <a:blip r:embed="rId1">
-            <a:lum/>
-          </a:blip>
-          <a:srcRect/>
-          <a:stretch>
-            <a:fillRect/>
-          </a:stretch>
-        </a:blipFill>
+        <a:solidFill>
+          <a:srgbClr val="0F0F0F"/>
+        </a:solidFill>
         <a:effectLst/>
       </p:bgPr>
     </p:bg>
@@ -1778,36 +4579,237 @@
         <p:cNvGrpSpPr/>
         <p:nvPr/>
       </p:nvGrpSpPr>
-      <p:grpSpPr>
-        <a:xfrm>
-          <a:off x="0" y="0"/>
-          <a:ext cx="0" cy="0"/>
-          <a:chOff x="0" y="0"/>
-          <a:chExt cx="0" cy="0"/>
-        </a:xfrm>
-      </p:grpSpPr>
+      <p:grpSpPr/>
+      <p:sp>
+        <p:nvSpPr>
+          <p:cNvPr id="2" name="TextBox 1"/>
+          <p:cNvSpPr txBox="1"/>
+          <p:nvPr/>
+        </p:nvSpPr>
+        <p:spPr>
+          <a:xfrm>
+            <a:off x="1097280" y="1371600"/>
+            <a:ext cx="9601200" cy="1371600"/>
+          </a:xfrm>
+          <a:prstGeom prst="rect">
+            <a:avLst/>
+          </a:prstGeom>
+          <a:noFill/>
+        </p:spPr>
+        <p:txBody>
+          <a:bodyPr wrap="square"/>
+          <a:lstStyle/>
+          <a:p>
+            <a:pPr algn="l">
+              <a:defRPr sz="4400" b="1">
+                <a:solidFill>
+                  <a:srgbClr val="F6F7F8"/>
+                </a:solidFill>
+                <a:latin typeface="Lora"/>
+              </a:defRPr>
+            </a:pPr>
+            <a:r>
+              <a:t>Privacy Dead Ends</a:t>
+            </a:r>
+          </a:p>
+        </p:txBody>
+      </p:sp>
+      <p:sp>
+        <p:nvSpPr>
+          <p:cNvPr id="3" name="TextBox 2"/>
+          <p:cNvSpPr txBox="1"/>
+          <p:nvPr/>
+        </p:nvSpPr>
+        <p:spPr>
+          <a:xfrm>
+            <a:off x="1097280" y="3108960"/>
+            <a:ext cx="9601200" cy="548640"/>
+          </a:xfrm>
+          <a:prstGeom prst="rect">
+            <a:avLst/>
+          </a:prstGeom>
+          <a:noFill/>
+        </p:spPr>
+        <p:txBody>
+          <a:bodyPr wrap="square"/>
+          <a:lstStyle/>
+          <a:p>
+            <a:pPr algn="l"/>
+            <a:r>
+              <a:rPr sz="2200" b="1">
+                <a:solidFill>
+                  <a:srgbClr val="FDDA24"/>
+                </a:solidFill>
+                <a:latin typeface="Inter"/>
+              </a:rPr>
+              <a:t>All-or-Nothing</a:t>
+            </a:r>
+            <a:r>
+              <a:rPr sz="2200" b="0">
+                <a:solidFill>
+                  <a:srgbClr val="D6D2C4"/>
+                </a:solidFill>
+                <a:latin typeface="Inter"/>
+              </a:rPr>
+              <a:t> -- full transparency or full privacy, nothing in between</a:t>
+            </a:r>
+          </a:p>
+        </p:txBody>
+      </p:sp>
+      <p:sp>
+        <p:nvSpPr>
+          <p:cNvPr id="4" name="TextBox 3"/>
+          <p:cNvSpPr txBox="1"/>
+          <p:nvPr/>
+        </p:nvSpPr>
+        <p:spPr>
+          <a:xfrm>
+            <a:off x="1097280" y="3749040"/>
+            <a:ext cx="9601200" cy="548640"/>
+          </a:xfrm>
+          <a:prstGeom prst="rect">
+            <a:avLst/>
+          </a:prstGeom>
+          <a:noFill/>
+        </p:spPr>
+        <p:txBody>
+          <a:bodyPr wrap="square"/>
+          <a:lstStyle/>
+          <a:p>
+            <a:pPr algn="l"/>
+            <a:r>
+              <a:rPr sz="2200" b="1">
+                <a:solidFill>
+                  <a:srgbClr val="FDDA24"/>
+                </a:solidFill>
+                <a:latin typeface="Inter"/>
+              </a:rPr>
+              <a:t>Permissioned Chains</a:t>
+            </a:r>
+            <a:r>
+              <a:rPr sz="2200" b="0">
+                <a:solidFill>
+                  <a:srgbClr val="D6D2C4"/>
+                </a:solidFill>
+                <a:latin typeface="Inter"/>
+              </a:rPr>
+              <a:t> -- private by default, but you lose everything blockchain offers</a:t>
+            </a:r>
+          </a:p>
+        </p:txBody>
+      </p:sp>
     </p:spTree>
   </p:cSld>
   <p:clrMapOvr>
     <a:masterClrMapping/>
   </p:clrMapOvr>
+  <p:timing>
+    <p:tnLst>
+      <p:par>
+        <p:cTn id="1" dur="indefinite" restart="never" nodeType="tmRoot">
+          <p:childTnLst>
+            <p:seq concurrent="1" nextAc="seek">
+              <p:cTn id="2" dur="indefinite" nodeType="mainSeq">
+                <p:childTnLst>
+                  <p:par>
+                    <p:cTn id="3" fill="hold">
+                      <p:stCondLst>
+                        <p:cond delay="0"/>
+                      </p:stCondLst>
+                      <p:childTnLst>
+                        <p:par>
+                          <p:cTn id="4" presetID="1" presetClass="entr" presetSubtype="0" fill="hold" nodeType="clickEffect">
+                            <p:stCondLst>
+                              <p:cond delay="0"/>
+                            </p:stCondLst>
+                            <p:childTnLst>
+                              <p:set>
+                                <p:cBhvr>
+                                  <p:cTn id="5" dur="1" fill="hold">
+                                    <p:stCondLst>
+                                      <p:cond delay="0"/>
+                                    </p:stCondLst>
+                                  </p:cTn>
+                                  <p:tgtEl>
+                                    <p:spTgt spid="3"/>
+                                  </p:tgtEl>
+                                </p:cBhvr>
+                                <p:to>
+                                  <p:strVal val="visible"/>
+                                </p:to>
+                              </p:set>
+                            </p:childTnLst>
+                          </p:cTn>
+                        </p:par>
+                      </p:childTnLst>
+                    </p:cTn>
+                  </p:par>
+                  <p:par>
+                    <p:cTn id="6" fill="hold">
+                      <p:stCondLst>
+                        <p:cond delay="0"/>
+                      </p:stCondLst>
+                      <p:childTnLst>
+                        <p:par>
+                          <p:cTn id="7" presetID="1" presetClass="entr" presetSubtype="0" fill="hold" nodeType="clickEffect">
+                            <p:stCondLst>
+                              <p:cond delay="0"/>
+                            </p:stCondLst>
+                            <p:childTnLst>
+                              <p:set>
+                                <p:cBhvr>
+                                  <p:cTn id="8" dur="1" fill="hold">
+                                    <p:stCondLst>
+                                      <p:cond delay="0"/>
+                                    </p:stCondLst>
+                                  </p:cTn>
+                                  <p:tgtEl>
+                                    <p:spTgt spid="4"/>
+                                  </p:tgtEl>
+                                </p:cBhvr>
+                                <p:to>
+                                  <p:strVal val="visible"/>
+                                </p:to>
+                              </p:set>
+                            </p:childTnLst>
+                          </p:cTn>
+                        </p:par>
+                      </p:childTnLst>
+                    </p:cTn>
+                  </p:par>
+                </p:childTnLst>
+              </p:cTn>
+              <p:prevCondLst>
+                <p:cond evt="onPrev" delay="0">
+                  <p:tgtEl>
+                    <p:sldTgt/>
+                  </p:tgtEl>
+                </p:cond>
+              </p:prevCondLst>
+              <p:nextCondLst>
+                <p:cond evt="onNext" delay="0">
+                  <p:tgtEl>
+                    <p:sldTgt/>
+                  </p:tgtEl>
+                </p:cond>
+              </p:nextCondLst>
+            </p:seq>
+          </p:childTnLst>
+        </p:cTn>
+      </p:par>
+    </p:tnLst>
+  </p:timing>
 </p:sld>
 </file>
 
 <file path=ppt/slides/slide6.xml><?xml version="1.0" encoding="utf-8"?>
-<p:sld xmlns:a="http://schemas.openxmlformats.org/drawingml/2006/main" xmlns:r="http://schemas.openxmlformats.org/officeDocument/2006/relationships" xmlns:p="http://schemas.openxmlformats.org/presentationml/2006/main">
-  <p:cSld name="Slide 6">
+<p:sld xmlns:a="http://schemas.openxmlformats.org/drawingml/2006/main" xmlns:p="http://schemas.openxmlformats.org/presentationml/2006/main" xmlns:r="http://schemas.openxmlformats.org/officeDocument/2006/relationships">
+  <p:cSld>
     <p:bg>
       <p:bgPr>
-        <a:blipFill dpi="0" rotWithShape="1">
-          <a:blip r:embed="rId1">
-            <a:lum/>
-          </a:blip>
-          <a:srcRect/>
-          <a:stretch>
-            <a:fillRect/>
-          </a:stretch>
-        </a:blipFill>
+        <a:solidFill>
+          <a:srgbClr val="0F0F0F"/>
+        </a:solidFill>
         <a:effectLst/>
       </p:bgPr>
     </p:bg>
@@ -1817,36 +4819,237 @@
         <p:cNvGrpSpPr/>
         <p:nvPr/>
       </p:nvGrpSpPr>
-      <p:grpSpPr>
-        <a:xfrm>
-          <a:off x="0" y="0"/>
-          <a:ext cx="0" cy="0"/>
-          <a:chOff x="0" y="0"/>
-          <a:chExt cx="0" cy="0"/>
-        </a:xfrm>
-      </p:grpSpPr>
+      <p:grpSpPr/>
+      <p:sp>
+        <p:nvSpPr>
+          <p:cNvPr id="2" name="TextBox 1"/>
+          <p:cNvSpPr txBox="1"/>
+          <p:nvPr/>
+        </p:nvSpPr>
+        <p:spPr>
+          <a:xfrm>
+            <a:off x="1097280" y="1371600"/>
+            <a:ext cx="9601200" cy="1371600"/>
+          </a:xfrm>
+          <a:prstGeom prst="rect">
+            <a:avLst/>
+          </a:prstGeom>
+          <a:noFill/>
+        </p:spPr>
+        <p:txBody>
+          <a:bodyPr wrap="square"/>
+          <a:lstStyle/>
+          <a:p>
+            <a:pPr algn="l">
+              <a:defRPr sz="4400" b="1">
+                <a:solidFill>
+                  <a:srgbClr val="F6F7F8"/>
+                </a:solidFill>
+                <a:latin typeface="Lora"/>
+              </a:defRPr>
+            </a:pPr>
+            <a:r>
+              <a:t>Transparency First</a:t>
+            </a:r>
+          </a:p>
+        </p:txBody>
+      </p:sp>
+      <p:sp>
+        <p:nvSpPr>
+          <p:cNvPr id="3" name="TextBox 2"/>
+          <p:cNvSpPr txBox="1"/>
+          <p:nvPr/>
+        </p:nvSpPr>
+        <p:spPr>
+          <a:xfrm>
+            <a:off x="1097280" y="3108960"/>
+            <a:ext cx="9601200" cy="548640"/>
+          </a:xfrm>
+          <a:prstGeom prst="rect">
+            <a:avLst/>
+          </a:prstGeom>
+          <a:noFill/>
+        </p:spPr>
+        <p:txBody>
+          <a:bodyPr wrap="square"/>
+          <a:lstStyle/>
+          <a:p>
+            <a:pPr algn="l"/>
+            <a:r>
+              <a:rPr sz="2200" b="1">
+                <a:solidFill>
+                  <a:srgbClr val="FDDA24"/>
+                </a:solidFill>
+                <a:latin typeface="Inter"/>
+              </a:rPr>
+              <a:t>Open, transparent base layer</a:t>
+            </a:r>
+            <a:r>
+              <a:rPr sz="2200" b="0">
+                <a:solidFill>
+                  <a:srgbClr val="D6D2C4"/>
+                </a:solidFill>
+                <a:latin typeface="Inter"/>
+              </a:rPr>
+              <a:t> -- maximally auditable source of truth</a:t>
+            </a:r>
+          </a:p>
+        </p:txBody>
+      </p:sp>
+      <p:sp>
+        <p:nvSpPr>
+          <p:cNvPr id="4" name="TextBox 3"/>
+          <p:cNvSpPr txBox="1"/>
+          <p:nvPr/>
+        </p:nvSpPr>
+        <p:spPr>
+          <a:xfrm>
+            <a:off x="1097280" y="3749040"/>
+            <a:ext cx="9601200" cy="548640"/>
+          </a:xfrm>
+          <a:prstGeom prst="rect">
+            <a:avLst/>
+          </a:prstGeom>
+          <a:noFill/>
+        </p:spPr>
+        <p:txBody>
+          <a:bodyPr wrap="square"/>
+          <a:lstStyle/>
+          <a:p>
+            <a:pPr algn="l"/>
+            <a:r>
+              <a:rPr sz="2200" b="1">
+                <a:solidFill>
+                  <a:srgbClr val="FDDA24"/>
+                </a:solidFill>
+                <a:latin typeface="Inter"/>
+              </a:rPr>
+              <a:t>Privacy protocols built on top</a:t>
+            </a:r>
+            <a:r>
+              <a:rPr sz="2200" b="0">
+                <a:solidFill>
+                  <a:srgbClr val="D6D2C4"/>
+                </a:solidFill>
+                <a:latin typeface="Inter"/>
+              </a:rPr>
+              <a:t> -- configurable, opt-in, different tech for different needs</a:t>
+            </a:r>
+          </a:p>
+        </p:txBody>
+      </p:sp>
     </p:spTree>
   </p:cSld>
   <p:clrMapOvr>
     <a:masterClrMapping/>
   </p:clrMapOvr>
+  <p:timing>
+    <p:tnLst>
+      <p:par>
+        <p:cTn id="1" dur="indefinite" restart="never" nodeType="tmRoot">
+          <p:childTnLst>
+            <p:seq concurrent="1" nextAc="seek">
+              <p:cTn id="2" dur="indefinite" nodeType="mainSeq">
+                <p:childTnLst>
+                  <p:par>
+                    <p:cTn id="3" fill="hold">
+                      <p:stCondLst>
+                        <p:cond delay="0"/>
+                      </p:stCondLst>
+                      <p:childTnLst>
+                        <p:par>
+                          <p:cTn id="4" presetID="1" presetClass="entr" presetSubtype="0" fill="hold" nodeType="clickEffect">
+                            <p:stCondLst>
+                              <p:cond delay="0"/>
+                            </p:stCondLst>
+                            <p:childTnLst>
+                              <p:set>
+                                <p:cBhvr>
+                                  <p:cTn id="5" dur="1" fill="hold">
+                                    <p:stCondLst>
+                                      <p:cond delay="0"/>
+                                    </p:stCondLst>
+                                  </p:cTn>
+                                  <p:tgtEl>
+                                    <p:spTgt spid="3"/>
+                                  </p:tgtEl>
+                                </p:cBhvr>
+                                <p:to>
+                                  <p:strVal val="visible"/>
+                                </p:to>
+                              </p:set>
+                            </p:childTnLst>
+                          </p:cTn>
+                        </p:par>
+                      </p:childTnLst>
+                    </p:cTn>
+                  </p:par>
+                  <p:par>
+                    <p:cTn id="6" fill="hold">
+                      <p:stCondLst>
+                        <p:cond delay="0"/>
+                      </p:stCondLst>
+                      <p:childTnLst>
+                        <p:par>
+                          <p:cTn id="7" presetID="1" presetClass="entr" presetSubtype="0" fill="hold" nodeType="clickEffect">
+                            <p:stCondLst>
+                              <p:cond delay="0"/>
+                            </p:stCondLst>
+                            <p:childTnLst>
+                              <p:set>
+                                <p:cBhvr>
+                                  <p:cTn id="8" dur="1" fill="hold">
+                                    <p:stCondLst>
+                                      <p:cond delay="0"/>
+                                    </p:stCondLst>
+                                  </p:cTn>
+                                  <p:tgtEl>
+                                    <p:spTgt spid="4"/>
+                                  </p:tgtEl>
+                                </p:cBhvr>
+                                <p:to>
+                                  <p:strVal val="visible"/>
+                                </p:to>
+                              </p:set>
+                            </p:childTnLst>
+                          </p:cTn>
+                        </p:par>
+                      </p:childTnLst>
+                    </p:cTn>
+                  </p:par>
+                </p:childTnLst>
+              </p:cTn>
+              <p:prevCondLst>
+                <p:cond evt="onPrev" delay="0">
+                  <p:tgtEl>
+                    <p:sldTgt/>
+                  </p:tgtEl>
+                </p:cond>
+              </p:prevCondLst>
+              <p:nextCondLst>
+                <p:cond evt="onNext" delay="0">
+                  <p:tgtEl>
+                    <p:sldTgt/>
+                  </p:tgtEl>
+                </p:cond>
+              </p:nextCondLst>
+            </p:seq>
+          </p:childTnLst>
+        </p:cTn>
+      </p:par>
+    </p:tnLst>
+  </p:timing>
 </p:sld>
 </file>
 
 <file path=ppt/slides/slide7.xml><?xml version="1.0" encoding="utf-8"?>
-<p:sld xmlns:a="http://schemas.openxmlformats.org/drawingml/2006/main" xmlns:r="http://schemas.openxmlformats.org/officeDocument/2006/relationships" xmlns:p="http://schemas.openxmlformats.org/presentationml/2006/main">
-  <p:cSld name="Slide 7">
+<p:sld xmlns:a="http://schemas.openxmlformats.org/drawingml/2006/main" xmlns:p="http://schemas.openxmlformats.org/presentationml/2006/main" xmlns:r="http://schemas.openxmlformats.org/officeDocument/2006/relationships">
+  <p:cSld>
     <p:bg>
       <p:bgPr>
-        <a:blipFill dpi="0" rotWithShape="1">
-          <a:blip r:embed="rId1">
-            <a:lum/>
-          </a:blip>
-          <a:srcRect/>
-          <a:stretch>
-            <a:fillRect/>
-          </a:stretch>
-        </a:blipFill>
+        <a:solidFill>
+          <a:srgbClr val="0F0F0F"/>
+        </a:solidFill>
         <a:effectLst/>
       </p:bgPr>
     </p:bg>
@@ -1856,36 +5059,237 @@
         <p:cNvGrpSpPr/>
         <p:nvPr/>
       </p:nvGrpSpPr>
-      <p:grpSpPr>
-        <a:xfrm>
-          <a:off x="0" y="0"/>
-          <a:ext cx="0" cy="0"/>
-          <a:chOff x="0" y="0"/>
-          <a:chExt cx="0" cy="0"/>
-        </a:xfrm>
-      </p:grpSpPr>
+      <p:grpSpPr/>
+      <p:sp>
+        <p:nvSpPr>
+          <p:cNvPr id="2" name="TextBox 1"/>
+          <p:cNvSpPr txBox="1"/>
+          <p:nvPr/>
+        </p:nvSpPr>
+        <p:spPr>
+          <a:xfrm>
+            <a:off x="1097280" y="1371600"/>
+            <a:ext cx="9601200" cy="1371600"/>
+          </a:xfrm>
+          <a:prstGeom prst="rect">
+            <a:avLst/>
+          </a:prstGeom>
+          <a:noFill/>
+        </p:spPr>
+        <p:txBody>
+          <a:bodyPr wrap="square"/>
+          <a:lstStyle/>
+          <a:p>
+            <a:pPr algn="l">
+              <a:defRPr sz="4400" b="1">
+                <a:solidFill>
+                  <a:srgbClr val="F6F7F8"/>
+                </a:solidFill>
+                <a:latin typeface="Lora"/>
+              </a:defRPr>
+            </a:pPr>
+            <a:r>
+              <a:t>Private Payments</a:t>
+            </a:r>
+          </a:p>
+        </p:txBody>
+      </p:sp>
+      <p:sp>
+        <p:nvSpPr>
+          <p:cNvPr id="3" name="TextBox 2"/>
+          <p:cNvSpPr txBox="1"/>
+          <p:nvPr/>
+        </p:nvSpPr>
+        <p:spPr>
+          <a:xfrm>
+            <a:off x="1097280" y="3108960"/>
+            <a:ext cx="9601200" cy="548640"/>
+          </a:xfrm>
+          <a:prstGeom prst="rect">
+            <a:avLst/>
+          </a:prstGeom>
+          <a:noFill/>
+        </p:spPr>
+        <p:txBody>
+          <a:bodyPr wrap="square"/>
+          <a:lstStyle/>
+          <a:p>
+            <a:pPr algn="l"/>
+            <a:r>
+              <a:rPr sz="2200" b="1">
+                <a:solidFill>
+                  <a:srgbClr val="FDDA24"/>
+                </a:solidFill>
+                <a:latin typeface="Inter"/>
+              </a:rPr>
+              <a:t>Confidential Tokens</a:t>
+            </a:r>
+            <a:r>
+              <a:rPr sz="2200" b="0">
+                <a:solidFill>
+                  <a:srgbClr val="D6D2C4"/>
+                </a:solidFill>
+                <a:latin typeface="Inter"/>
+              </a:rPr>
+              <a:t> -- hide the what (amounts, balances)</a:t>
+            </a:r>
+          </a:p>
+        </p:txBody>
+      </p:sp>
+      <p:sp>
+        <p:nvSpPr>
+          <p:cNvPr id="4" name="TextBox 3"/>
+          <p:cNvSpPr txBox="1"/>
+          <p:nvPr/>
+        </p:nvSpPr>
+        <p:spPr>
+          <a:xfrm>
+            <a:off x="1097280" y="3749040"/>
+            <a:ext cx="9601200" cy="548640"/>
+          </a:xfrm>
+          <a:prstGeom prst="rect">
+            <a:avLst/>
+          </a:prstGeom>
+          <a:noFill/>
+        </p:spPr>
+        <p:txBody>
+          <a:bodyPr wrap="square"/>
+          <a:lstStyle/>
+          <a:p>
+            <a:pPr algn="l"/>
+            <a:r>
+              <a:rPr sz="2200" b="1">
+                <a:solidFill>
+                  <a:srgbClr val="FDDA24"/>
+                </a:solidFill>
+                <a:latin typeface="Inter"/>
+              </a:rPr>
+              <a:t>Privacy Pools</a:t>
+            </a:r>
+            <a:r>
+              <a:rPr sz="2200" b="0">
+                <a:solidFill>
+                  <a:srgbClr val="D6D2C4"/>
+                </a:solidFill>
+                <a:latin typeface="Inter"/>
+              </a:rPr>
+              <a:t> -- hide the who (sender, receiver)</a:t>
+            </a:r>
+          </a:p>
+        </p:txBody>
+      </p:sp>
     </p:spTree>
   </p:cSld>
   <p:clrMapOvr>
     <a:masterClrMapping/>
   </p:clrMapOvr>
+  <p:timing>
+    <p:tnLst>
+      <p:par>
+        <p:cTn id="1" dur="indefinite" restart="never" nodeType="tmRoot">
+          <p:childTnLst>
+            <p:seq concurrent="1" nextAc="seek">
+              <p:cTn id="2" dur="indefinite" nodeType="mainSeq">
+                <p:childTnLst>
+                  <p:par>
+                    <p:cTn id="3" fill="hold">
+                      <p:stCondLst>
+                        <p:cond delay="0"/>
+                      </p:stCondLst>
+                      <p:childTnLst>
+                        <p:par>
+                          <p:cTn id="4" presetID="1" presetClass="entr" presetSubtype="0" fill="hold" nodeType="clickEffect">
+                            <p:stCondLst>
+                              <p:cond delay="0"/>
+                            </p:stCondLst>
+                            <p:childTnLst>
+                              <p:set>
+                                <p:cBhvr>
+                                  <p:cTn id="5" dur="1" fill="hold">
+                                    <p:stCondLst>
+                                      <p:cond delay="0"/>
+                                    </p:stCondLst>
+                                  </p:cTn>
+                                  <p:tgtEl>
+                                    <p:spTgt spid="3"/>
+                                  </p:tgtEl>
+                                </p:cBhvr>
+                                <p:to>
+                                  <p:strVal val="visible"/>
+                                </p:to>
+                              </p:set>
+                            </p:childTnLst>
+                          </p:cTn>
+                        </p:par>
+                      </p:childTnLst>
+                    </p:cTn>
+                  </p:par>
+                  <p:par>
+                    <p:cTn id="6" fill="hold">
+                      <p:stCondLst>
+                        <p:cond delay="0"/>
+                      </p:stCondLst>
+                      <p:childTnLst>
+                        <p:par>
+                          <p:cTn id="7" presetID="1" presetClass="entr" presetSubtype="0" fill="hold" nodeType="clickEffect">
+                            <p:stCondLst>
+                              <p:cond delay="0"/>
+                            </p:stCondLst>
+                            <p:childTnLst>
+                              <p:set>
+                                <p:cBhvr>
+                                  <p:cTn id="8" dur="1" fill="hold">
+                                    <p:stCondLst>
+                                      <p:cond delay="0"/>
+                                    </p:stCondLst>
+                                  </p:cTn>
+                                  <p:tgtEl>
+                                    <p:spTgt spid="4"/>
+                                  </p:tgtEl>
+                                </p:cBhvr>
+                                <p:to>
+                                  <p:strVal val="visible"/>
+                                </p:to>
+                              </p:set>
+                            </p:childTnLst>
+                          </p:cTn>
+                        </p:par>
+                      </p:childTnLst>
+                    </p:cTn>
+                  </p:par>
+                </p:childTnLst>
+              </p:cTn>
+              <p:prevCondLst>
+                <p:cond evt="onPrev" delay="0">
+                  <p:tgtEl>
+                    <p:sldTgt/>
+                  </p:tgtEl>
+                </p:cond>
+              </p:prevCondLst>
+              <p:nextCondLst>
+                <p:cond evt="onNext" delay="0">
+                  <p:tgtEl>
+                    <p:sldTgt/>
+                  </p:tgtEl>
+                </p:cond>
+              </p:nextCondLst>
+            </p:seq>
+          </p:childTnLst>
+        </p:cTn>
+      </p:par>
+    </p:tnLst>
+  </p:timing>
 </p:sld>
 </file>
 
 <file path=ppt/slides/slide8.xml><?xml version="1.0" encoding="utf-8"?>
-<p:sld xmlns:a="http://schemas.openxmlformats.org/drawingml/2006/main" xmlns:r="http://schemas.openxmlformats.org/officeDocument/2006/relationships" xmlns:p="http://schemas.openxmlformats.org/presentationml/2006/main">
-  <p:cSld name="Slide 8">
+<p:sld xmlns:a="http://schemas.openxmlformats.org/drawingml/2006/main" xmlns:p="http://schemas.openxmlformats.org/presentationml/2006/main" xmlns:r="http://schemas.openxmlformats.org/officeDocument/2006/relationships">
+  <p:cSld>
     <p:bg>
       <p:bgPr>
-        <a:blipFill dpi="0" rotWithShape="1">
-          <a:blip r:embed="rId1">
-            <a:lum/>
-          </a:blip>
-          <a:srcRect/>
-          <a:stretch>
-            <a:fillRect/>
-          </a:stretch>
-        </a:blipFill>
+        <a:solidFill>
+          <a:srgbClr val="0F0F0F"/>
+        </a:solidFill>
         <a:effectLst/>
       </p:bgPr>
     </p:bg>
@@ -1895,36 +5299,417 @@
         <p:cNvGrpSpPr/>
         <p:nvPr/>
       </p:nvGrpSpPr>
-      <p:grpSpPr>
-        <a:xfrm>
-          <a:off x="0" y="0"/>
-          <a:ext cx="0" cy="0"/>
-          <a:chOff x="0" y="0"/>
-          <a:chExt cx="0" cy="0"/>
-        </a:xfrm>
-      </p:grpSpPr>
+      <p:grpSpPr/>
+      <p:sp>
+        <p:nvSpPr>
+          <p:cNvPr id="2" name="TextBox 1"/>
+          <p:cNvSpPr txBox="1"/>
+          <p:nvPr/>
+        </p:nvSpPr>
+        <p:spPr>
+          <a:xfrm>
+            <a:off x="1097280" y="1371600"/>
+            <a:ext cx="9601200" cy="1371600"/>
+          </a:xfrm>
+          <a:prstGeom prst="rect">
+            <a:avLst/>
+          </a:prstGeom>
+          <a:noFill/>
+        </p:spPr>
+        <p:txBody>
+          <a:bodyPr wrap="square"/>
+          <a:lstStyle/>
+          <a:p>
+            <a:pPr algn="l">
+              <a:defRPr sz="4400" b="1">
+                <a:solidFill>
+                  <a:srgbClr val="F6F7F8"/>
+                </a:solidFill>
+                <a:latin typeface="Lora"/>
+              </a:defRPr>
+            </a:pPr>
+            <a:r>
+              <a:t>Privacy Compliance* Menu</a:t>
+            </a:r>
+          </a:p>
+        </p:txBody>
+      </p:sp>
+      <p:sp>
+        <p:nvSpPr>
+          <p:cNvPr id="3" name="TextBox 2"/>
+          <p:cNvSpPr txBox="1"/>
+          <p:nvPr/>
+        </p:nvSpPr>
+        <p:spPr>
+          <a:xfrm>
+            <a:off x="1097280" y="3108960"/>
+            <a:ext cx="9601200" cy="548640"/>
+          </a:xfrm>
+          <a:prstGeom prst="rect">
+            <a:avLst/>
+          </a:prstGeom>
+          <a:noFill/>
+        </p:spPr>
+        <p:txBody>
+          <a:bodyPr wrap="square"/>
+          <a:lstStyle/>
+          <a:p>
+            <a:pPr algn="l"/>
+            <a:r>
+              <a:rPr sz="2200" b="1">
+                <a:solidFill>
+                  <a:srgbClr val="FDDA24"/>
+                </a:solidFill>
+                <a:latin typeface="Inter"/>
+              </a:rPr>
+              <a:t>Selective Disclosure (View Keys)</a:t>
+            </a:r>
+          </a:p>
+        </p:txBody>
+      </p:sp>
+      <p:sp>
+        <p:nvSpPr>
+          <p:cNvPr id="4" name="TextBox 3"/>
+          <p:cNvSpPr txBox="1"/>
+          <p:nvPr/>
+        </p:nvSpPr>
+        <p:spPr>
+          <a:xfrm>
+            <a:off x="1097280" y="3749040"/>
+            <a:ext cx="9601200" cy="548640"/>
+          </a:xfrm>
+          <a:prstGeom prst="rect">
+            <a:avLst/>
+          </a:prstGeom>
+          <a:noFill/>
+        </p:spPr>
+        <p:txBody>
+          <a:bodyPr wrap="square"/>
+          <a:lstStyle/>
+          <a:p>
+            <a:pPr algn="l"/>
+            <a:r>
+              <a:rPr sz="2200" b="1">
+                <a:solidFill>
+                  <a:srgbClr val="FDDA24"/>
+                </a:solidFill>
+                <a:latin typeface="Inter"/>
+              </a:rPr>
+              <a:t>Non-Selective Disclosure (Auditor Keys)</a:t>
+            </a:r>
+          </a:p>
+        </p:txBody>
+      </p:sp>
+      <p:sp>
+        <p:nvSpPr>
+          <p:cNvPr id="5" name="TextBox 4"/>
+          <p:cNvSpPr txBox="1"/>
+          <p:nvPr/>
+        </p:nvSpPr>
+        <p:spPr>
+          <a:xfrm>
+            <a:off x="1097280" y="4389120"/>
+            <a:ext cx="9601200" cy="548640"/>
+          </a:xfrm>
+          <a:prstGeom prst="rect">
+            <a:avLst/>
+          </a:prstGeom>
+          <a:noFill/>
+        </p:spPr>
+        <p:txBody>
+          <a:bodyPr wrap="square"/>
+          <a:lstStyle/>
+          <a:p>
+            <a:pPr algn="l"/>
+            <a:r>
+              <a:rPr sz="2200" b="1">
+                <a:solidFill>
+                  <a:srgbClr val="FDDA24"/>
+                </a:solidFill>
+                <a:latin typeface="Inter"/>
+              </a:rPr>
+              <a:t>Association Sets</a:t>
+            </a:r>
+          </a:p>
+        </p:txBody>
+      </p:sp>
+      <p:sp>
+        <p:nvSpPr>
+          <p:cNvPr id="6" name="TextBox 5"/>
+          <p:cNvSpPr txBox="1"/>
+          <p:nvPr/>
+        </p:nvSpPr>
+        <p:spPr>
+          <a:xfrm>
+            <a:off x="1097280" y="5029200"/>
+            <a:ext cx="9601200" cy="548640"/>
+          </a:xfrm>
+          <a:prstGeom prst="rect">
+            <a:avLst/>
+          </a:prstGeom>
+          <a:noFill/>
+        </p:spPr>
+        <p:txBody>
+          <a:bodyPr wrap="square"/>
+          <a:lstStyle/>
+          <a:p>
+            <a:pPr algn="l"/>
+            <a:r>
+              <a:rPr sz="2200" b="1">
+                <a:solidFill>
+                  <a:srgbClr val="FDDA24"/>
+                </a:solidFill>
+                <a:latin typeface="Inter"/>
+              </a:rPr>
+              <a:t>Forced Transparent Withdrawals</a:t>
+            </a:r>
+          </a:p>
+        </p:txBody>
+      </p:sp>
+      <p:sp>
+        <p:nvSpPr>
+          <p:cNvPr id="7" name="TextBox 6"/>
+          <p:cNvSpPr txBox="1"/>
+          <p:nvPr/>
+        </p:nvSpPr>
+        <p:spPr>
+          <a:xfrm>
+            <a:off x="1097280" y="5669280"/>
+            <a:ext cx="9601200" cy="548640"/>
+          </a:xfrm>
+          <a:prstGeom prst="rect">
+            <a:avLst/>
+          </a:prstGeom>
+          <a:noFill/>
+        </p:spPr>
+        <p:txBody>
+          <a:bodyPr wrap="square"/>
+          <a:lstStyle/>
+          <a:p>
+            <a:pPr algn="l"/>
+            <a:r>
+              <a:rPr sz="2200" b="1">
+                <a:solidFill>
+                  <a:srgbClr val="FDDA24"/>
+                </a:solidFill>
+                <a:latin typeface="Inter"/>
+              </a:rPr>
+              <a:t>Clawback</a:t>
+            </a:r>
+          </a:p>
+        </p:txBody>
+      </p:sp>
     </p:spTree>
   </p:cSld>
   <p:clrMapOvr>
     <a:masterClrMapping/>
   </p:clrMapOvr>
+  <p:timing>
+    <p:tnLst>
+      <p:par>
+        <p:cTn id="1" dur="indefinite" restart="never" nodeType="tmRoot">
+          <p:childTnLst>
+            <p:seq concurrent="1" nextAc="seek">
+              <p:cTn id="2" dur="indefinite" nodeType="mainSeq">
+                <p:childTnLst>
+                  <p:par>
+                    <p:cTn id="3" fill="hold">
+                      <p:stCondLst>
+                        <p:cond delay="0"/>
+                      </p:stCondLst>
+                      <p:childTnLst>
+                        <p:par>
+                          <p:cTn id="4" presetID="1" presetClass="entr" presetSubtype="0" fill="hold" nodeType="clickEffect">
+                            <p:stCondLst>
+                              <p:cond delay="0"/>
+                            </p:stCondLst>
+                            <p:childTnLst>
+                              <p:set>
+                                <p:cBhvr>
+                                  <p:cTn id="5" dur="1" fill="hold">
+                                    <p:stCondLst>
+                                      <p:cond delay="0"/>
+                                    </p:stCondLst>
+                                  </p:cTn>
+                                  <p:tgtEl>
+                                    <p:spTgt spid="3"/>
+                                  </p:tgtEl>
+                                </p:cBhvr>
+                                <p:to>
+                                  <p:strVal val="visible"/>
+                                </p:to>
+                              </p:set>
+                            </p:childTnLst>
+                          </p:cTn>
+                        </p:par>
+                      </p:childTnLst>
+                    </p:cTn>
+                  </p:par>
+                  <p:par>
+                    <p:cTn id="6" fill="hold">
+                      <p:stCondLst>
+                        <p:cond delay="0"/>
+                      </p:stCondLst>
+                      <p:childTnLst>
+                        <p:par>
+                          <p:cTn id="7" presetID="1" presetClass="entr" presetSubtype="0" fill="hold" nodeType="clickEffect">
+                            <p:stCondLst>
+                              <p:cond delay="0"/>
+                            </p:stCondLst>
+                            <p:childTnLst>
+                              <p:set>
+                                <p:cBhvr>
+                                  <p:cTn id="8" dur="1" fill="hold">
+                                    <p:stCondLst>
+                                      <p:cond delay="0"/>
+                                    </p:stCondLst>
+                                  </p:cTn>
+                                  <p:tgtEl>
+                                    <p:spTgt spid="4"/>
+                                  </p:tgtEl>
+                                </p:cBhvr>
+                                <p:to>
+                                  <p:strVal val="visible"/>
+                                </p:to>
+                              </p:set>
+                            </p:childTnLst>
+                          </p:cTn>
+                        </p:par>
+                      </p:childTnLst>
+                    </p:cTn>
+                  </p:par>
+                  <p:par>
+                    <p:cTn id="9" fill="hold">
+                      <p:stCondLst>
+                        <p:cond delay="0"/>
+                      </p:stCondLst>
+                      <p:childTnLst>
+                        <p:par>
+                          <p:cTn id="10" presetID="1" presetClass="entr" presetSubtype="0" fill="hold" nodeType="clickEffect">
+                            <p:stCondLst>
+                              <p:cond delay="0"/>
+                            </p:stCondLst>
+                            <p:childTnLst>
+                              <p:set>
+                                <p:cBhvr>
+                                  <p:cTn id="11" dur="1" fill="hold">
+                                    <p:stCondLst>
+                                      <p:cond delay="0"/>
+                                    </p:stCondLst>
+                                  </p:cTn>
+                                  <p:tgtEl>
+                                    <p:spTgt spid="5"/>
+                                  </p:tgtEl>
+                                </p:cBhvr>
+                                <p:to>
+                                  <p:strVal val="visible"/>
+                                </p:to>
+                              </p:set>
+                            </p:childTnLst>
+                          </p:cTn>
+                        </p:par>
+                      </p:childTnLst>
+                    </p:cTn>
+                  </p:par>
+                  <p:par>
+                    <p:cTn id="12" fill="hold">
+                      <p:stCondLst>
+                        <p:cond delay="0"/>
+                      </p:stCondLst>
+                      <p:childTnLst>
+                        <p:par>
+                          <p:cTn id="13" presetID="1" presetClass="entr" presetSubtype="0" fill="hold" nodeType="clickEffect">
+                            <p:stCondLst>
+                              <p:cond delay="0"/>
+                            </p:stCondLst>
+                            <p:childTnLst>
+                              <p:set>
+                                <p:cBhvr>
+                                  <p:cTn id="14" dur="1" fill="hold">
+                                    <p:stCondLst>
+                                      <p:cond delay="0"/>
+                                    </p:stCondLst>
+                                  </p:cTn>
+                                  <p:tgtEl>
+                                    <p:spTgt spid="6"/>
+                                  </p:tgtEl>
+                                </p:cBhvr>
+                                <p:to>
+                                  <p:strVal val="visible"/>
+                                </p:to>
+                              </p:set>
+                            </p:childTnLst>
+                          </p:cTn>
+                        </p:par>
+                      </p:childTnLst>
+                    </p:cTn>
+                  </p:par>
+                  <p:par>
+                    <p:cTn id="15" fill="hold">
+                      <p:stCondLst>
+                        <p:cond delay="0"/>
+                      </p:stCondLst>
+                      <p:childTnLst>
+                        <p:par>
+                          <p:cTn id="16" presetID="1" presetClass="entr" presetSubtype="0" fill="hold" nodeType="clickEffect">
+                            <p:stCondLst>
+                              <p:cond delay="0"/>
+                            </p:stCondLst>
+                            <p:childTnLst>
+                              <p:set>
+                                <p:cBhvr>
+                                  <p:cTn id="17" dur="1" fill="hold">
+                                    <p:stCondLst>
+                                      <p:cond delay="0"/>
+                                    </p:stCondLst>
+                                  </p:cTn>
+                                  <p:tgtEl>
+                                    <p:spTgt spid="7"/>
+                                  </p:tgtEl>
+                                </p:cBhvr>
+                                <p:to>
+                                  <p:strVal val="visible"/>
+                                </p:to>
+                              </p:set>
+                            </p:childTnLst>
+                          </p:cTn>
+                        </p:par>
+                      </p:childTnLst>
+                    </p:cTn>
+                  </p:par>
+                </p:childTnLst>
+              </p:cTn>
+              <p:prevCondLst>
+                <p:cond evt="onPrev" delay="0">
+                  <p:tgtEl>
+                    <p:sldTgt/>
+                  </p:tgtEl>
+                </p:cond>
+              </p:prevCondLst>
+              <p:nextCondLst>
+                <p:cond evt="onNext" delay="0">
+                  <p:tgtEl>
+                    <p:sldTgt/>
+                  </p:tgtEl>
+                </p:cond>
+              </p:nextCondLst>
+            </p:seq>
+          </p:childTnLst>
+        </p:cTn>
+      </p:par>
+    </p:tnLst>
+  </p:timing>
 </p:sld>
 </file>
 
 <file path=ppt/slides/slide9.xml><?xml version="1.0" encoding="utf-8"?>
-<p:sld xmlns:a="http://schemas.openxmlformats.org/drawingml/2006/main" xmlns:r="http://schemas.openxmlformats.org/officeDocument/2006/relationships" xmlns:p="http://schemas.openxmlformats.org/presentationml/2006/main">
-  <p:cSld name="Slide 9">
+<p:sld xmlns:a="http://schemas.openxmlformats.org/drawingml/2006/main" xmlns:p="http://schemas.openxmlformats.org/presentationml/2006/main" xmlns:r="http://schemas.openxmlformats.org/officeDocument/2006/relationships">
+  <p:cSld>
     <p:bg>
       <p:bgPr>
-        <a:blipFill dpi="0" rotWithShape="1">
-          <a:blip r:embed="rId1">
-            <a:lum/>
-          </a:blip>
-          <a:srcRect/>
-          <a:stretch>
-            <a:fillRect/>
-          </a:stretch>
-        </a:blipFill>
+        <a:solidFill>
+          <a:srgbClr val="0F0F0F"/>
+        </a:solidFill>
         <a:effectLst/>
       </p:bgPr>
     </p:bg>
@@ -1934,14 +5719,45 @@
         <p:cNvGrpSpPr/>
         <p:nvPr/>
       </p:nvGrpSpPr>
-      <p:grpSpPr>
-        <a:xfrm>
-          <a:off x="0" y="0"/>
-          <a:ext cx="0" cy="0"/>
-          <a:chOff x="0" y="0"/>
-          <a:chExt cx="0" cy="0"/>
-        </a:xfrm>
-      </p:grpSpPr>
+      <p:grpSpPr/>
+      <p:sp>
+        <p:nvSpPr>
+          <p:cNvPr id="2" name="TextBox 1"/>
+          <p:cNvSpPr txBox="1"/>
+          <p:nvPr/>
+        </p:nvSpPr>
+        <p:spPr>
+          <a:xfrm>
+            <a:off x="1097280" y="2560320"/>
+            <a:ext cx="9601200" cy="2286000"/>
+          </a:xfrm>
+          <a:prstGeom prst="rect">
+            <a:avLst/>
+          </a:prstGeom>
+          <a:noFill/>
+        </p:spPr>
+        <p:txBody>
+          <a:bodyPr wrap="square"/>
+          <a:lstStyle/>
+          <a:p>
+            <a:pPr algn="l">
+              <a:defRPr sz="5400" b="1">
+                <a:solidFill>
+                  <a:srgbClr val="F6F7F8"/>
+                </a:solidFill>
+                <a:latin typeface="Lora"/>
+              </a:defRPr>
+            </a:pPr>
+            <a:r>
+              <a:t>Privacy That Doesn't</a:t>
+            </a:r>
+            <a:br/>
+            <a:r>
+              <a:t>Break the Chain</a:t>
+            </a:r>
+          </a:p>
+        </p:txBody>
+      </p:sp>
     </p:spTree>
   </p:cSld>
   <p:clrMapOvr>
@@ -1961,44 +5777,44 @@
         <a:sysClr val="window" lastClr="FFFFFF"/>
       </a:lt1>
       <a:dk2>
-        <a:srgbClr val="44546A"/>
+        <a:srgbClr val="1F497D"/>
       </a:dk2>
       <a:lt2>
-        <a:srgbClr val="E7E6E6"/>
+        <a:srgbClr val="EEECE1"/>
       </a:lt2>
       <a:accent1>
-        <a:srgbClr val="4472C4"/>
+        <a:srgbClr val="4F81BD"/>
       </a:accent1>
       <a:accent2>
-        <a:srgbClr val="ED7D31"/>
+        <a:srgbClr val="C0504D"/>
       </a:accent2>
       <a:accent3>
-        <a:srgbClr val="A5A5A5"/>
+        <a:srgbClr val="9BBB59"/>
       </a:accent3>
       <a:accent4>
-        <a:srgbClr val="FFC000"/>
+        <a:srgbClr val="8064A2"/>
       </a:accent4>
       <a:accent5>
-        <a:srgbClr val="5B9BD5"/>
+        <a:srgbClr val="4BACC6"/>
       </a:accent5>
       <a:accent6>
-        <a:srgbClr val="70AD47"/>
+        <a:srgbClr val="F79646"/>
       </a:accent6>
       <a:hlink>
-        <a:srgbClr val="0563C1"/>
+        <a:srgbClr val="0000FF"/>
       </a:hlink>
       <a:folHlink>
-        <a:srgbClr val="954F72"/>
+        <a:srgbClr val="800080"/>
       </a:folHlink>
     </a:clrScheme>
     <a:fontScheme name="Office">
       <a:majorFont>
-        <a:latin typeface="Calibri Light" panose="020F0302020204030204"/>
+        <a:latin typeface="Calibri"/>
         <a:ea typeface=""/>
         <a:cs typeface=""/>
-        <a:font script="Jpan" typeface="游ゴシック Light"/>
+        <a:font script="Jpan" typeface="ＭＳ Ｐゴシック"/>
         <a:font script="Hang" typeface="맑은 고딕"/>
-        <a:font script="Hans" typeface="等线 Light"/>
+        <a:font script="Hans" typeface="宋体"/>
         <a:font script="Hant" typeface="新細明體"/>
         <a:font script="Arab" typeface="Times New Roman"/>
         <a:font script="Hebr" typeface="Times New Roman"/>
@@ -2026,31 +5842,14 @@
         <a:font script="Viet" typeface="Times New Roman"/>
         <a:font script="Uigh" typeface="Microsoft Uighur"/>
         <a:font script="Geor" typeface="Sylfaen"/>
-        <a:font script="Armn" typeface="Arial"/>
-        <a:font script="Bugi" typeface="Leelawadee UI"/>
-        <a:font script="Bopo" typeface="Microsoft JhengHei"/>
-        <a:font script="Java" typeface="Javanese Text"/>
-        <a:font script="Lisu" typeface="Segoe UI"/>
-        <a:font script="Mymr" typeface="Myanmar Text"/>
-        <a:font script="Nkoo" typeface="Ebrima"/>
-        <a:font script="Olck" typeface="Nirmala UI"/>
-        <a:font script="Osma" typeface="Ebrima"/>
-        <a:font script="Phag" typeface="Phagspa"/>
-        <a:font script="Syrn" typeface="Estrangelo Edessa"/>
-        <a:font script="Syrj" typeface="Estrangelo Edessa"/>
-        <a:font script="Syre" typeface="Estrangelo Edessa"/>
-        <a:font script="Sora" typeface="Nirmala UI"/>
-        <a:font script="Tale" typeface="Microsoft Tai Le"/>
-        <a:font script="Talu" typeface="Microsoft New Tai Lue"/>
-        <a:font script="Tfng" typeface="Ebrima"/>
       </a:majorFont>
       <a:minorFont>
-        <a:latin typeface="Calibri" panose="020F0502020204030204"/>
+        <a:latin typeface="Calibri"/>
         <a:ea typeface=""/>
         <a:cs typeface=""/>
-        <a:font script="Jpan" typeface="游ゴシック"/>
+        <a:font script="Jpan" typeface="ＭＳ Ｐゴシック"/>
         <a:font script="Hang" typeface="맑은 고딕"/>
-        <a:font script="Hans" typeface="等线"/>
+        <a:font script="Hans" typeface="宋体"/>
         <a:font script="Hant" typeface="新細明體"/>
         <a:font script="Arab" typeface="Arial"/>
         <a:font script="Hebr" typeface="Arial"/>
@@ -2078,23 +5877,6 @@
         <a:font script="Viet" typeface="Arial"/>
         <a:font script="Uigh" typeface="Microsoft Uighur"/>
         <a:font script="Geor" typeface="Sylfaen"/>
-        <a:font script="Armn" typeface="Arial"/>
-        <a:font script="Bugi" typeface="Leelawadee UI"/>
-        <a:font script="Bopo" typeface="Microsoft JhengHei"/>
-        <a:font script="Java" typeface="Javanese Text"/>
-        <a:font script="Lisu" typeface="Segoe UI"/>
-        <a:font script="Mymr" typeface="Myanmar Text"/>
-        <a:font script="Nkoo" typeface="Ebrima"/>
-        <a:font script="Olck" typeface="Nirmala UI"/>
-        <a:font script="Osma" typeface="Ebrima"/>
-        <a:font script="Phag" typeface="Phagspa"/>
-        <a:font script="Syrn" typeface="Estrangelo Edessa"/>
-        <a:font script="Syrj" typeface="Estrangelo Edessa"/>
-        <a:font script="Syre" typeface="Estrangelo Edessa"/>
-        <a:font script="Sora" typeface="Nirmala UI"/>
-        <a:font script="Tale" typeface="Microsoft Tai Le"/>
-        <a:font script="Talu" typeface="Microsoft New Tai Lue"/>
-        <a:font script="Tfng" typeface="Ebrima"/>
       </a:minorFont>
     </a:fontScheme>
     <a:fmtScheme name="Office">
@@ -2106,141 +5888,520 @@
           <a:gsLst>
             <a:gs pos="0">
               <a:schemeClr val="phClr">
-                <a:lumMod val="110000"/>
-                <a:satMod val="105000"/>
-                <a:tint val="67000"/>
+                <a:tint val="50000"/>
+                <a:satMod val="300000"/>
               </a:schemeClr>
             </a:gs>
-            <a:gs pos="50000">
+            <a:gs pos="35000">
               <a:schemeClr val="phClr">
-                <a:lumMod val="105000"/>
-                <a:satMod val="103000"/>
-                <a:tint val="73000"/>
+                <a:tint val="37000"/>
+                <a:satMod val="300000"/>
               </a:schemeClr>
             </a:gs>
             <a:gs pos="100000">
               <a:schemeClr val="phClr">
-                <a:lumMod val="105000"/>
-                <a:satMod val="109000"/>
-                <a:tint val="81000"/>
+                <a:tint val="15000"/>
+                <a:satMod val="350000"/>
               </a:schemeClr>
             </a:gs>
           </a:gsLst>
-          <a:lin ang="5400000" scaled="0"/>
+          <a:lin ang="16200000" scaled="1"/>
         </a:gradFill>
         <a:gradFill rotWithShape="1">
           <a:gsLst>
             <a:gs pos="0">
               <a:schemeClr val="phClr">
-                <a:satMod val="103000"/>
-                <a:lumMod val="102000"/>
-                <a:tint val="94000"/>
-              </a:schemeClr>
-            </a:gs>
-            <a:gs pos="50000">
-              <a:schemeClr val="phClr">
-                <a:satMod val="110000"/>
-                <a:lumMod val="100000"/>
+                <a:tint val="100000"/>
                 <a:shade val="100000"/>
+                <a:satMod val="130000"/>
               </a:schemeClr>
             </a:gs>
             <a:gs pos="100000">
               <a:schemeClr val="phClr">
-                <a:lumMod val="99000"/>
-                <a:satMod val="120000"/>
-                <a:shade val="78000"/>
+                <a:tint val="50000"/>
+                <a:shade val="100000"/>
+                <a:satMod val="350000"/>
               </a:schemeClr>
             </a:gs>
           </a:gsLst>
-          <a:lin ang="5400000" scaled="0"/>
+          <a:lin ang="16200000" scaled="0"/>
         </a:gradFill>
       </a:fillStyleLst>
       <a:lnStyleLst>
-        <a:ln w="6350" cap="flat" cmpd="sng" algn="ctr">
+        <a:ln w="9525" cap="flat" cmpd="sng" algn="ctr">
+          <a:solidFill>
+            <a:schemeClr val="phClr">
+              <a:shade val="95000"/>
+              <a:satMod val="105000"/>
+            </a:schemeClr>
+          </a:solidFill>
+          <a:prstDash val="solid"/>
+        </a:ln>
+        <a:ln w="25400" cap="flat" cmpd="sng" algn="ctr">
           <a:solidFill>
             <a:schemeClr val="phClr"/>
           </a:solidFill>
           <a:prstDash val="solid"/>
-          <a:miter lim="800000"/>
         </a:ln>
-        <a:ln w="12700" cap="flat" cmpd="sng" algn="ctr">
+        <a:ln w="38100" cap="flat" cmpd="sng" algn="ctr">
           <a:solidFill>
             <a:schemeClr val="phClr"/>
           </a:solidFill>
           <a:prstDash val="solid"/>
-          <a:miter lim="800000"/>
-        </a:ln>
-        <a:ln w="19050" cap="flat" cmpd="sng" algn="ctr">
-          <a:solidFill>
-            <a:schemeClr val="phClr"/>
-          </a:solidFill>
-          <a:prstDash val="solid"/>
-          <a:miter lim="800000"/>
         </a:ln>
       </a:lnStyleLst>
       <a:effectStyleLst>
         <a:effectStyle>
-          <a:effectLst/>
-        </a:effectStyle>
-        <a:effectStyle>
-          <a:effectLst/>
+          <a:effectLst>
+            <a:outerShdw blurRad="40000" dist="20000" dir="5400000" rotWithShape="0">
+              <a:srgbClr val="000000">
+                <a:alpha val="38000"/>
+              </a:srgbClr>
+            </a:outerShdw>
+          </a:effectLst>
         </a:effectStyle>
         <a:effectStyle>
           <a:effectLst>
-            <a:outerShdw blurRad="57150" dist="19050" dir="5400000" algn="ctr" rotWithShape="0">
+            <a:outerShdw blurRad="40000" dist="23000" dir="5400000" rotWithShape="0">
               <a:srgbClr val="000000">
-                <a:alpha val="63000"/>
+                <a:alpha val="35000"/>
               </a:srgbClr>
             </a:outerShdw>
           </a:effectLst>
+        </a:effectStyle>
+        <a:effectStyle>
+          <a:effectLst>
+            <a:outerShdw blurRad="40000" dist="23000" dir="5400000" rotWithShape="0">
+              <a:srgbClr val="000000">
+                <a:alpha val="35000"/>
+              </a:srgbClr>
+            </a:outerShdw>
+          </a:effectLst>
+          <a:scene3d>
+            <a:camera prst="orthographicFront">
+              <a:rot lat="0" lon="0" rev="0"/>
+            </a:camera>
+            <a:lightRig rig="threePt" dir="t">
+              <a:rot lat="0" lon="0" rev="1200000"/>
+            </a:lightRig>
+          </a:scene3d>
+          <a:sp3d>
+            <a:bevelT w="63500" h="25400"/>
+          </a:sp3d>
         </a:effectStyle>
       </a:effectStyleLst>
       <a:bgFillStyleLst>
         <a:solidFill>
           <a:schemeClr val="phClr"/>
         </a:solidFill>
+        <a:gradFill rotWithShape="1">
+          <a:gsLst>
+            <a:gs pos="0">
+              <a:schemeClr val="phClr">
+                <a:tint val="40000"/>
+                <a:satMod val="350000"/>
+              </a:schemeClr>
+            </a:gs>
+            <a:gs pos="40000">
+              <a:schemeClr val="phClr">
+                <a:tint val="45000"/>
+                <a:shade val="99000"/>
+                <a:satMod val="350000"/>
+              </a:schemeClr>
+            </a:gs>
+            <a:gs pos="100000">
+              <a:schemeClr val="phClr">
+                <a:shade val="20000"/>
+                <a:satMod val="255000"/>
+              </a:schemeClr>
+            </a:gs>
+          </a:gsLst>
+          <a:path path="circle">
+            <a:fillToRect l="50000" t="-80000" r="50000" b="180000"/>
+          </a:path>
+        </a:gradFill>
+        <a:gradFill rotWithShape="1">
+          <a:gsLst>
+            <a:gs pos="0">
+              <a:schemeClr val="phClr">
+                <a:tint val="80000"/>
+                <a:satMod val="300000"/>
+              </a:schemeClr>
+            </a:gs>
+            <a:gs pos="100000">
+              <a:schemeClr val="phClr">
+                <a:shade val="30000"/>
+                <a:satMod val="200000"/>
+              </a:schemeClr>
+            </a:gs>
+          </a:gsLst>
+          <a:path path="circle">
+            <a:fillToRect l="50000" t="50000" r="50000" b="50000"/>
+          </a:path>
+        </a:gradFill>
+      </a:bgFillStyleLst>
+    </a:fmtScheme>
+  </a:themeElements>
+  <a:objectDefaults>
+    <a:spDef>
+      <a:spPr/>
+      <a:bodyPr/>
+      <a:lstStyle/>
+      <a:style>
+        <a:lnRef idx="1">
+          <a:schemeClr val="accent1"/>
+        </a:lnRef>
+        <a:fillRef idx="3">
+          <a:schemeClr val="accent1"/>
+        </a:fillRef>
+        <a:effectRef idx="2">
+          <a:schemeClr val="accent1"/>
+        </a:effectRef>
+        <a:fontRef idx="minor">
+          <a:schemeClr val="lt1"/>
+        </a:fontRef>
+      </a:style>
+    </a:spDef>
+    <a:lnDef>
+      <a:spPr/>
+      <a:bodyPr/>
+      <a:lstStyle/>
+      <a:style>
+        <a:lnRef idx="2">
+          <a:schemeClr val="accent1"/>
+        </a:lnRef>
+        <a:fillRef idx="0">
+          <a:schemeClr val="accent1"/>
+        </a:fillRef>
+        <a:effectRef idx="1">
+          <a:schemeClr val="accent1"/>
+        </a:effectRef>
+        <a:fontRef idx="minor">
+          <a:schemeClr val="tx1"/>
+        </a:fontRef>
+      </a:style>
+    </a:lnDef>
+  </a:objectDefaults>
+  <a:extraClrSchemeLst/>
+</a:theme>
+</file>
+
+<file path=ppt/theme/theme2.xml><?xml version="1.0" encoding="utf-8"?>
+<a:theme xmlns:a="http://schemas.openxmlformats.org/drawingml/2006/main" name="Office Theme">
+  <a:themeElements>
+    <a:clrScheme name="Office">
+      <a:dk1>
+        <a:sysClr val="windowText" lastClr="000000"/>
+      </a:dk1>
+      <a:lt1>
+        <a:sysClr val="window" lastClr="FFFFFF"/>
+      </a:lt1>
+      <a:dk2>
+        <a:srgbClr val="1F497D"/>
+      </a:dk2>
+      <a:lt2>
+        <a:srgbClr val="EEECE1"/>
+      </a:lt2>
+      <a:accent1>
+        <a:srgbClr val="4F81BD"/>
+      </a:accent1>
+      <a:accent2>
+        <a:srgbClr val="C0504D"/>
+      </a:accent2>
+      <a:accent3>
+        <a:srgbClr val="9BBB59"/>
+      </a:accent3>
+      <a:accent4>
+        <a:srgbClr val="8064A2"/>
+      </a:accent4>
+      <a:accent5>
+        <a:srgbClr val="4BACC6"/>
+      </a:accent5>
+      <a:accent6>
+        <a:srgbClr val="F79646"/>
+      </a:accent6>
+      <a:hlink>
+        <a:srgbClr val="0000FF"/>
+      </a:hlink>
+      <a:folHlink>
+        <a:srgbClr val="800080"/>
+      </a:folHlink>
+    </a:clrScheme>
+    <a:fontScheme name="Office">
+      <a:majorFont>
+        <a:latin typeface="Calibri"/>
+        <a:ea typeface=""/>
+        <a:cs typeface=""/>
+        <a:font script="Jpan" typeface="ＭＳ Ｐゴシック"/>
+        <a:font script="Hang" typeface="맑은 고딕"/>
+        <a:font script="Hans" typeface="宋体"/>
+        <a:font script="Hant" typeface="新細明體"/>
+        <a:font script="Arab" typeface="Times New Roman"/>
+        <a:font script="Hebr" typeface="Times New Roman"/>
+        <a:font script="Thai" typeface="Angsana New"/>
+        <a:font script="Ethi" typeface="Nyala"/>
+        <a:font script="Beng" typeface="Vrinda"/>
+        <a:font script="Gujr" typeface="Shruti"/>
+        <a:font script="Khmr" typeface="MoolBoran"/>
+        <a:font script="Knda" typeface="Tunga"/>
+        <a:font script="Guru" typeface="Raavi"/>
+        <a:font script="Cans" typeface="Euphemia"/>
+        <a:font script="Cher" typeface="Plantagenet Cherokee"/>
+        <a:font script="Yiii" typeface="Microsoft Yi Baiti"/>
+        <a:font script="Tibt" typeface="Microsoft Himalaya"/>
+        <a:font script="Thaa" typeface="MV Boli"/>
+        <a:font script="Deva" typeface="Mangal"/>
+        <a:font script="Telu" typeface="Gautami"/>
+        <a:font script="Taml" typeface="Latha"/>
+        <a:font script="Syrc" typeface="Estrangelo Edessa"/>
+        <a:font script="Orya" typeface="Kalinga"/>
+        <a:font script="Mlym" typeface="Kartika"/>
+        <a:font script="Laoo" typeface="DokChampa"/>
+        <a:font script="Sinh" typeface="Iskoola Pota"/>
+        <a:font script="Mong" typeface="Mongolian Baiti"/>
+        <a:font script="Viet" typeface="Times New Roman"/>
+        <a:font script="Uigh" typeface="Microsoft Uighur"/>
+        <a:font script="Geor" typeface="Sylfaen"/>
+      </a:majorFont>
+      <a:minorFont>
+        <a:latin typeface="Calibri"/>
+        <a:ea typeface=""/>
+        <a:cs typeface=""/>
+        <a:font script="Jpan" typeface="ＭＳ Ｐゴシック"/>
+        <a:font script="Hang" typeface="맑은 고딕"/>
+        <a:font script="Hans" typeface="宋体"/>
+        <a:font script="Hant" typeface="新細明體"/>
+        <a:font script="Arab" typeface="Arial"/>
+        <a:font script="Hebr" typeface="Arial"/>
+        <a:font script="Thai" typeface="Cordia New"/>
+        <a:font script="Ethi" typeface="Nyala"/>
+        <a:font script="Beng" typeface="Vrinda"/>
+        <a:font script="Gujr" typeface="Shruti"/>
+        <a:font script="Khmr" typeface="DaunPenh"/>
+        <a:font script="Knda" typeface="Tunga"/>
+        <a:font script="Guru" typeface="Raavi"/>
+        <a:font script="Cans" typeface="Euphemia"/>
+        <a:font script="Cher" typeface="Plantagenet Cherokee"/>
+        <a:font script="Yiii" typeface="Microsoft Yi Baiti"/>
+        <a:font script="Tibt" typeface="Microsoft Himalaya"/>
+        <a:font script="Thaa" typeface="MV Boli"/>
+        <a:font script="Deva" typeface="Mangal"/>
+        <a:font script="Telu" typeface="Gautami"/>
+        <a:font script="Taml" typeface="Latha"/>
+        <a:font script="Syrc" typeface="Estrangelo Edessa"/>
+        <a:font script="Orya" typeface="Kalinga"/>
+        <a:font script="Mlym" typeface="Kartika"/>
+        <a:font script="Laoo" typeface="DokChampa"/>
+        <a:font script="Sinh" typeface="Iskoola Pota"/>
+        <a:font script="Mong" typeface="Mongolian Baiti"/>
+        <a:font script="Viet" typeface="Arial"/>
+        <a:font script="Uigh" typeface="Microsoft Uighur"/>
+        <a:font script="Geor" typeface="Sylfaen"/>
+      </a:minorFont>
+    </a:fontScheme>
+    <a:fmtScheme name="Office">
+      <a:fillStyleLst>
         <a:solidFill>
-          <a:schemeClr val="phClr">
-            <a:tint val="95000"/>
-            <a:satMod val="170000"/>
-          </a:schemeClr>
+          <a:schemeClr val="phClr"/>
         </a:solidFill>
         <a:gradFill rotWithShape="1">
           <a:gsLst>
             <a:gs pos="0">
               <a:schemeClr val="phClr">
-                <a:tint val="93000"/>
-                <a:satMod val="150000"/>
-                <a:shade val="98000"/>
-                <a:lumMod val="102000"/>
+                <a:tint val="50000"/>
+                <a:satMod val="300000"/>
               </a:schemeClr>
             </a:gs>
-            <a:gs pos="50000">
+            <a:gs pos="35000">
               <a:schemeClr val="phClr">
-                <a:tint val="98000"/>
-                <a:satMod val="130000"/>
-                <a:shade val="90000"/>
-                <a:lumMod val="103000"/>
+                <a:tint val="37000"/>
+                <a:satMod val="300000"/>
               </a:schemeClr>
             </a:gs>
             <a:gs pos="100000">
               <a:schemeClr val="phClr">
-                <a:shade val="63000"/>
-                <a:satMod val="120000"/>
+                <a:tint val="15000"/>
+                <a:satMod val="350000"/>
               </a:schemeClr>
             </a:gs>
           </a:gsLst>
-          <a:lin ang="5400000" scaled="0"/>
+          <a:lin ang="16200000" scaled="1"/>
+        </a:gradFill>
+        <a:gradFill rotWithShape="1">
+          <a:gsLst>
+            <a:gs pos="0">
+              <a:schemeClr val="phClr">
+                <a:tint val="100000"/>
+                <a:shade val="100000"/>
+                <a:satMod val="130000"/>
+              </a:schemeClr>
+            </a:gs>
+            <a:gs pos="100000">
+              <a:schemeClr val="phClr">
+                <a:tint val="50000"/>
+                <a:shade val="100000"/>
+                <a:satMod val="350000"/>
+              </a:schemeClr>
+            </a:gs>
+          </a:gsLst>
+          <a:lin ang="16200000" scaled="0"/>
+        </a:gradFill>
+      </a:fillStyleLst>
+      <a:lnStyleLst>
+        <a:ln w="9525" cap="flat" cmpd="sng" algn="ctr">
+          <a:solidFill>
+            <a:schemeClr val="phClr">
+              <a:shade val="95000"/>
+              <a:satMod val="105000"/>
+            </a:schemeClr>
+          </a:solidFill>
+          <a:prstDash val="solid"/>
+        </a:ln>
+        <a:ln w="25400" cap="flat" cmpd="sng" algn="ctr">
+          <a:solidFill>
+            <a:schemeClr val="phClr"/>
+          </a:solidFill>
+          <a:prstDash val="solid"/>
+        </a:ln>
+        <a:ln w="38100" cap="flat" cmpd="sng" algn="ctr">
+          <a:solidFill>
+            <a:schemeClr val="phClr"/>
+          </a:solidFill>
+          <a:prstDash val="solid"/>
+        </a:ln>
+      </a:lnStyleLst>
+      <a:effectStyleLst>
+        <a:effectStyle>
+          <a:effectLst>
+            <a:outerShdw blurRad="40000" dist="20000" dir="5400000" rotWithShape="0">
+              <a:srgbClr val="000000">
+                <a:alpha val="38000"/>
+              </a:srgbClr>
+            </a:outerShdw>
+          </a:effectLst>
+        </a:effectStyle>
+        <a:effectStyle>
+          <a:effectLst>
+            <a:outerShdw blurRad="40000" dist="23000" dir="5400000" rotWithShape="0">
+              <a:srgbClr val="000000">
+                <a:alpha val="35000"/>
+              </a:srgbClr>
+            </a:outerShdw>
+          </a:effectLst>
+        </a:effectStyle>
+        <a:effectStyle>
+          <a:effectLst>
+            <a:outerShdw blurRad="40000" dist="23000" dir="5400000" rotWithShape="0">
+              <a:srgbClr val="000000">
+                <a:alpha val="35000"/>
+              </a:srgbClr>
+            </a:outerShdw>
+          </a:effectLst>
+          <a:scene3d>
+            <a:camera prst="orthographicFront">
+              <a:rot lat="0" lon="0" rev="0"/>
+            </a:camera>
+            <a:lightRig rig="threePt" dir="t">
+              <a:rot lat="0" lon="0" rev="1200000"/>
+            </a:lightRig>
+          </a:scene3d>
+          <a:sp3d>
+            <a:bevelT w="63500" h="25400"/>
+          </a:sp3d>
+        </a:effectStyle>
+      </a:effectStyleLst>
+      <a:bgFillStyleLst>
+        <a:solidFill>
+          <a:schemeClr val="phClr"/>
+        </a:solidFill>
+        <a:gradFill rotWithShape="1">
+          <a:gsLst>
+            <a:gs pos="0">
+              <a:schemeClr val="phClr">
+                <a:tint val="40000"/>
+                <a:satMod val="350000"/>
+              </a:schemeClr>
+            </a:gs>
+            <a:gs pos="40000">
+              <a:schemeClr val="phClr">
+                <a:tint val="45000"/>
+                <a:shade val="99000"/>
+                <a:satMod val="350000"/>
+              </a:schemeClr>
+            </a:gs>
+            <a:gs pos="100000">
+              <a:schemeClr val="phClr">
+                <a:shade val="20000"/>
+                <a:satMod val="255000"/>
+              </a:schemeClr>
+            </a:gs>
+          </a:gsLst>
+          <a:path path="circle">
+            <a:fillToRect l="50000" t="-80000" r="50000" b="180000"/>
+          </a:path>
+        </a:gradFill>
+        <a:gradFill rotWithShape="1">
+          <a:gsLst>
+            <a:gs pos="0">
+              <a:schemeClr val="phClr">
+                <a:tint val="80000"/>
+                <a:satMod val="300000"/>
+              </a:schemeClr>
+            </a:gs>
+            <a:gs pos="100000">
+              <a:schemeClr val="phClr">
+                <a:shade val="30000"/>
+                <a:satMod val="200000"/>
+              </a:schemeClr>
+            </a:gs>
+          </a:gsLst>
+          <a:path path="circle">
+            <a:fillToRect l="50000" t="50000" r="50000" b="50000"/>
+          </a:path>
         </a:gradFill>
       </a:bgFillStyleLst>
     </a:fmtScheme>
   </a:themeElements>
-  <a:objectDefaults/>
+  <a:objectDefaults>
+    <a:spDef>
+      <a:spPr/>
+      <a:bodyPr/>
+      <a:lstStyle/>
+      <a:style>
+        <a:lnRef idx="1">
+          <a:schemeClr val="accent1"/>
+        </a:lnRef>
+        <a:fillRef idx="3">
+          <a:schemeClr val="accent1"/>
+        </a:fillRef>
+        <a:effectRef idx="2">
+          <a:schemeClr val="accent1"/>
+        </a:effectRef>
+        <a:fontRef idx="minor">
+          <a:schemeClr val="lt1"/>
+        </a:fontRef>
+      </a:style>
+    </a:spDef>
+    <a:lnDef>
+      <a:spPr/>
+      <a:bodyPr/>
+      <a:lstStyle/>
+      <a:style>
+        <a:lnRef idx="2">
+          <a:schemeClr val="accent1"/>
+        </a:lnRef>
+        <a:fillRef idx="0">
+          <a:schemeClr val="accent1"/>
+        </a:fillRef>
+        <a:effectRef idx="1">
+          <a:schemeClr val="accent1"/>
+        </a:effectRef>
+        <a:fontRef idx="minor">
+          <a:schemeClr val="tx1"/>
+        </a:fontRef>
+      </a:style>
+    </a:lnDef>
+  </a:objectDefaults>
   <a:extraClrSchemeLst/>
-  <a:extLst>
-    <a:ext uri="{05A4C25C-085E-4340-85A3-A5531E510DB2}">
-      <thm15:themeFamily xmlns:thm15="http://schemas.microsoft.com/office/thememl/2012/main" name="Office Theme" id="{62F939B6-93AF-4DB8-9C6B-D6C7DFDC589F}" vid="{4A3C46E8-61CC-4603-A589-7422A47A8E4A}"/>
-    </a:ext>
-  </a:extLst>
 </a:theme>
 </file>
--- a/slides.pptx
+++ b/slides.pptx
@@ -510,7 +510,7 @@
           <a:lstStyle/>
           <a:p>
             <a:r>
-              <a:t>Hi, I'm Tomer Weller, CPO at the Stellar Development Foundation. I've been in crypto for almost 9 years and for the last couple of years, privacy has been my main focus. This talk is about what we've learned in discussions with institutions about privacy.</a:t>
+              <a:t>Hi, I'm Tomer, CPO at the Stellar Development Foundation. I've been in crypto for almost 9 years and for the last couple of years, privacy has been one of my focal points. This talk is about what we've learned in discussions with institutions about privacy.</a:t>
             </a:r>
           </a:p>
         </p:txBody>
@@ -686,7 +686,7 @@
           <a:p/>
           <a:p>
             <a:r>
-              <a:t>For these institutions privacy means something different -- it means managing visibility in a way that allows them to stay competitive but also in compliance.</a:t>
+              <a:t>For these institutions privacy means something different -- it means managing visibility in a way that allows them to stay competitive and compliant.</a:t>
             </a:r>
           </a:p>
           <a:p/>
@@ -792,7 +792,7 @@
           <a:p/>
           <a:p>
             <a:r>
-              <a:t>Transition: This is what I call "Privacy Dead Ends".</a:t>
+              <a:t>Transition: Not recognizing the privacy spectrum has led us to develop what I call "Privacy Dead Ends".</a:t>
             </a:r>
           </a:p>
         </p:txBody>
@@ -862,13 +862,13 @@
           <a:lstStyle/>
           <a:p>
             <a:r>
-              <a:t>When we started looking at privacy for Stellar, we realized that most privacy solutions end up in one of two failure modes, or "dead ends".</a:t>
+              <a:t>When we started looking at privacy for Stellar, we realized that most privacy solutions today end up in one of two failure modes, or "dead ends".</a:t>
             </a:r>
           </a:p>
           <a:p/>
           <a:p>
             <a:r>
-              <a:t>All-or-Nothing: Privacy solutions that have two modes: full transparency or full privacy, nothing in between. This can take the shape of a smart contract pool, an L2 or an appchain - but the premise is the same. Unfortunately, this doesn't leave room for regulated financial institutions to engage with.</a:t>
+              <a:t>All-or-Nothing: Privacy solutions that have two modes: full transparency or full privacy, nothing in between. This can take the shape of a smart contract pool, an L2 or an appchain - but the premise is the same: all or nothing. Unfortunately, this doesn't leave room for nuance for regulated financial institutions to engage with.</a:t>
             </a:r>
           </a:p>
           <a:p/>
@@ -950,31 +950,25 @@
           <a:lstStyle/>
           <a:p>
             <a:r>
-              <a:t>The answer is simple: a clear architectural separation.</a:t>
+              <a:t>We think that the answer is simple: a clear architectural separation.</a:t>
             </a:r>
           </a:p>
           <a:p/>
           <a:p>
             <a:r>
-              <a:t>An open, transparent base layer -- a maximally auditable source of truth. This is the default - this is the primary issuance platform. Anyone can verify - interoperability is trivial.</a:t>
+              <a:t>Transparency first. The base layer stays open and auditable. This might come as a surprise given that this is a talk about privacy but transparency is a core value proposition of blockchains for institutions. The fact that an executive at an asset management company can go on a block explorer and see the total supply of an asset and its distribution - that is a feature - not a bug - they love that shit.</a:t>
             </a:r>
           </a:p>
           <a:p/>
           <a:p>
             <a:r>
-              <a:t>Privacy protocols built on top. Different privacy guarantees, different administrative controls, different underlying tech.</a:t>
+              <a:t>Building blocks for privacy. The base layer should provide the primitives that enable privacy -- without enshrining a specific type of privacy. We've seen L1s try to enshrine privacy - sometimes it ends poorly with bugs, sometimes it's just obsolete by the time it comes out. With Stellar we took a building blocks approach and our X-Ray upgrade earlier this year introduced an advanced set of ZK primitives that now enable many different privacy protocols.</a:t>
             </a:r>
           </a:p>
           <a:p/>
           <a:p>
             <a:r>
-              <a:t>Why transparency first? This might come as a surprise given that this is a talk about privacy but transparency is a core value proposition of blockchains. The fact that an executive at an asset manager company can go on a block explorer and see the total supply of an asset and its distribution - that is a feature - not a bug - they love that shit.</a:t>
-            </a:r>
-          </a:p>
-          <a:p/>
-          <a:p>
-            <a:r>
-              <a:t>With that said, our base layers should provide a rich set of building blocks for privacy. Stellar's X-Ray upgrade is an example of this approach -- adding ZK primitives (BN254, Poseidon) at the protocol level so that application developers can build configurable privacy without compromising the transparency of the base chain.</a:t>
+              <a:t>And that's the final layer: Privacy protocols on top. Different protocols for different privacy guarantees, different administrative controls, different underlying tech. Most importantly: there will be many of them.</a:t>
             </a:r>
           </a:p>
           <a:p/>
@@ -1050,25 +1044,25 @@
           <a:lstStyle/>
           <a:p>
             <a:r>
-              <a:t>We're going to focus on Private Payments. There's interesting stuff happening in private defi but these are still a ways out.</a:t>
+              <a:t>We're going to focus on Private Payments. There's interesting stuff happening in private defi and trading but these are still a ways out and payments are by far the most important and immediate use case.</a:t>
             </a:r>
           </a:p>
           <a:p/>
           <a:p>
             <a:r>
-              <a:t>The two main families of private payment protocols that we see are confidential tokens and privacy pools.</a:t>
+              <a:t>We're seeing two main families of private payment protocols these days, the first one is confidential tokens.</a:t>
             </a:r>
           </a:p>
           <a:p/>
           <a:p>
             <a:r>
-              <a:t>Confidential Tokens: Hide the what -- payment amounts and balances are concealed. But the sender and receiver are still visible on-chain. You know who's transacting, you just can't see how much. This is great for when counterparty relationships are known - for example with payroll, people know I'm employed by SDF but my salary is private. There are a bunch of different implementations of this. Stellar is part of the confidential token association and we're working with OpenZeppelin on an implementation. Narrower privacy guarantees but the tech is fairly scalable and it's a bit easier for compliance.</a:t>
+              <a:t>Confidential Tokens: Hide the what -- payment amounts and balances are concealed. But the sender and receiver are still visible on-chain. You know who's transacting, you just can't see how much. This is great for when counterparty relationships are known. For example with payroll, people know I'm employed by SDF but my salary is private. There are a bunch of different implementations of this. Stellar is part of the confidential token association and we're working with OpenZeppelin on an implementation. Confidential tokens deliver narrower privacy guarantees but the tech is fairly scalable and it's a bit easier for compliance.</a:t>
             </a:r>
           </a:p>
           <a:p/>
           <a:p>
             <a:r>
-              <a:t>Privacy Pools: Payment protocols that also hide the who -- funds are mixed so that sender and receivers identities are hidden. This provides anonymity, not just confidentiality. Much stronger privacy guarantees but they inherently mix funds, which means legitimate funds can be commingled with illicit funds - which there are ways to tackle.</a:t>
+              <a:t>The second family we're seeing are privacy pools. These are payment protocols that hide the what and the who -- funds are mixed so that sender and receiver identities are hidden. This provides anonymity, not just confidentiality. Some notable examples are 0xBow in the Ethereum ecosystem, and Nethermind is building a dedicated Stellar implementation -- SPP (Stellar Private Payments). Privacy Pools have much stronger privacy guarantees but they inherently mix funds, which means legitimate funds can be commingled with illicit funds - which there are ways to tackle.</a:t>
             </a:r>
           </a:p>
           <a:p/>
@@ -1144,43 +1138,43 @@
           <a:lstStyle/>
           <a:p>
             <a:r>
-              <a:t>At Stellar, we've been working with various builders in the space to define a compliance menu of opt-in administrative controls. The asterisk is deliberate. First of all I'm not a lawyer, and also regulators haven't defined what compliance looks like for on-chain privacy yet. These are the administrative controls we're starting to see as requirements, this is not a comprehensive list and the idea is to have these as configurable opt-in.</a:t>
+              <a:t>At Stellar, we've been working with various builders in the space to define a compliance menu of opt-in administrative controls. The asterisk is deliberate. First of all I'm not a lawyer, and also regulators haven't defined what compliance looks like for on-chain privacy yet. These are the administrative controls we're starting to see as requirements, this is not a comprehensive list and the idea is to have these as configurable opt-in as needed.</a:t>
             </a:r>
           </a:p>
           <a:p/>
           <a:p>
             <a:r>
-              <a:t>Selective Disclosure (View Keys): The user chooses to reveal specific transaction details to specific parties. This allows the user to show a source of funds on demand.</a:t>
+              <a:t>Selective Disclosure (View Keys): The user chooses to reveal specific transaction details to specific parties. This allows the user to show a source of funds on demand. This is a very powerful primitive that has existed for a while, but unfortunately we haven't seen great products built around it yet.</a:t>
             </a:r>
           </a:p>
           <a:p/>
           <a:p>
             <a:r>
-              <a:t>Non-Selective Disclosure (Auditor Keys): A third party authority holds a key that can view all transactions within a scope. This means that if a law enforcement agency has a subpoena they have an actual door to knock on.</a:t>
+              <a:t>Non-Selective Disclosure (Auditor Keys): A third party authority (e.g., an issuer or a pool operator) holds a key that can view all transactions within a scope. This means that if a law enforcement agency has a subpoena they have an actual door to knock on.</a:t>
             </a:r>
           </a:p>
           <a:p/>
           <a:p>
             <a:r>
-              <a:t>Association Sets: An allow list controlled by a pool operator - it ensures that all funds mixed come from approved addresses and reduces the risk of commingling with illicit funds.</a:t>
+              <a:t>Association Sets have been pioneered with Privacy Pools, these are allow lists controlled by a pool operator - they ensure that all funds mixed come from approved addresses and reduces the risk of commingling with illicit funds.</a:t>
             </a:r>
           </a:p>
           <a:p/>
           <a:p>
             <a:r>
-              <a:t>Forced Transparent Withdrawals: What happens if an account gets revoked? They're forced to withdraw transparently -- no hiding behind the pool on the way out. 0xBow calls this rage quit.</a:t>
+              <a:t>Forced Transparent Withdrawals: These address an issue with association sets: what happens if an account gets revoked? They're forced to withdraw transparently with no privacy guarantees. 0xBow calls this rage quit and we're starting to see more of these.</a:t>
             </a:r>
           </a:p>
           <a:p/>
           <a:p>
             <a:r>
-              <a:t>Clawback: If clawbacks are triggering for you then you are in the wrong room and you are not ready for what's coming next. Tokenization is at full speed and regulated assets often require clawback capabilities.</a:t>
+              <a:t>Clawback: And finally, yes - clawback. If clawbacks are triggering for you then you are in the wrong room and you are not ready for what's coming next. Tokenization is at full speed and regulated assets often require clawback capabilities. If we want to see RWA issuers have first class support for privacy on blockchains - they need clawback capabilities.</a:t>
             </a:r>
           </a:p>
           <a:p/>
           <a:p>
             <a:r>
-              <a:t>Transition: These are dials, not switches. Different combinations serve different jurisdictions, use cases, and risk profiles.</a:t>
+              <a:t>Transition: This menu is a starting point to let you compose the type of compliance you need. If you're in this room and this menu is offensive to you - let us know - it's work in progress and we'd love to get feedback.</a:t>
             </a:r>
           </a:p>
         </p:txBody>
@@ -1256,19 +1250,19 @@
           <a:p/>
           <a:p>
             <a:r>
-              <a:t>We've been building privacy with ideology first and that's great -- but it's not enough. Institutions need privacy too, and for them it's more nuanced.</a:t>
+              <a:t>In crypto, we've been building privacy with ideology first and that's great -- but it's not enough. Institutions need privacy too, and for them it's more nuanced.</a:t>
             </a:r>
           </a:p>
           <a:p/>
           <a:p>
             <a:r>
-              <a:t>Privacy is a spectrum. Different jurisdictions, different use cases, different tech. There's no single answer and that's okay -- that's actually the point.</a:t>
+              <a:t>Privacy is a spectrum. Different jurisdictions, different use cases, different tech. There's no single answer and that's okay.</a:t>
             </a:r>
           </a:p>
           <a:p/>
           <a:p>
             <a:r>
-              <a:t>The right approach is transparency first -- keep the base layer open, build configurable privacy on top. Confidential tokens, privacy pools, a compliance menu of administrative controls. Dials, not switches.</a:t>
+              <a:t>The right approach is transparency first -- keep the base layer open, provide the low-level building blocks and build configurable privacy on top: things like confidential tokens and privacy pools, administrative controls as needed.</a:t>
             </a:r>
           </a:p>
           <a:p/>
@@ -4849,7 +4843,7 @@
               </a:defRPr>
             </a:pPr>
             <a:r>
-              <a:t>Transparency First</a:t>
+              <a:t>The Privacy Stack</a:t>
             </a:r>
           </a:p>
         </p:txBody>
@@ -4882,7 +4876,7 @@
                 </a:solidFill>
                 <a:latin typeface="Inter"/>
               </a:rPr>
-              <a:t>Open, transparent base layer</a:t>
+              <a:t>Transparency first</a:t>
             </a:r>
             <a:r>
               <a:rPr sz="2200" b="0">
@@ -4891,7 +4885,7 @@
                 </a:solidFill>
                 <a:latin typeface="Inter"/>
               </a:rPr>
-              <a:t> -- maximally auditable source of truth</a:t>
+              <a:t> -- the base layer stays open and auditable</a:t>
             </a:r>
           </a:p>
         </p:txBody>
@@ -4924,7 +4918,7 @@
                 </a:solidFill>
                 <a:latin typeface="Inter"/>
               </a:rPr>
-              <a:t>Privacy protocols built on top</a:t>
+              <a:t>Building blocks for privacy</a:t>
             </a:r>
             <a:r>
               <a:rPr sz="2200" b="0">
@@ -4933,7 +4927,49 @@
                 </a:solidFill>
                 <a:latin typeface="Inter"/>
               </a:rPr>
-              <a:t> -- configurable, opt-in, different tech for different needs</a:t>
+              <a:t> -- primitives that enable privacy, without enshrining a specific type</a:t>
+            </a:r>
+          </a:p>
+        </p:txBody>
+      </p:sp>
+      <p:sp>
+        <p:nvSpPr>
+          <p:cNvPr id="5" name="TextBox 4"/>
+          <p:cNvSpPr txBox="1"/>
+          <p:nvPr/>
+        </p:nvSpPr>
+        <p:spPr>
+          <a:xfrm>
+            <a:off x="1097280" y="4389120"/>
+            <a:ext cx="9601200" cy="548640"/>
+          </a:xfrm>
+          <a:prstGeom prst="rect">
+            <a:avLst/>
+          </a:prstGeom>
+          <a:noFill/>
+        </p:spPr>
+        <p:txBody>
+          <a:bodyPr wrap="square"/>
+          <a:lstStyle/>
+          <a:p>
+            <a:pPr algn="l"/>
+            <a:r>
+              <a:rPr sz="2200" b="1">
+                <a:solidFill>
+                  <a:srgbClr val="FDDA24"/>
+                </a:solidFill>
+                <a:latin typeface="Inter"/>
+              </a:rPr>
+              <a:t>Privacy protocols on top</a:t>
+            </a:r>
+            <a:r>
+              <a:rPr sz="2200" b="0">
+                <a:solidFill>
+                  <a:srgbClr val="D6D2C4"/>
+                </a:solidFill>
+                <a:latin typeface="Inter"/>
+              </a:rPr>
+              <a:t> -- different guarantees, different controls, many of them</a:t>
             </a:r>
           </a:p>
         </p:txBody>
@@ -5017,6 +5053,39 @@
                       </p:childTnLst>
                     </p:cTn>
                   </p:par>
+                  <p:par>
+                    <p:cTn id="9" fill="hold">
+                      <p:stCondLst>
+                        <p:cond delay="0"/>
+                      </p:stCondLst>
+                      <p:childTnLst>
+                        <p:par>
+                          <p:cTn id="10" presetID="1" presetClass="entr" presetSubtype="0" fill="hold" nodeType="clickEffect">
+                            <p:stCondLst>
+                              <p:cond delay="0"/>
+                            </p:stCondLst>
+                            <p:childTnLst>
+                              <p:set>
+                                <p:cBhvr>
+                                  <p:cTn id="11" dur="1" fill="hold">
+                                    <p:stCondLst>
+                                      <p:cond delay="0"/>
+                                    </p:stCondLst>
+                                  </p:cTn>
+                                  <p:tgtEl>
+                                    <p:spTgt spid="5"/>
+                                  </p:tgtEl>
+                                </p:cBhvr>
+                                <p:to>
+                                  <p:strVal val="visible"/>
+                                </p:to>
+                              </p:set>
+                            </p:childTnLst>
+                          </p:cTn>
+                        </p:par>
+                      </p:childTnLst>
+                    </p:cTn>
+                  </p:par>
                 </p:childTnLst>
               </p:cTn>
               <p:prevCondLst>
@@ -5173,7 +5242,7 @@
                 </a:solidFill>
                 <a:latin typeface="Inter"/>
               </a:rPr>
-              <a:t> -- hide the who (sender, receiver)</a:t>
+              <a:t> -- hide the what and the who (sender, receiver)</a:t>
             </a:r>
           </a:p>
         </p:txBody>

--- a/slides.pptx
+++ b/slides.pptx
@@ -4792,6 +4792,10 @@
         </p:cTn>
       </p:par>
     </p:tnLst>
+    <p:bldLst>
+      <p:bldP spid="3" grpId="0" animBg="1"/>
+      <p:bldP spid="4" grpId="0" animBg="1"/>
+    </p:bldLst>
   </p:timing>
 </p:sld>
 </file>
@@ -5107,6 +5111,11 @@
         </p:cTn>
       </p:par>
     </p:tnLst>
+    <p:bldLst>
+      <p:bldP spid="3" grpId="0" animBg="1"/>
+      <p:bldP spid="4" grpId="0" animBg="1"/>
+      <p:bldP spid="5" grpId="0" animBg="1"/>
+    </p:bldLst>
   </p:timing>
 </p:sld>
 </file>
@@ -5347,6 +5356,10 @@
         </p:cTn>
       </p:par>
     </p:tnLst>
+    <p:bldLst>
+      <p:bldP spid="3" grpId="0" animBg="1"/>
+      <p:bldP spid="4" grpId="0" animBg="1"/>
+    </p:bldLst>
   </p:timing>
 </p:sld>
 </file>
@@ -5767,6 +5780,13 @@
         </p:cTn>
       </p:par>
     </p:tnLst>
+    <p:bldLst>
+      <p:bldP spid="3" grpId="0" animBg="1"/>
+      <p:bldP spid="4" grpId="0" animBg="1"/>
+      <p:bldP spid="5" grpId="0" animBg="1"/>
+      <p:bldP spid="6" grpId="0" animBg="1"/>
+      <p:bldP spid="7" grpId="0" animBg="1"/>
+    </p:bldLst>
   </p:timing>
 </p:sld>
 </file>

--- a/slides.pptx
+++ b/slides.pptx
@@ -4522,8 +4522,8 @@
         </p:nvSpPr>
         <p:spPr>
           <a:xfrm>
-            <a:off x="1097280" y="2560320"/>
-            <a:ext cx="9601200" cy="1828800"/>
+            <a:off x="1097280" y="1371600"/>
+            <a:ext cx="9601200" cy="1371600"/>
           </a:xfrm>
           <a:prstGeom prst="rect">
             <a:avLst/>
@@ -4548,11 +4548,271 @@
           </a:p>
         </p:txBody>
       </p:sp>
+      <p:sp>
+        <p:nvSpPr>
+          <p:cNvPr id="3" name="TextBox 2"/>
+          <p:cNvSpPr txBox="1"/>
+          <p:nvPr/>
+        </p:nvSpPr>
+        <p:spPr>
+          <a:xfrm>
+            <a:off x="1097280" y="3108960"/>
+            <a:ext cx="9601200" cy="548640"/>
+          </a:xfrm>
+          <a:prstGeom prst="rect">
+            <a:avLst/>
+          </a:prstGeom>
+          <a:noFill/>
+        </p:spPr>
+        <p:txBody>
+          <a:bodyPr wrap="square"/>
+          <a:lstStyle/>
+          <a:p>
+            <a:pPr algn="l"/>
+            <a:r>
+              <a:rPr sz="2200" b="1">
+                <a:solidFill>
+                  <a:srgbClr val="FDDA24"/>
+                </a:solidFill>
+                <a:latin typeface="Inter"/>
+              </a:rPr>
+              <a:t>Jurisdictions vary</a:t>
+            </a:r>
+            <a:r>
+              <a:rPr sz="2200" b="0">
+                <a:solidFill>
+                  <a:srgbClr val="D6D2C4"/>
+                </a:solidFill>
+                <a:latin typeface="Inter"/>
+              </a:rPr>
+              <a:t> -- US ≠ EU ≠ Singapore ≠ Brazil</a:t>
+            </a:r>
+          </a:p>
+        </p:txBody>
+      </p:sp>
+      <p:sp>
+        <p:nvSpPr>
+          <p:cNvPr id="4" name="TextBox 3"/>
+          <p:cNvSpPr txBox="1"/>
+          <p:nvPr/>
+        </p:nvSpPr>
+        <p:spPr>
+          <a:xfrm>
+            <a:off x="1097280" y="3749040"/>
+            <a:ext cx="9601200" cy="548640"/>
+          </a:xfrm>
+          <a:prstGeom prst="rect">
+            <a:avLst/>
+          </a:prstGeom>
+          <a:noFill/>
+        </p:spPr>
+        <p:txBody>
+          <a:bodyPr wrap="square"/>
+          <a:lstStyle/>
+          <a:p>
+            <a:pPr algn="l"/>
+            <a:r>
+              <a:rPr sz="2200" b="1">
+                <a:solidFill>
+                  <a:srgbClr val="FDDA24"/>
+                </a:solidFill>
+                <a:latin typeface="Inter"/>
+              </a:rPr>
+              <a:t>Use cases vary</a:t>
+            </a:r>
+            <a:r>
+              <a:rPr sz="2200" b="0">
+                <a:solidFill>
+                  <a:srgbClr val="D6D2C4"/>
+                </a:solidFill>
+                <a:latin typeface="Inter"/>
+              </a:rPr>
+              <a:t> -- payroll ≠ trading ≠ lending ≠ remittances</a:t>
+            </a:r>
+          </a:p>
+        </p:txBody>
+      </p:sp>
+      <p:sp>
+        <p:nvSpPr>
+          <p:cNvPr id="5" name="TextBox 4"/>
+          <p:cNvSpPr txBox="1"/>
+          <p:nvPr/>
+        </p:nvSpPr>
+        <p:spPr>
+          <a:xfrm>
+            <a:off x="1097280" y="4389120"/>
+            <a:ext cx="9601200" cy="548640"/>
+          </a:xfrm>
+          <a:prstGeom prst="rect">
+            <a:avLst/>
+          </a:prstGeom>
+          <a:noFill/>
+        </p:spPr>
+        <p:txBody>
+          <a:bodyPr wrap="square"/>
+          <a:lstStyle/>
+          <a:p>
+            <a:pPr algn="l"/>
+            <a:r>
+              <a:rPr sz="2200" b="1">
+                <a:solidFill>
+                  <a:srgbClr val="FDDA24"/>
+                </a:solidFill>
+                <a:latin typeface="Inter"/>
+              </a:rPr>
+              <a:t>Technology varies</a:t>
+            </a:r>
+            <a:r>
+              <a:rPr sz="2200" b="0">
+                <a:solidFill>
+                  <a:srgbClr val="D6D2C4"/>
+                </a:solidFill>
+                <a:latin typeface="Inter"/>
+              </a:rPr>
+              <a:t> -- ZK, FHE, MPC, TEEs</a:t>
+            </a:r>
+          </a:p>
+        </p:txBody>
+      </p:sp>
     </p:spTree>
   </p:cSld>
   <p:clrMapOvr>
     <a:masterClrMapping/>
   </p:clrMapOvr>
+  <p:timing>
+    <p:tnLst>
+      <p:par>
+        <p:cTn id="1" dur="indefinite" restart="never" nodeType="tmRoot">
+          <p:childTnLst>
+            <p:seq concurrent="1" nextAc="seek">
+              <p:cTn id="2" dur="indefinite" nodeType="mainSeq">
+                <p:childTnLst>
+                  <p:par>
+                    <p:cTn id="3" fill="hold">
+                      <p:stCondLst>
+                        <p:cond delay="0"/>
+                      </p:stCondLst>
+                      <p:childTnLst>
+                        <p:par>
+                          <p:cTn id="4" presetID="1" presetClass="entr" presetSubtype="0" fill="hold" nodeType="clickEffect">
+                            <p:stCondLst>
+                              <p:cond delay="0"/>
+                            </p:stCondLst>
+                            <p:childTnLst>
+                              <p:set>
+                                <p:cBhvr>
+                                  <p:cTn id="5" dur="1" fill="hold">
+                                    <p:stCondLst>
+                                      <p:cond delay="0"/>
+                                    </p:stCondLst>
+                                  </p:cTn>
+                                  <p:tgtEl>
+                                    <p:spTgt spid="3"/>
+                                  </p:tgtEl>
+                                </p:cBhvr>
+                                <p:to>
+                                  <p:strVal val="visible"/>
+                                </p:to>
+                              </p:set>
+                            </p:childTnLst>
+                          </p:cTn>
+                        </p:par>
+                      </p:childTnLst>
+                    </p:cTn>
+                  </p:par>
+                  <p:par>
+                    <p:cTn id="6" fill="hold">
+                      <p:stCondLst>
+                        <p:cond delay="0"/>
+                      </p:stCondLst>
+                      <p:childTnLst>
+                        <p:par>
+                          <p:cTn id="7" presetID="1" presetClass="entr" presetSubtype="0" fill="hold" nodeType="clickEffect">
+                            <p:stCondLst>
+                              <p:cond delay="0"/>
+                            </p:stCondLst>
+                            <p:childTnLst>
+                              <p:set>
+                                <p:cBhvr>
+                                  <p:cTn id="8" dur="1" fill="hold">
+                                    <p:stCondLst>
+                                      <p:cond delay="0"/>
+                                    </p:stCondLst>
+                                  </p:cTn>
+                                  <p:tgtEl>
+                                    <p:spTgt spid="4"/>
+                                  </p:tgtEl>
+                                </p:cBhvr>
+                                <p:to>
+                                  <p:strVal val="visible"/>
+                                </p:to>
+                              </p:set>
+                            </p:childTnLst>
+                          </p:cTn>
+                        </p:par>
+                      </p:childTnLst>
+                    </p:cTn>
+                  </p:par>
+                  <p:par>
+                    <p:cTn id="9" fill="hold">
+                      <p:stCondLst>
+                        <p:cond delay="0"/>
+                      </p:stCondLst>
+                      <p:childTnLst>
+                        <p:par>
+                          <p:cTn id="10" presetID="1" presetClass="entr" presetSubtype="0" fill="hold" nodeType="clickEffect">
+                            <p:stCondLst>
+                              <p:cond delay="0"/>
+                            </p:stCondLst>
+                            <p:childTnLst>
+                              <p:set>
+                                <p:cBhvr>
+                                  <p:cTn id="11" dur="1" fill="hold">
+                                    <p:stCondLst>
+                                      <p:cond delay="0"/>
+                                    </p:stCondLst>
+                                  </p:cTn>
+                                  <p:tgtEl>
+                                    <p:spTgt spid="5"/>
+                                  </p:tgtEl>
+                                </p:cBhvr>
+                                <p:to>
+                                  <p:strVal val="visible"/>
+                                </p:to>
+                              </p:set>
+                            </p:childTnLst>
+                          </p:cTn>
+                        </p:par>
+                      </p:childTnLst>
+                    </p:cTn>
+                  </p:par>
+                </p:childTnLst>
+              </p:cTn>
+              <p:prevCondLst>
+                <p:cond evt="onPrev" delay="0">
+                  <p:tgtEl>
+                    <p:sldTgt/>
+                  </p:tgtEl>
+                </p:cond>
+              </p:prevCondLst>
+              <p:nextCondLst>
+                <p:cond evt="onNext" delay="0">
+                  <p:tgtEl>
+                    <p:sldTgt/>
+                  </p:tgtEl>
+                </p:cond>
+              </p:nextCondLst>
+            </p:seq>
+          </p:childTnLst>
+        </p:cTn>
+      </p:par>
+    </p:tnLst>
+    <p:bldLst>
+      <p:bldP spid="3" grpId="0" animBg="1"/>
+      <p:bldP spid="4" grpId="0" animBg="1"/>
+      <p:bldP spid="5" grpId="0" animBg="1"/>
+    </p:bldLst>
+  </p:timing>
 </p:sld>
 </file>
 

--- a/slides.pptx
+++ b/slides.pptx
@@ -6077,8 +6077,8 @@
         </p:nvSpPr>
         <p:spPr>
           <a:xfrm>
-            <a:off x="1097280" y="2560320"/>
-            <a:ext cx="9601200" cy="2286000"/>
+            <a:off x="1097280" y="1371600"/>
+            <a:ext cx="9601200" cy="1371600"/>
           </a:xfrm>
           <a:prstGeom prst="rect">
             <a:avLst/>
@@ -6090,7 +6090,7 @@
           <a:lstStyle/>
           <a:p>
             <a:pPr algn="l">
-              <a:defRPr sz="5400" b="1">
+              <a:defRPr sz="4400" b="1">
                 <a:solidFill>
                   <a:srgbClr val="F6F7F8"/>
                 </a:solidFill>
@@ -6107,11 +6107,347 @@
           </a:p>
         </p:txBody>
       </p:sp>
+      <p:sp>
+        <p:nvSpPr>
+          <p:cNvPr id="3" name="TextBox 2"/>
+          <p:cNvSpPr txBox="1"/>
+          <p:nvPr/>
+        </p:nvSpPr>
+        <p:spPr>
+          <a:xfrm>
+            <a:off x="1097280" y="3108960"/>
+            <a:ext cx="9601200" cy="548640"/>
+          </a:xfrm>
+          <a:prstGeom prst="rect">
+            <a:avLst/>
+          </a:prstGeom>
+          <a:noFill/>
+        </p:spPr>
+        <p:txBody>
+          <a:bodyPr wrap="square"/>
+          <a:lstStyle/>
+          <a:p>
+            <a:pPr algn="l"/>
+            <a:r>
+              <a:rPr sz="2200" b="1">
+                <a:solidFill>
+                  <a:srgbClr val="FDDA24"/>
+                </a:solidFill>
+                <a:latin typeface="Inter"/>
+              </a:rPr>
+              <a:t>Ideology first isn't enough</a:t>
+            </a:r>
+            <a:r>
+              <a:rPr sz="2200" b="0">
+                <a:solidFill>
+                  <a:srgbClr val="D6D2C4"/>
+                </a:solidFill>
+                <a:latin typeface="Inter"/>
+              </a:rPr>
+              <a:t> -- institutions need nuanced privacy</a:t>
+            </a:r>
+          </a:p>
+        </p:txBody>
+      </p:sp>
+      <p:sp>
+        <p:nvSpPr>
+          <p:cNvPr id="4" name="TextBox 3"/>
+          <p:cNvSpPr txBox="1"/>
+          <p:nvPr/>
+        </p:nvSpPr>
+        <p:spPr>
+          <a:xfrm>
+            <a:off x="1097280" y="3749040"/>
+            <a:ext cx="9601200" cy="548640"/>
+          </a:xfrm>
+          <a:prstGeom prst="rect">
+            <a:avLst/>
+          </a:prstGeom>
+          <a:noFill/>
+        </p:spPr>
+        <p:txBody>
+          <a:bodyPr wrap="square"/>
+          <a:lstStyle/>
+          <a:p>
+            <a:pPr algn="l"/>
+            <a:r>
+              <a:rPr sz="2200" b="1">
+                <a:solidFill>
+                  <a:srgbClr val="FDDA24"/>
+                </a:solidFill>
+                <a:latin typeface="Inter"/>
+              </a:rPr>
+              <a:t>Privacy is a spectrum</a:t>
+            </a:r>
+            <a:r>
+              <a:rPr sz="2200" b="0">
+                <a:solidFill>
+                  <a:srgbClr val="D6D2C4"/>
+                </a:solidFill>
+                <a:latin typeface="Inter"/>
+              </a:rPr>
+              <a:t> -- jurisdictions, use cases, tech all vary</a:t>
+            </a:r>
+          </a:p>
+        </p:txBody>
+      </p:sp>
+      <p:sp>
+        <p:nvSpPr>
+          <p:cNvPr id="5" name="TextBox 4"/>
+          <p:cNvSpPr txBox="1"/>
+          <p:nvPr/>
+        </p:nvSpPr>
+        <p:spPr>
+          <a:xfrm>
+            <a:off x="1097280" y="4389120"/>
+            <a:ext cx="9601200" cy="548640"/>
+          </a:xfrm>
+          <a:prstGeom prst="rect">
+            <a:avLst/>
+          </a:prstGeom>
+          <a:noFill/>
+        </p:spPr>
+        <p:txBody>
+          <a:bodyPr wrap="square"/>
+          <a:lstStyle/>
+          <a:p>
+            <a:pPr algn="l"/>
+            <a:r>
+              <a:rPr sz="2200" b="1">
+                <a:solidFill>
+                  <a:srgbClr val="FDDA24"/>
+                </a:solidFill>
+                <a:latin typeface="Inter"/>
+              </a:rPr>
+              <a:t>Transparency first</a:t>
+            </a:r>
+            <a:r>
+              <a:rPr sz="2200" b="0">
+                <a:solidFill>
+                  <a:srgbClr val="D6D2C4"/>
+                </a:solidFill>
+                <a:latin typeface="Inter"/>
+              </a:rPr>
+              <a:t> -- open base layer, building blocks, privacy on top</a:t>
+            </a:r>
+          </a:p>
+        </p:txBody>
+      </p:sp>
+      <p:sp>
+        <p:nvSpPr>
+          <p:cNvPr id="6" name="TextBox 5"/>
+          <p:cNvSpPr txBox="1"/>
+          <p:nvPr/>
+        </p:nvSpPr>
+        <p:spPr>
+          <a:xfrm>
+            <a:off x="1097280" y="5029200"/>
+            <a:ext cx="9601200" cy="548640"/>
+          </a:xfrm>
+          <a:prstGeom prst="rect">
+            <a:avLst/>
+          </a:prstGeom>
+          <a:noFill/>
+        </p:spPr>
+        <p:txBody>
+          <a:bodyPr wrap="square"/>
+          <a:lstStyle/>
+          <a:p>
+            <a:pPr algn="l"/>
+            <a:r>
+              <a:rPr sz="2200" b="1">
+                <a:solidFill>
+                  <a:srgbClr val="FDDA24"/>
+                </a:solidFill>
+                <a:latin typeface="Inter"/>
+              </a:rPr>
+              <a:t>The time is now</a:t>
+            </a:r>
+            <a:r>
+              <a:rPr sz="2200" b="0">
+                <a:solidFill>
+                  <a:srgbClr val="D6D2C4"/>
+                </a:solidFill>
+                <a:latin typeface="Inter"/>
+              </a:rPr>
+              <a:t> -- non-hostile regulation, institutions at the table, tech is ready</a:t>
+            </a:r>
+          </a:p>
+        </p:txBody>
+      </p:sp>
     </p:spTree>
   </p:cSld>
   <p:clrMapOvr>
     <a:masterClrMapping/>
   </p:clrMapOvr>
+  <p:timing>
+    <p:tnLst>
+      <p:par>
+        <p:cTn id="1" dur="indefinite" restart="never" nodeType="tmRoot">
+          <p:childTnLst>
+            <p:seq concurrent="1" nextAc="seek">
+              <p:cTn id="2" dur="indefinite" nodeType="mainSeq">
+                <p:childTnLst>
+                  <p:par>
+                    <p:cTn id="3" fill="hold">
+                      <p:stCondLst>
+                        <p:cond delay="0"/>
+                      </p:stCondLst>
+                      <p:childTnLst>
+                        <p:par>
+                          <p:cTn id="4" presetID="1" presetClass="entr" presetSubtype="0" fill="hold" nodeType="clickEffect">
+                            <p:stCondLst>
+                              <p:cond delay="0"/>
+                            </p:stCondLst>
+                            <p:childTnLst>
+                              <p:set>
+                                <p:cBhvr>
+                                  <p:cTn id="5" dur="1" fill="hold">
+                                    <p:stCondLst>
+                                      <p:cond delay="0"/>
+                                    </p:stCondLst>
+                                  </p:cTn>
+                                  <p:tgtEl>
+                                    <p:spTgt spid="3"/>
+                                  </p:tgtEl>
+                                </p:cBhvr>
+                                <p:to>
+                                  <p:strVal val="visible"/>
+                                </p:to>
+                              </p:set>
+                            </p:childTnLst>
+                          </p:cTn>
+                        </p:par>
+                      </p:childTnLst>
+                    </p:cTn>
+                  </p:par>
+                  <p:par>
+                    <p:cTn id="6" fill="hold">
+                      <p:stCondLst>
+                        <p:cond delay="0"/>
+                      </p:stCondLst>
+                      <p:childTnLst>
+                        <p:par>
+                          <p:cTn id="7" presetID="1" presetClass="entr" presetSubtype="0" fill="hold" nodeType="clickEffect">
+                            <p:stCondLst>
+                              <p:cond delay="0"/>
+                            </p:stCondLst>
+                            <p:childTnLst>
+                              <p:set>
+                                <p:cBhvr>
+                                  <p:cTn id="8" dur="1" fill="hold">
+                                    <p:stCondLst>
+                                      <p:cond delay="0"/>
+                                    </p:stCondLst>
+                                  </p:cTn>
+                                  <p:tgtEl>
+                                    <p:spTgt spid="4"/>
+                                  </p:tgtEl>
+                                </p:cBhvr>
+                                <p:to>
+                                  <p:strVal val="visible"/>
+                                </p:to>
+                              </p:set>
+                            </p:childTnLst>
+                          </p:cTn>
+                        </p:par>
+                      </p:childTnLst>
+                    </p:cTn>
+                  </p:par>
+                  <p:par>
+                    <p:cTn id="9" fill="hold">
+                      <p:stCondLst>
+                        <p:cond delay="0"/>
+                      </p:stCondLst>
+                      <p:childTnLst>
+                        <p:par>
+                          <p:cTn id="10" presetID="1" presetClass="entr" presetSubtype="0" fill="hold" nodeType="clickEffect">
+                            <p:stCondLst>
+                              <p:cond delay="0"/>
+                            </p:stCondLst>
+                            <p:childTnLst>
+                              <p:set>
+                                <p:cBhvr>
+                                  <p:cTn id="11" dur="1" fill="hold">
+                                    <p:stCondLst>
+                                      <p:cond delay="0"/>
+                                    </p:stCondLst>
+                                  </p:cTn>
+                                  <p:tgtEl>
+                                    <p:spTgt spid="5"/>
+                                  </p:tgtEl>
+                                </p:cBhvr>
+                                <p:to>
+                                  <p:strVal val="visible"/>
+                                </p:to>
+                              </p:set>
+                            </p:childTnLst>
+                          </p:cTn>
+                        </p:par>
+                      </p:childTnLst>
+                    </p:cTn>
+                  </p:par>
+                  <p:par>
+                    <p:cTn id="12" fill="hold">
+                      <p:stCondLst>
+                        <p:cond delay="0"/>
+                      </p:stCondLst>
+                      <p:childTnLst>
+                        <p:par>
+                          <p:cTn id="13" presetID="1" presetClass="entr" presetSubtype="0" fill="hold" nodeType="clickEffect">
+                            <p:stCondLst>
+                              <p:cond delay="0"/>
+                            </p:stCondLst>
+                            <p:childTnLst>
+                              <p:set>
+                                <p:cBhvr>
+                                  <p:cTn id="14" dur="1" fill="hold">
+                                    <p:stCondLst>
+                                      <p:cond delay="0"/>
+                                    </p:stCondLst>
+                                  </p:cTn>
+                                  <p:tgtEl>
+                                    <p:spTgt spid="6"/>
+                                  </p:tgtEl>
+                                </p:cBhvr>
+                                <p:to>
+                                  <p:strVal val="visible"/>
+                                </p:to>
+                              </p:set>
+                            </p:childTnLst>
+                          </p:cTn>
+                        </p:par>
+                      </p:childTnLst>
+                    </p:cTn>
+                  </p:par>
+                </p:childTnLst>
+              </p:cTn>
+              <p:prevCondLst>
+                <p:cond evt="onPrev" delay="0">
+                  <p:tgtEl>
+                    <p:sldTgt/>
+                  </p:tgtEl>
+                </p:cond>
+              </p:prevCondLst>
+              <p:nextCondLst>
+                <p:cond evt="onNext" delay="0">
+                  <p:tgtEl>
+                    <p:sldTgt/>
+                  </p:tgtEl>
+                </p:cond>
+              </p:nextCondLst>
+            </p:seq>
+          </p:childTnLst>
+        </p:cTn>
+      </p:par>
+    </p:tnLst>
+    <p:bldLst>
+      <p:bldP spid="3" grpId="0" animBg="1"/>
+      <p:bldP spid="4" grpId="0" animBg="1"/>
+      <p:bldP spid="5" grpId="0" animBg="1"/>
+      <p:bldP spid="6" grpId="0" animBg="1"/>
+    </p:bldLst>
+  </p:timing>
 </p:sld>
 </file>
 
